--- a/docs/Presentacion.pptx
+++ b/docs/Presentacion.pptx
@@ -2460,7 +2460,7 @@
           <a:p>
             <a:r>
               <a:rPr lang="en-US" dirty="0"/>
-              <a:t>Ponente 3. Recorre el diagrama de izquierda a derecha: Alumnos realiza Proyectos (con la evaluación), Alumnos pertenece a Promoción, Promoción tiene Proyectos y Promoción tiene Claustro. Señala que la modalidad está en el claustro porque solo claustro.csv trae ese dato, y que en una misma promoción hay profesores presenciales (TA) y online (LI). Da paso al Ponente 4: “Ahora hay que convertir este dibujo en tablas”.</a:t>
+              <a:t>Ponente 3. Recorre el diagrama de izquierda a derecha: Alumnos realiza Proyectos (con la evaluación), Alumnos pertenece a Promoción, Promoción tiene Proyectos y Promoción tiene Claustro. Señala la modalidad: en el claustro, la de cada profesor (en una misma promoción hay TA presenciales y LI online), y en la promoción, TipoModalidad. Da paso al Ponente 4: “Ahora hay que convertir este dibujo en tablas”.</a:t>
             </a:r>
             <a:endParaRPr lang="en-US" dirty="0"/>
           </a:p>
@@ -24509,18 +24509,17 @@
         </p:nvPicPr>
         <p:blipFill>
           <a:blip r:embed="rId1"/>
-          <a:srcRect l="-159" r="-159" t="0" b="0"/>
-          <a:stretch/>
+          <a:stretch>
+            <a:fillRect/>
+          </a:stretch>
         </p:blipFill>
         <p:spPr>
           <a:xfrm>
-            <a:off x="825500" y="1531541"/>
-            <a:ext cx="7467600" cy="3987800"/>
-          </a:xfrm>
-          <a:prstGeom prst="roundRect">
-            <a:avLst>
-              <a:gd name="adj" fmla="val 2229"/>
-            </a:avLst>
+            <a:off x="825500" y="1696285"/>
+            <a:ext cx="7467600" cy="3658311"/>
+          </a:xfrm>
+          <a:prstGeom prst="rect">
+            <a:avLst/>
           </a:prstGeom>
         </p:spPr>
       </p:pic>
@@ -24899,29 +24898,6 @@
           </a:p>
         </p:txBody>
       </p:sp>
-      <p:pic>
-        <p:nvPicPr>
-          <p:cNvPr id="12" name="Image 1" descr="image.png">    </p:cNvPr>
-          <p:cNvPicPr>
-            <a:picLocks noChangeAspect="1"/>
-          </p:cNvPicPr>
-          <p:nvPr/>
-        </p:nvPicPr>
-        <p:blipFill>
-          <a:blip r:embed="rId2"/>
-          <a:srcRect l="0" r="0" t="340" b="340"/>
-          <a:stretch/>
-        </p:blipFill>
-        <p:spPr>
-          <a:xfrm>
-            <a:off x="812800" y="1829246"/>
-            <a:ext cx="7452916" cy="3665637"/>
-          </a:xfrm>
-          <a:prstGeom prst="rect">
-            <a:avLst/>
-          </a:prstGeom>
-        </p:spPr>
-      </p:pic>
     </p:spTree>
   </p:cSld>
   <p:clrMapOvr>

--- a/docs/Presentacion.pptx
+++ b/docs/Presentacion.pptx
@@ -612,7 +612,7 @@
           <a:p>
             <a:r>
               <a:rPr lang="en-US" dirty="0"/>
-              <a:t>Ponente 4. PK: la columna que identifica cada fila sin repetirse, por ejemplo alumnos.id. FK: una columna que apunta a la PK de otra tabla y así las enlaza, por ejemplo alumnosProyectos.id_alumnos apunta a alumnos.id. Como todas nuestras relaciones son N:M, cada una crea su tabla intermedia.</a:t>
+              <a:t>Ponente 4. PK: la columna que identifica cada fila sin repetirse, por ejemplo persona.id. FK: una columna que apunta a la PK de otra tabla y así las enlaza. En la herencia, alumnos.id_persona es a la vez PK de alumnos y FK a persona.id: el alumno 1 es la persona 1. Como una persona puede estar en alumnos y en profesor a la vez, la herencia es solapada. Como todas nuestras relaciones son N:M, cada una crea su tabla intermedia.</a:t>
             </a:r>
             <a:endParaRPr lang="en-US" dirty="0"/>
           </a:p>
@@ -700,7 +700,7 @@
           <a:p>
             <a:r>
               <a:rPr lang="en-US" dirty="0"/>
-              <a:t>Ponente 4. Lee una fila de ejemplo: en alumnosProyectos, la fila (1, 2, No Apto) significa “el alumno 1, Jafet Casals, en el proyecto 2, EDA, tiene No Apto”. Las líneas con “pata de gallo” marcan el lado N de cada relación. Tipos elegidos: los id son enteros autoincrementales, la fecha es DATE y la modalidad solo admite presencial u online.</a:t>
+              <a:t>Ponente 4. Lee una fila de ejemplo: en alumnoProyecto, la fila (1, 2, No Apto) significa “el alumno 1, que es la persona 1, Jafet Casals, en el proyecto 2, EDA, tiene No Apto”. Las líneas con “pata de gallo” marcan el lado N de cada relación; entre persona y sus subclases la línea es 1:1. Tipos elegidos: los id son enteros autoincrementales, la fecha es DATE y la modalidad solo admite valores fijos (presencial u online). MesPromoción no se guarda porque se puede calcular: guardarlo sería redundancia.</a:t>
             </a:r>
             <a:endParaRPr lang="en-US" dirty="0"/>
           </a:p>
@@ -788,7 +788,7 @@
           <a:p>
             <a:r>
               <a:rPr lang="en-US" dirty="0"/>
-              <a:t>Ponente 5. Primero probamos el diseño en local con MySQL Workbench. El enunciado pide PostgreSQL alojado en un servidor; usamos Supabase, que es PostgreSQL gratuito en la nube (el enunciado sugería Render; los dos sirven). El orden de creación importa: una FK solo puede apuntar a una tabla que ya existe. Detalle técnico: como insertamos los id a mano, al final del script se reajusta el contador para que el siguiente alumno sea el 53.</a:t>
+              <a:t>Ponente 5. Primero probamos el diseño en local con MySQL Workbench. El enunciado pide PostgreSQL alojado en un servidor; usamos Supabase, que es PostgreSQL gratuito en la nube (el enunciado sugería Render; los dos sirven). El orden de creación importa: una FK solo puede apuntar a una tabla que ya existe, así que primero van las tablas sin FK, después las subclases, que apuntan a persona, y al final las intermedias. Las tablas van en un esquema propio, v2, para no mezclarse con las de la primera versión del modelo. Como insertamos los id a mano, al final del script se reajustan los contadores: la siguiente persona que se dé de alta será la 63.</a:t>
             </a:r>
             <a:endParaRPr lang="en-US" dirty="0"/>
           </a:p>
@@ -876,7 +876,7 @@
           <a:p>
             <a:r>
               <a:rPr lang="en-US" dirty="0"/>
-              <a:t>Ponente 5. A la izquierda, el script tal como lo escribimos en MySQL Workbench. A la derecha, la versión que ejecutamos en Supabase. Lo que cambia está en amarillo. Arriba: en MySQL creábamos la base de datos con CREATE DATABASE y USE; en Supabase la base ya existe, así que en su lugar abrimos una transacción con BEGIN (si algo falla, no se queda nada a medias) y borramos las tablas si existían, para poder ejecutar el script varias veces. En cada tabla, AUTO_INCREMENT se convierte en GENERATED BY DEFAULT AS IDENTITY, que es la forma estándar de numerar automáticamente en PostgreSQL. Todo lo demás, columnas, claves primarias y foráneas, es idéntico.</a:t>
+              <a:t>Ponente 5. A la izquierda, el script de MySQL Workbench; a la derecha, la versión que ejecutamos en Supabase. Lo que cambia está en amarillo. Arriba: en MySQL creábamos la base de datos con CREATE DATABASE y USE; en Supabase la base ya existe, así que abrimos una transacción con BEGIN, creamos el esquema v2 y borramos las tablas si existían, para poder ejecutar el script varias veces. AUTO_INCREMENT pasa a GENERATED BY DEFAULT AS IDENTITY. Los ENUM de modalidad pasan a VARCHAR con CHECK, que hace lo mismo: solo deja guardar los valores de la lista. Fijaos en alumnos y profesor: su clave id_persona es a la vez PK y FK a persona; así se implementa la herencia.</a:t>
             </a:r>
             <a:endParaRPr lang="en-US" dirty="0"/>
           </a:p>
@@ -964,7 +964,7 @@
           <a:p>
             <a:r>
               <a:rPr lang="en-US" dirty="0"/>
-              <a:t>Ponente 5. Las tablas intermedias (alumnosPromocion, promocionProyectos y promocionClaustro) son exactamente iguales en los dos: claves primarias compuestas y claves foráneas. La única tabla con un cambio de verdad es claustro. En MySQL la modalidad era un ENUM("presencial","online"). PostgreSQL no permite ENUM dentro del CREATE TABLE, y además las comillas dobles significan “nombre de columna”, no texto. Así que la pasamos a VARCHAR con un CHECK, que hace lo mismo: solo deja guardar presencial u online. Después de crear las tablas, el script hace los INSERT con los datos de los CSV y al final reajusta los contadores de los id.</a:t>
+              <a:t>Ponente 5. Las 5 tablas intermedias (alumnosPromocion, profesorPromocion, alumnoProyecto, promocionProyecto y profesorProyecto) son exactamente iguales en MySQL y en PostgreSQL: clave primaria compuesta por las dos FK. Después de crear las tablas, el script hace los INSERT con los datos de los CSV. Al final cambian dos cosas: setval reajusta los contadores de los id, porque los insertamos a mano, y COMMIT confirma todo de golpe. En la consulta de comprobación, el mes de la promoción se calcula con EXTRACT en vez de MONTH.</a:t>
             </a:r>
             <a:endParaRPr lang="en-US" dirty="0"/>
           </a:p>
@@ -1052,7 +1052,7 @@
           <a:p>
             <a:r>
               <a:rPr lang="en-US" dirty="0"/>
-              <a:t>Ponente 5. Las dos herramientas dibujan el esquema solas a partir de las claves foráneas, y coincide con nuestro modelo lógico. La ingeniería inversa de Workbench (Database → Reverse Engineer) se lee mejor: muestra los tipos, marca PK y FK con iconos y usa la notación “pata de gallo” (una raya = 1, tres patas = N).</a:t>
+              <a:t>Ponente 5. Las dos herramientas dibujan el esquema solas a partir de las claves foráneas, y coincide con nuestro modelo lógico: persona en el centro de la herencia, alumnos y profesor colgando de ella, y las 5 intermedias. La ingeniería inversa de Workbench (Database → Reverse Engineer) se lee mejor: muestra los tipos, marca PK y FK con iconos y usa la notación “pata de gallo” (una raya = 1, tres patas = N). Entre persona y alumnos, y entre persona y profesor, la relación es 1 a 1.</a:t>
             </a:r>
             <a:endParaRPr lang="en-US" dirty="0"/>
           </a:p>
@@ -1140,7 +1140,7 @@
           <a:p>
             <a:r>
               <a:rPr lang="en-US" dirty="0"/>
-              <a:t>Ponente 5. Primera consulta de la demo: contar las filas de cada tabla. Si es posible, ejecutadla en directo en Supabase. Explicad de dónde sale cada número: 52 alumnos, 52 × 5 = 260 notas, 4 promociones × 5 proyectos = 20, y 6 promociones porque dos solo aparecen en el claustro. Da paso al Ponente 6: “Ahora vamos a preguntarle cosas a la base de datos”.</a:t>
+              <a:t>Ponente 5. Primera consulta de la demo: contar las filas de cada tabla. Si es posible, ejecutadla en directo en Supabase. De dónde sale cada número: 62 personas, que son 52 alumnos y 10 profesores; 52 × 5 = 260 notas; 4 promociones × 5 proyectos = 20; 6 promociones porque dos solo aparecen en el claustro. Ojo con profesorProyecto: los CSV no dicen quién corrige cada proyecto, así que esas 18 filas son datos de ejemplo que hemos inventado para enseñar que el modelo lo permite. Los CSV tienen 62 filas; salen 500 porque al normalizar cada dato va a su tabla y las relaciones se guardan aparte. Da paso al Ponente 6.</a:t>
             </a:r>
             <a:endParaRPr lang="en-US" dirty="0"/>
           </a:p>
@@ -1580,7 +1580,7 @@
           <a:p>
             <a:r>
               <a:rPr lang="en-US" dirty="0"/>
-              <a:t>Ponente 6. Ejecutad esta consulta en directo si podéis (está en el PDF, sección 6). Mensaje: la normalización repartió los datos en varias tablas, y los JOIN los vuelven a juntar para responder preguntas reales. Si sobra tiempo, enseñad también la ficha de Jafet Casals: con 4 JOIN se reconstruye la fila original del CSV, pero sin redundancia.</a:t>
+              <a:t>Ponente 6. Ejecutad esta consulta en directo si podéis. Mensaje: la normalización repartió los datos en varias tablas, y los JOIN los vuelven a juntar para responder preguntas reales. Los porcentajes salen de los CSV. Los correctores son datos de ejemplo inventados, porque los CSV no los traen, pero enseñan algo que el modelo anterior no podía guardar: quién corrige cada proyecto, aunque sea de otra promoción. Criterio que seguimos: los TA corrigen los primeros proyectos de su vertical y los LI los más avanzados.</a:t>
             </a:r>
             <a:endParaRPr lang="en-US" dirty="0"/>
           </a:p>
@@ -1668,7 +1668,7 @@
           <a:p>
             <a:r>
               <a:rPr lang="en-US" dirty="0"/>
-              <a:t>Ponente 6. El enunciado pide que pueda crecer en campus, verticales, promociones y modalidades. Gracias a la normalización, casi todo se hace con un INSERT. Si hay tiempo, ejecutad este INSERT en directo y repetid la consulta de alumnos por promoción para que se vea la promoción nueva. Sed honestos con el último punto: añadir una modalidad hoy obliga a cambiar el ENUM; es la primera mejora de la siguiente diapositiva.</a:t>
+              <a:t>Ponente 6. El enunciado pide que pueda crecer en campus, verticales, promociones y modalidades. Gracias a la normalización, casi todo se hace con un INSERT. El ejemplo es justo lo que aporta la herencia solapada: Jafet ya está en persona y en alumnos; para que sea TA basta con una fila en profesor. Su nombre y su email siguen guardados una sola vez. Sed honestos con el último punto: añadir una modalidad hoy obliga a cambiar el CHECK de la tabla; es la primera mejora de la siguiente diapositiva.</a:t>
             </a:r>
             <a:endParaRPr lang="en-US" dirty="0"/>
           </a:p>
@@ -1756,7 +1756,7 @@
           <a:p>
             <a:r>
               <a:rPr lang="en-US" dirty="0"/>
-              <a:t>Ponente 6. Cerrar con mejoras demuestra que entendemos los límites del diseño. La tabla modalidad cubriría por completo la escalabilidad que pide el enunciado. RLS (Row Level Security) está desactivado: cualquiera con la clave pública del proyecto podría leer y cambiar datos; para datos de ejemplo no es grave, pero en un caso real habría que activarlo.</a:t>
+              <a:t>Ponente 6. Cerrar con mejoras demuestra que entendemos los límites del diseño. La tabla modalidad cubriría por completo la escalabilidad que pide el enunciado. RLS (Row Level Security) está desactivado: cualquiera con la clave pública del proyecto podría leer y cambiar datos; para datos de ejemplo no es grave, pero en un caso real habría que activarlo. Corrigen une profesor con proyecto, no con la entrega de cada alumno: para saber quién corrigió el EDA de Jafet, el corrector tendría que ir dentro de alumnoProyecto, junto a la evaluación. Y los datos de partida no traen el email de los profesores (hoy está vacío) ni quién corrige: las correcciones que enseñamos son de ejemplo.</a:t>
             </a:r>
             <a:endParaRPr lang="en-US" dirty="0"/>
           </a:p>
@@ -2372,7 +2372,7 @@
           <a:p>
             <a:r>
               <a:rPr lang="en-US" dirty="0"/>
-              <a:t>Ponente 3. Cada tabla “principal” que salió de normalizar es una entidad; las tablas que unen dos cosas son relaciones. ¿Por qué Alumnos–Promoción es N:M y no 1:N? Hoy cada alumno está en una sola promoción, pero en la realidad alguien puede hacer Data Science y después Full Stack. Con N:M la base de datos ya está preparada sin cambiar nada.</a:t>
+              <a:t>Ponente 3. De la normalización salieron alumnos y claustro, pero los dos tenían nombre y email. En lugar de repetirlos, los subimos a una entidad general, Persona, y Alumno y Profesor heredan de ella. Parcial: puede haber personas que todavía no sean ni alumno ni profesor. Solapada: una misma persona puede ser las dos cosas, por ejemplo un alumno que hace de ayudante en otra promoción. Todas las relaciones son N:M: un alumno puede hacer Data Science y después Full Stack, y con N:M la base de datos ya está preparada. Corrigen es nueva: antes solo se podía suponer quién corregía un proyecto; ahora se guarda.</a:t>
             </a:r>
             <a:endParaRPr lang="en-US" dirty="0"/>
           </a:p>
@@ -2460,7 +2460,7 @@
           <a:p>
             <a:r>
               <a:rPr lang="en-US" dirty="0"/>
-              <a:t>Ponente 3. Recorre el diagrama de izquierda a derecha: Alumnos realiza Proyectos (con la evaluación), Alumnos pertenece a Promoción, Promoción tiene Proyectos y Promoción tiene Claustro. Señala la modalidad: en el claustro, la de cada profesor (en una misma promoción hay TA presenciales y LI online), y en la promoción, TipoModalidad. Da paso al Ponente 4: “Ahora hay que convertir este dibujo en tablas”.</a:t>
+              <a:t>Ponente 3. Empieza arriba: Persona y su triángulo de herencia hacia Alumno y Profesor. Alumno participa en Promoción y realiza Proyectos (con la evaluación). Profesor enseña en Promoción y corrige Proyectos. Promoción tiene Proyectos. Lee alguna cardinalidad: una promoción puede existir sin alumnos (0,n), porque el claustro menciona dos promociones sin alumnos; todo proyecto lo corrige al menos un profesor (1,n). La modalidad aparece dos veces: la del profesor (en una misma promoción hay TA presenciales y LI online) y TipoModalidad en la promoción. Da paso al Ponente 4: “Ahora hay que convertir este dibujo en tablas”.</a:t>
             </a:r>
             <a:endParaRPr lang="en-US" dirty="0"/>
           </a:p>
@@ -3252,7 +3252,7 @@
         <p:spPr>
           <a:xfrm>
             <a:off x="812800" y="4705350"/>
-            <a:ext cx="978396" cy="406400"/>
+            <a:ext cx="1077218" cy="406400"/>
           </a:xfrm>
           <a:prstGeom prst="roundRect">
             <a:avLst>
@@ -3285,7 +3285,7 @@
                 <a:ea typeface="Arial" pitchFamily="34" charset="-122"/>
                 <a:cs typeface="Arial" pitchFamily="34" charset="-120"/>
               </a:rPr>
-              <a:t>8 tablas</a:t>
+              <a:t>10 tablas</a:t>
             </a:r>
             <a:endParaRPr lang="en-US" sz="1400" dirty="0"/>
           </a:p>
@@ -3299,7 +3299,7 @@
         </p:nvSpPr>
         <p:spPr>
           <a:xfrm>
-            <a:off x="1943596" y="4705350"/>
+            <a:off x="2042418" y="4705350"/>
             <a:ext cx="1017885" cy="406400"/>
           </a:xfrm>
           <a:prstGeom prst="roundRect">
@@ -3333,7 +3333,7 @@
                 <a:ea typeface="Arial" pitchFamily="34" charset="-122"/>
                 <a:cs typeface="Arial" pitchFamily="34" charset="-120"/>
               </a:rPr>
-              <a:t>420 filas</a:t>
+              <a:t>500 filas</a:t>
             </a:r>
             <a:endParaRPr lang="en-US" sz="1400" dirty="0"/>
           </a:p>
@@ -3347,7 +3347,7 @@
         </p:nvSpPr>
         <p:spPr>
           <a:xfrm>
-            <a:off x="3113881" y="4705350"/>
+            <a:off x="3212703" y="4705350"/>
             <a:ext cx="691555" cy="406400"/>
           </a:xfrm>
           <a:prstGeom prst="roundRect">
@@ -3395,7 +3395,7 @@
         </p:nvSpPr>
         <p:spPr>
           <a:xfrm>
-            <a:off x="3957836" y="4705350"/>
+            <a:off x="4056658" y="4705350"/>
             <a:ext cx="2197497" cy="406400"/>
           </a:xfrm>
           <a:prstGeom prst="roundRect">
@@ -3610,11 +3610,11 @@
         <p:spPr>
           <a:xfrm>
             <a:off x="819150" y="1625600"/>
-            <a:ext cx="5168900" cy="1771650"/>
+            <a:ext cx="3373934" cy="1892300"/>
           </a:xfrm>
           <a:prstGeom prst="roundRect">
             <a:avLst>
-              <a:gd name="adj" fmla="val 6810"/>
+              <a:gd name="adj" fmla="val 6376"/>
             </a:avLst>
           </a:prstGeom>
           <a:solidFill>
@@ -3637,7 +3637,7 @@
         <p:spPr>
           <a:xfrm>
             <a:off x="1079500" y="1885950"/>
-            <a:ext cx="4787646" cy="238720"/>
+            <a:ext cx="2938831" cy="238720"/>
           </a:xfrm>
           <a:prstGeom prst="rect">
             <a:avLst/>
@@ -3681,7 +3681,7 @@
         <p:spPr>
           <a:xfrm>
             <a:off x="1079500" y="2200870"/>
-            <a:ext cx="4787646" cy="360660"/>
+            <a:ext cx="2938831" cy="360660"/>
           </a:xfrm>
           <a:prstGeom prst="rect">
             <a:avLst/>
@@ -3725,7 +3725,7 @@
         <p:spPr>
           <a:xfrm>
             <a:off x="1079500" y="2637730"/>
-            <a:ext cx="4787646" cy="274241"/>
+            <a:ext cx="2938831" cy="523081"/>
           </a:xfrm>
           <a:prstGeom prst="rect">
             <a:avLst/>
@@ -3790,12 +3790,12 @@
         </p:nvSpPr>
         <p:spPr>
           <a:xfrm>
-            <a:off x="6203950" y="1625600"/>
-            <a:ext cx="5168900" cy="1771650"/>
+            <a:off x="4408984" y="1625600"/>
+            <a:ext cx="3374033" cy="1892300"/>
           </a:xfrm>
           <a:prstGeom prst="roundRect">
             <a:avLst>
-              <a:gd name="adj" fmla="val 6810"/>
+              <a:gd name="adj" fmla="val 6376"/>
             </a:avLst>
           </a:prstGeom>
           <a:solidFill>
@@ -3817,8 +3817,8 @@
         </p:nvSpPr>
         <p:spPr>
           <a:xfrm>
-            <a:off x="6464300" y="1885950"/>
-            <a:ext cx="4787646" cy="238720"/>
+            <a:off x="4669334" y="1885950"/>
+            <a:ext cx="2938933" cy="238720"/>
           </a:xfrm>
           <a:prstGeom prst="rect">
             <a:avLst/>
@@ -3847,7 +3847,7 @@
                 <a:ea typeface="Arial" pitchFamily="34" charset="-122"/>
                 <a:cs typeface="Arial" pitchFamily="34" charset="-120"/>
               </a:rPr>
-              <a:t>RELACIÓN N:M</a:t>
+              <a:t>HERENCIA</a:t>
             </a:r>
             <a:endParaRPr lang="en-US" sz="1200" dirty="0"/>
           </a:p>
@@ -3861,8 +3861,8 @@
         </p:nvSpPr>
         <p:spPr>
           <a:xfrm>
-            <a:off x="6464300" y="2200870"/>
-            <a:ext cx="4787646" cy="360660"/>
+            <a:off x="4669334" y="2200870"/>
+            <a:ext cx="2938933" cy="360660"/>
           </a:xfrm>
           <a:prstGeom prst="rect">
             <a:avLst/>
@@ -3891,7 +3891,7 @@
                 <a:ea typeface="Arial" pitchFamily="34" charset="-122"/>
                 <a:cs typeface="Arial" pitchFamily="34" charset="-120"/>
               </a:rPr>
-              <a:t>Tabla intermedia</a:t>
+              <a:t>Tabla por subclase</a:t>
             </a:r>
             <a:endParaRPr lang="en-US" sz="2200" dirty="0"/>
           </a:p>
@@ -3905,8 +3905,8 @@
         </p:nvSpPr>
         <p:spPr>
           <a:xfrm>
-            <a:off x="6464300" y="2637730"/>
-            <a:ext cx="4787646" cy="523081"/>
+            <a:off x="4669334" y="2637730"/>
+            <a:ext cx="2938933" cy="523081"/>
           </a:xfrm>
           <a:prstGeom prst="rect">
             <a:avLst/>
@@ -3935,6 +3935,187 @@
                 <a:ea typeface="Arial" pitchFamily="34" charset="-122"/>
                 <a:cs typeface="Arial" pitchFamily="34" charset="-120"/>
               </a:rPr>
+              <a:t>Su PK es el id de persona, que a la vez es </a:t>
+            </a:r>
+            <a:r>
+              <a:rPr lang="en-US" sz="1400" b="1" dirty="0">
+                <a:solidFill>
+                  <a:srgbClr val="14213D"/>
+                </a:solidFill>
+                <a:latin typeface="Arial" pitchFamily="34" charset="0"/>
+                <a:ea typeface="Arial" pitchFamily="34" charset="-122"/>
+                <a:cs typeface="Arial" pitchFamily="34" charset="-120"/>
+              </a:rPr>
+              <a:t>FK</a:t>
+            </a:r>
+            <a:r>
+              <a:rPr lang="en-US" sz="1400" dirty="0">
+                <a:solidFill>
+                  <a:srgbClr val="3E4A5E"/>
+                </a:solidFill>
+                <a:latin typeface="Arial" pitchFamily="34" charset="0"/>
+                <a:ea typeface="Arial" pitchFamily="34" charset="-122"/>
+                <a:cs typeface="Arial" pitchFamily="34" charset="-120"/>
+              </a:rPr>
+              <a:t> a persona.</a:t>
+            </a:r>
+            <a:endParaRPr lang="en-US" sz="1400" dirty="0"/>
+          </a:p>
+        </p:txBody>
+      </p:sp>
+      <p:sp>
+        <p:nvSpPr>
+          <p:cNvPr id="13" name="Shape 11"/>
+          <p:cNvSpPr/>
+          <p:nvPr/>
+        </p:nvSpPr>
+        <p:spPr>
+          <a:xfrm>
+            <a:off x="7998916" y="1625600"/>
+            <a:ext cx="3373934" cy="1892300"/>
+          </a:xfrm>
+          <a:prstGeom prst="roundRect">
+            <a:avLst>
+              <a:gd name="adj" fmla="val 6376"/>
+            </a:avLst>
+          </a:prstGeom>
+          <a:solidFill>
+            <a:srgbClr val="FFFFFF"/>
+          </a:solidFill>
+          <a:ln w="12700">
+            <a:solidFill>
+              <a:srgbClr val="DCE2EC"/>
+            </a:solidFill>
+            <a:prstDash val="solid"/>
+          </a:ln>
+        </p:spPr>
+      </p:sp>
+      <p:sp>
+        <p:nvSpPr>
+          <p:cNvPr id="14" name="Text 12"/>
+          <p:cNvSpPr/>
+          <p:nvPr/>
+        </p:nvSpPr>
+        <p:spPr>
+          <a:xfrm>
+            <a:off x="8259266" y="1885950"/>
+            <a:ext cx="2938831" cy="238720"/>
+          </a:xfrm>
+          <a:prstGeom prst="rect">
+            <a:avLst/>
+          </a:prstGeom>
+          <a:noFill/>
+          <a:ln/>
+        </p:spPr>
+        <p:txBody>
+          <a:bodyPr wrap="square" lIns="0" tIns="0" rIns="0" bIns="0" rtlCol="0" anchor="t">
+            <a:normAutofit/>
+          </a:bodyPr>
+          <a:lstStyle/>
+          <a:p>
+            <a:pPr algn="l" indent="0" marL="0">
+              <a:lnSpc>
+                <a:spcPts val="1680"/>
+              </a:lnSpc>
+              <a:buNone/>
+            </a:pPr>
+            <a:r>
+              <a:rPr lang="en-US" sz="1200" b="1" spc="100" kern="0" dirty="0">
+                <a:solidFill>
+                  <a:srgbClr val="2F6FEB"/>
+                </a:solidFill>
+                <a:latin typeface="Arial" pitchFamily="34" charset="0"/>
+                <a:ea typeface="Arial" pitchFamily="34" charset="-122"/>
+                <a:cs typeface="Arial" pitchFamily="34" charset="-120"/>
+              </a:rPr>
+              <a:t>RELACIÓN N:M</a:t>
+            </a:r>
+            <a:endParaRPr lang="en-US" sz="1200" dirty="0"/>
+          </a:p>
+        </p:txBody>
+      </p:sp>
+      <p:sp>
+        <p:nvSpPr>
+          <p:cNvPr id="15" name="Text 13"/>
+          <p:cNvSpPr/>
+          <p:nvPr/>
+        </p:nvSpPr>
+        <p:spPr>
+          <a:xfrm>
+            <a:off x="8259266" y="2200870"/>
+            <a:ext cx="2938831" cy="360660"/>
+          </a:xfrm>
+          <a:prstGeom prst="rect">
+            <a:avLst/>
+          </a:prstGeom>
+          <a:noFill/>
+          <a:ln/>
+        </p:spPr>
+        <p:txBody>
+          <a:bodyPr wrap="square" lIns="0" tIns="0" rIns="0" bIns="0" rtlCol="0" anchor="t">
+            <a:normAutofit/>
+          </a:bodyPr>
+          <a:lstStyle/>
+          <a:p>
+            <a:pPr algn="l" indent="0" marL="0">
+              <a:lnSpc>
+                <a:spcPts val="2640"/>
+              </a:lnSpc>
+              <a:buNone/>
+            </a:pPr>
+            <a:r>
+              <a:rPr lang="en-US" sz="2200" b="1" dirty="0">
+                <a:solidFill>
+                  <a:srgbClr val="14213D"/>
+                </a:solidFill>
+                <a:latin typeface="Arial" pitchFamily="34" charset="0"/>
+                <a:ea typeface="Arial" pitchFamily="34" charset="-122"/>
+                <a:cs typeface="Arial" pitchFamily="34" charset="-120"/>
+              </a:rPr>
+              <a:t>Tabla intermedia</a:t>
+            </a:r>
+            <a:endParaRPr lang="en-US" sz="2200" dirty="0"/>
+          </a:p>
+        </p:txBody>
+      </p:sp>
+      <p:sp>
+        <p:nvSpPr>
+          <p:cNvPr id="16" name="Text 14"/>
+          <p:cNvSpPr/>
+          <p:nvPr/>
+        </p:nvSpPr>
+        <p:spPr>
+          <a:xfrm>
+            <a:off x="8259266" y="2637730"/>
+            <a:ext cx="2938831" cy="523081"/>
+          </a:xfrm>
+          <a:prstGeom prst="rect">
+            <a:avLst/>
+          </a:prstGeom>
+          <a:noFill/>
+          <a:ln/>
+        </p:spPr>
+        <p:txBody>
+          <a:bodyPr wrap="square" lIns="0" tIns="0" rIns="0" bIns="0" rtlCol="0" anchor="t">
+            <a:normAutofit/>
+          </a:bodyPr>
+          <a:lstStyle/>
+          <a:p>
+            <a:pPr algn="l" indent="0" marL="0">
+              <a:lnSpc>
+                <a:spcPts val="1960"/>
+              </a:lnSpc>
+              <a:buNone/>
+            </a:pPr>
+            <a:r>
+              <a:rPr lang="en-US" sz="1400" dirty="0">
+                <a:solidFill>
+                  <a:srgbClr val="3E4A5E"/>
+                </a:solidFill>
+                <a:latin typeface="Arial" pitchFamily="34" charset="0"/>
+                <a:ea typeface="Arial" pitchFamily="34" charset="-122"/>
+                <a:cs typeface="Arial" pitchFamily="34" charset="-120"/>
+              </a:rPr>
               <a:t>Con las dos PK, que juntas forman su PK y cada una es FK.</a:t>
             </a:r>
             <a:endParaRPr lang="en-US" sz="1400" dirty="0"/>
@@ -3943,13 +4124,13 @@
       </p:sp>
       <p:sp>
         <p:nvSpPr>
-          <p:cNvPr id="13" name="Shape 11"/>
-          <p:cNvSpPr/>
-          <p:nvPr/>
-        </p:nvSpPr>
-        <p:spPr>
-          <a:xfrm>
-            <a:off x="812800" y="3708400"/>
+          <p:cNvPr id="17" name="Text 15"/>
+          <p:cNvSpPr/>
+          <p:nvPr/>
+        </p:nvSpPr>
+        <p:spPr>
+          <a:xfrm>
+            <a:off x="812800" y="3835400"/>
             <a:ext cx="10566400" cy="1098550"/>
           </a:xfrm>
           <a:prstGeom prst="roundRect">
@@ -3962,26 +4143,8 @@
           </a:solidFill>
           <a:ln/>
         </p:spPr>
-      </p:sp>
-      <p:sp>
-        <p:nvSpPr>
-          <p:cNvPr id="14" name="Text 12"/>
-          <p:cNvSpPr/>
-          <p:nvPr/>
-        </p:nvSpPr>
-        <p:spPr>
-          <a:xfrm>
-            <a:off x="1092200" y="3937595"/>
-            <a:ext cx="1859137" cy="665460"/>
-          </a:xfrm>
-          <a:prstGeom prst="rect">
-            <a:avLst/>
-          </a:prstGeom>
-          <a:noFill/>
-          <a:ln/>
-        </p:spPr>
-        <p:txBody>
-          <a:bodyPr wrap="none" lIns="0" tIns="0" rIns="0" bIns="0" rtlCol="0" anchor="t">
+        <p:txBody>
+          <a:bodyPr wrap="none" lIns="242203" tIns="179348" rIns="242203" bIns="179348" rtlCol="0" anchor="ctr">
             <a:normAutofit/>
           </a:bodyPr>
           <a:lstStyle/>
@@ -4001,7 +4164,7 @@
                 <a:ea typeface="Arial" pitchFamily="34" charset="-122"/>
                 <a:cs typeface="Arial" pitchFamily="34" charset="-120"/>
               </a:rPr>
-              <a:t>4 + 4 = 8</a:t>
+              <a:t>3 + 2 + 5 = 10</a:t>
             </a:r>
             <a:endParaRPr lang="en-US" sz="3600" dirty="0"/>
           </a:p>
@@ -4009,14 +4172,14 @@
       </p:sp>
       <p:sp>
         <p:nvSpPr>
-          <p:cNvPr id="15" name="Text 13"/>
-          <p:cNvSpPr/>
-          <p:nvPr/>
-        </p:nvSpPr>
-        <p:spPr>
-          <a:xfrm>
-            <a:off x="3074988" y="4124325"/>
-            <a:ext cx="8304212" cy="292100"/>
+          <p:cNvPr id="18" name="Text 16"/>
+          <p:cNvSpPr/>
+          <p:nvPr/>
+        </p:nvSpPr>
+        <p:spPr>
+          <a:xfrm>
+            <a:off x="4340523" y="4097635"/>
+            <a:ext cx="6968494" cy="558800"/>
           </a:xfrm>
           <a:prstGeom prst="rect">
             <a:avLst/>
@@ -4045,7 +4208,7 @@
                 <a:ea typeface="Arial" pitchFamily="34" charset="-122"/>
                 <a:cs typeface="Arial" pitchFamily="34" charset="-120"/>
               </a:rPr>
-              <a:t>4 tablas de entidades + 4 tablas intermedias, porque todas nuestras relaciones son N:M.</a:t>
+              <a:t>3 entidades (persona, promocion, proyecto) + 2 subclases (alumnos, profesor) + 5 tablas intermedias.</a:t>
             </a:r>
             <a:endParaRPr lang="en-US" sz="1500" dirty="0"/>
           </a:p>
@@ -4211,7 +4374,7 @@
                 <a:ea typeface="Arial" pitchFamily="34" charset="-122"/>
                 <a:cs typeface="Arial" pitchFamily="34" charset="-120"/>
               </a:rPr>
-              <a:t>El modelo lógico: 8 tablas</a:t>
+              <a:t>El modelo lógico: 10 tablas</a:t>
             </a:r>
             <a:endParaRPr lang="en-US" sz="3600" dirty="0"/>
           </a:p>
@@ -4226,7 +4389,7 @@
         <p:spPr>
           <a:xfrm>
             <a:off x="812800" y="1517650"/>
-            <a:ext cx="7112000" cy="4152900"/>
+            <a:ext cx="4445000" cy="4152900"/>
           </a:xfrm>
           <a:prstGeom prst="roundRect">
             <a:avLst>
@@ -4241,7 +4404,7 @@
       </p:sp>
       <p:pic>
         <p:nvPicPr>
-          <p:cNvPr id="6" name="Image 0" descr="Modelo lógico con las 8 tablas, sus claves primarias y foráneas, hecho en draw.io">    </p:cNvPr>
+          <p:cNvPr id="6" name="Image 0" descr="Modelo lógico con las 10 tablas, sus claves primarias y foráneas, hecho en draw.io">    </p:cNvPr>
           <p:cNvPicPr>
             <a:picLocks noChangeAspect="1"/>
           </p:cNvPicPr>
@@ -4249,18 +4412,17 @@
         </p:nvPicPr>
         <p:blipFill>
           <a:blip r:embed="rId1"/>
-          <a:srcRect l="-60" r="-60" t="0" b="0"/>
-          <a:stretch/>
+          <a:stretch>
+            <a:fillRect/>
+          </a:stretch>
         </p:blipFill>
         <p:spPr>
           <a:xfrm>
-            <a:off x="825500" y="1530350"/>
-            <a:ext cx="7086600" cy="4127500"/>
-          </a:xfrm>
-          <a:prstGeom prst="roundRect">
-            <a:avLst>
-              <a:gd name="adj" fmla="val 2154"/>
-            </a:avLst>
+            <a:off x="1144950" y="1530350"/>
+            <a:ext cx="3780699" cy="4127500"/>
+          </a:xfrm>
+          <a:prstGeom prst="rect">
+            <a:avLst/>
           </a:prstGeom>
         </p:spPr>
       </p:pic>
@@ -4273,7 +4435,7 @@
         <p:spPr>
           <a:xfrm>
             <a:off x="819150" y="1524000"/>
-            <a:ext cx="7099300" cy="4140200"/>
+            <a:ext cx="4432300" cy="4140200"/>
           </a:xfrm>
           <a:prstGeom prst="roundRect">
             <a:avLst>
@@ -4297,8 +4459,8 @@
         </p:nvSpPr>
         <p:spPr>
           <a:xfrm>
-            <a:off x="8178800" y="2748459"/>
-            <a:ext cx="3296412" cy="487561"/>
+            <a:off x="5511800" y="2494558"/>
+            <a:ext cx="6043422" cy="523081"/>
           </a:xfrm>
           <a:prstGeom prst="rect">
             <a:avLst/>
@@ -4314,12 +4476,12 @@
           <a:p>
             <a:pPr algn="l" indent="0" marL="0">
               <a:lnSpc>
-                <a:spcPts val="1820"/>
+                <a:spcPts val="1960"/>
               </a:lnSpc>
               <a:buNone/>
             </a:pPr>
             <a:r>
-              <a:rPr lang="en-US" sz="1300" b="1" dirty="0">
+              <a:rPr lang="en-US" sz="1400" b="1" dirty="0">
                 <a:solidFill>
                   <a:srgbClr val="14213D"/>
                 </a:solidFill>
@@ -4327,10 +4489,10 @@
                 <a:ea typeface="Arial" pitchFamily="34" charset="-122"/>
                 <a:cs typeface="Arial" pitchFamily="34" charset="-120"/>
               </a:rPr>
-              <a:t>PK FK</a:t>
-            </a:r>
-            <a:r>
-              <a:rPr lang="en-US" sz="1300" dirty="0">
+              <a:t>persona</a:t>
+            </a:r>
+            <a:r>
+              <a:rPr lang="en-US" sz="1400" dirty="0">
                 <a:solidFill>
                   <a:srgbClr val="3E4A5E"/>
                 </a:solidFill>
@@ -4338,9 +4500,53 @@
                 <a:ea typeface="Arial" pitchFamily="34" charset="-122"/>
                 <a:cs typeface="Arial" pitchFamily="34" charset="-120"/>
               </a:rPr>
-              <a:t> en las intermedias: la clave es la pareja, y cada parte apunta a su tabla</a:t>
-            </a:r>
-            <a:endParaRPr lang="en-US" sz="1300" dirty="0"/>
+              <a:t> guarda nombre y email una sola vez. </a:t>
+            </a:r>
+            <a:r>
+              <a:rPr lang="en-US" sz="1400" b="1" dirty="0">
+                <a:solidFill>
+                  <a:srgbClr val="14213D"/>
+                </a:solidFill>
+                <a:latin typeface="Arial" pitchFamily="34" charset="0"/>
+                <a:ea typeface="Arial" pitchFamily="34" charset="-122"/>
+                <a:cs typeface="Arial" pitchFamily="34" charset="-120"/>
+              </a:rPr>
+              <a:t>alumnos</a:t>
+            </a:r>
+            <a:r>
+              <a:rPr lang="en-US" sz="1400" dirty="0">
+                <a:solidFill>
+                  <a:srgbClr val="3E4A5E"/>
+                </a:solidFill>
+                <a:latin typeface="Arial" pitchFamily="34" charset="0"/>
+                <a:ea typeface="Arial" pitchFamily="34" charset="-122"/>
+                <a:cs typeface="Arial" pitchFamily="34" charset="-120"/>
+              </a:rPr>
+              <a:t> y </a:t>
+            </a:r>
+            <a:r>
+              <a:rPr lang="en-US" sz="1400" b="1" dirty="0">
+                <a:solidFill>
+                  <a:srgbClr val="14213D"/>
+                </a:solidFill>
+                <a:latin typeface="Arial" pitchFamily="34" charset="0"/>
+                <a:ea typeface="Arial" pitchFamily="34" charset="-122"/>
+                <a:cs typeface="Arial" pitchFamily="34" charset="-120"/>
+              </a:rPr>
+              <a:t>profesor</a:t>
+            </a:r>
+            <a:r>
+              <a:rPr lang="en-US" sz="1400" dirty="0">
+                <a:solidFill>
+                  <a:srgbClr val="3E4A5E"/>
+                </a:solidFill>
+                <a:latin typeface="Arial" pitchFamily="34" charset="0"/>
+                <a:ea typeface="Arial" pitchFamily="34" charset="-122"/>
+                <a:cs typeface="Arial" pitchFamily="34" charset="-120"/>
+              </a:rPr>
+              <a:t> usan su id como PK y FK (relación 1:1)</a:t>
+            </a:r>
+            <a:endParaRPr lang="en-US" sz="1400" dirty="0"/>
           </a:p>
         </p:txBody>
       </p:sp>
@@ -4352,8 +4558,8 @@
         </p:nvSpPr>
         <p:spPr>
           <a:xfrm>
-            <a:off x="8178800" y="3363020"/>
-            <a:ext cx="3296412" cy="487561"/>
+            <a:off x="5511800" y="3144639"/>
+            <a:ext cx="6043422" cy="523081"/>
           </a:xfrm>
           <a:prstGeom prst="rect">
             <a:avLst/>
@@ -4369,12 +4575,12 @@
           <a:p>
             <a:pPr algn="l" indent="0" marL="0">
               <a:lnSpc>
-                <a:spcPts val="1820"/>
+                <a:spcPts val="1960"/>
               </a:lnSpc>
               <a:buNone/>
             </a:pPr>
             <a:r>
-              <a:rPr lang="en-US" sz="1300" b="1" dirty="0">
+              <a:rPr lang="en-US" sz="1400" b="1" dirty="0">
                 <a:solidFill>
                   <a:srgbClr val="14213D"/>
                 </a:solidFill>
@@ -4382,10 +4588,10 @@
                 <a:ea typeface="Arial" pitchFamily="34" charset="-122"/>
                 <a:cs typeface="Arial" pitchFamily="34" charset="-120"/>
               </a:rPr>
-              <a:t>alumnosProyectos</a:t>
-            </a:r>
-            <a:r>
-              <a:rPr lang="en-US" sz="1300" dirty="0">
+              <a:t>PK FK</a:t>
+            </a:r>
+            <a:r>
+              <a:rPr lang="en-US" sz="1400" dirty="0">
                 <a:solidFill>
                   <a:srgbClr val="3E4A5E"/>
                 </a:solidFill>
@@ -4393,9 +4599,9 @@
                 <a:ea typeface="Arial" pitchFamily="34" charset="-122"/>
                 <a:cs typeface="Arial" pitchFamily="34" charset="-120"/>
               </a:rPr>
-              <a:t>: 52 alumnos × 5 proyectos = 260 filas</a:t>
-            </a:r>
-            <a:endParaRPr lang="en-US" sz="1300" dirty="0"/>
+              <a:t> en las 5 intermedias: la clave es la pareja, y cada parte apunta a su tabla</a:t>
+            </a:r>
+            <a:endParaRPr lang="en-US" sz="1400" dirty="0"/>
           </a:p>
         </p:txBody>
       </p:sp>
@@ -4407,8 +4613,8 @@
         </p:nvSpPr>
         <p:spPr>
           <a:xfrm>
-            <a:off x="8178800" y="3977580"/>
-            <a:ext cx="3296412" cy="487561"/>
+            <a:off x="5511800" y="3794720"/>
+            <a:ext cx="6043422" cy="523081"/>
           </a:xfrm>
           <a:prstGeom prst="rect">
             <a:avLst/>
@@ -4424,12 +4630,23 @@
           <a:p>
             <a:pPr algn="l" indent="0" marL="0">
               <a:lnSpc>
-                <a:spcPts val="1820"/>
+                <a:spcPts val="1960"/>
               </a:lnSpc>
               <a:buNone/>
             </a:pPr>
             <a:r>
-              <a:rPr lang="en-US" sz="1300" dirty="0">
+              <a:rPr lang="en-US" sz="1400" b="1" dirty="0">
+                <a:solidFill>
+                  <a:srgbClr val="14213D"/>
+                </a:solidFill>
+                <a:latin typeface="Arial" pitchFamily="34" charset="0"/>
+                <a:ea typeface="Arial" pitchFamily="34" charset="-122"/>
+                <a:cs typeface="Arial" pitchFamily="34" charset="-120"/>
+              </a:rPr>
+              <a:t>alumnoProyecto</a:t>
+            </a:r>
+            <a:r>
+              <a:rPr lang="en-US" sz="1400" dirty="0">
                 <a:solidFill>
                   <a:srgbClr val="3E4A5E"/>
                 </a:solidFill>
@@ -4437,9 +4654,64 @@
                 <a:ea typeface="Arial" pitchFamily="34" charset="-122"/>
                 <a:cs typeface="Arial" pitchFamily="34" charset="-120"/>
               </a:rPr>
-              <a:t>La PK compuesta impide dos notas del mismo alumno en el mismo proyecto</a:t>
-            </a:r>
-            <a:endParaRPr lang="en-US" sz="1300" dirty="0"/>
+              <a:t>: 52 alumnos × 5 proyectos = 260 notas. La PK compuesta impide dos notas del mismo alumno en el mismo proyecto</a:t>
+            </a:r>
+            <a:endParaRPr lang="en-US" sz="1400" dirty="0"/>
+          </a:p>
+        </p:txBody>
+      </p:sp>
+      <p:sp>
+        <p:nvSpPr>
+          <p:cNvPr id="11" name="Text 8"/>
+          <p:cNvSpPr/>
+          <p:nvPr/>
+        </p:nvSpPr>
+        <p:spPr>
+          <a:xfrm>
+            <a:off x="5511800" y="4444802"/>
+            <a:ext cx="6043422" cy="274241"/>
+          </a:xfrm>
+          <a:prstGeom prst="rect">
+            <a:avLst/>
+          </a:prstGeom>
+          <a:noFill/>
+          <a:ln/>
+        </p:spPr>
+        <p:txBody>
+          <a:bodyPr wrap="square" lIns="0" tIns="0" rIns="0" bIns="0" rtlCol="0" anchor="t">
+            <a:normAutofit/>
+          </a:bodyPr>
+          <a:lstStyle/>
+          <a:p>
+            <a:pPr algn="l" indent="0" marL="0">
+              <a:lnSpc>
+                <a:spcPts val="1960"/>
+              </a:lnSpc>
+              <a:buNone/>
+            </a:pPr>
+            <a:r>
+              <a:rPr lang="en-US" sz="1400" b="1" dirty="0">
+                <a:solidFill>
+                  <a:srgbClr val="14213D"/>
+                </a:solidFill>
+                <a:latin typeface="Arial" pitchFamily="34" charset="0"/>
+                <a:ea typeface="Arial" pitchFamily="34" charset="-122"/>
+                <a:cs typeface="Arial" pitchFamily="34" charset="-120"/>
+              </a:rPr>
+              <a:t>MesPromoción</a:t>
+            </a:r>
+            <a:r>
+              <a:rPr lang="en-US" sz="1400" dirty="0">
+                <a:solidFill>
+                  <a:srgbClr val="3E4A5E"/>
+                </a:solidFill>
+                <a:latin typeface="Arial" pitchFamily="34" charset="0"/>
+                <a:ea typeface="Arial" pitchFamily="34" charset="-122"/>
+                <a:cs typeface="Arial" pitchFamily="34" charset="-120"/>
+              </a:rPr>
+              <a:t> no es columna: se calcula a partir de la fecha</a:t>
+            </a:r>
+            <a:endParaRPr lang="en-US" sz="1400" dirty="0"/>
           </a:p>
         </p:txBody>
       </p:sp>
@@ -4557,7 +4829,7 @@
                 <a:ea typeface="Arial" pitchFamily="34" charset="-122"/>
                 <a:cs typeface="Arial" pitchFamily="34" charset="-120"/>
               </a:rPr>
-              <a:t>13</a:t>
+              <a:t>12</a:t>
             </a:r>
             <a:endParaRPr lang="en-US" sz="1200" dirty="0"/>
           </a:p>
@@ -4617,8 +4889,8 @@
         </p:nvSpPr>
         <p:spPr>
           <a:xfrm>
-            <a:off x="940792" y="1653778"/>
-            <a:ext cx="10566400" cy="1809055"/>
+            <a:off x="812800" y="1587500"/>
+            <a:ext cx="10566400" cy="2089150"/>
           </a:xfrm>
           <a:prstGeom prst="rect">
             <a:avLst/>
@@ -4644,19 +4916,19 @@
           </p:nvPr>
         </p:nvGraphicFramePr>
         <p:xfrm>
-          <a:off x="953492" y="1666478"/>
-          <a:ext cx="10553700" cy="1796355"/>
+          <a:off x="825500" y="1600200"/>
+          <a:ext cx="10553700" cy="2076450"/>
         </p:xfrm>
         <a:graphic>
           <a:graphicData uri="http://schemas.openxmlformats.org/drawingml/2006/table">
             <a:tbl>
               <a:tblPr/>
               <a:tblGrid>
-                <a:gridCol w="3588258"/>
-                <a:gridCol w="3799332"/>
                 <a:gridCol w="3166110"/>
+                <a:gridCol w="4010406"/>
+                <a:gridCol w="3377184"/>
               </a:tblGrid>
-              <a:tr h="359271">
+              <a:tr h="346075">
                 <a:tc>
                   <a:txBody>
                     <a:bodyPr/>
@@ -4664,12 +4936,12 @@
                     <a:p>
                       <a:pPr indent="0" marL="0">
                         <a:lnSpc>
-                          <a:spcPts val="1820"/>
+                          <a:spcPts val="1750"/>
                         </a:lnSpc>
                         <a:buNone/>
                       </a:pPr>
                       <a:r>
-                        <a:rPr lang="en-US" sz="1300" b="1" dirty="0">
+                        <a:rPr lang="en-US" sz="1250" b="1" dirty="0">
                           <a:solidFill>
                             <a:srgbClr val="14213D"/>
                           </a:solidFill>
@@ -4679,14 +4951,14 @@
                         </a:rPr>
                         <a:t>En MySQL</a:t>
                       </a:r>
-                      <a:endParaRPr lang="en-US" sz="1300" dirty="0">
+                      <a:endParaRPr lang="en-US" sz="1250" dirty="0">
                         <a:latin typeface="Arial" charset="0"/>
                         <a:ea typeface="Arial" charset="0"/>
                         <a:cs typeface="Arial" charset="0"/>
                       </a:endParaRPr>
                     </a:p>
                   </a:txBody>
-                  <a:tcPr marL="57785" marR="57785" marT="57785" marB="57785" anchor="t">
+                  <a:tcPr marL="55563" marR="55563" marT="55563" marB="55563" anchor="t">
                     <a:lnL w="12700" cap="flat" cmpd="sng" algn="ctr">
                       <a:solidFill>
                         <a:srgbClr val="CBCBCB"/>
@@ -4735,12 +5007,12 @@
                     <a:p>
                       <a:pPr indent="0" marL="0">
                         <a:lnSpc>
-                          <a:spcPts val="1820"/>
+                          <a:spcPts val="1750"/>
                         </a:lnSpc>
                         <a:buNone/>
                       </a:pPr>
                       <a:r>
-                        <a:rPr lang="en-US" sz="1300" b="1" dirty="0">
+                        <a:rPr lang="en-US" sz="1250" b="1" dirty="0">
                           <a:solidFill>
                             <a:srgbClr val="14213D"/>
                           </a:solidFill>
@@ -4750,14 +5022,14 @@
                         </a:rPr>
                         <a:t>En PostgreSQL</a:t>
                       </a:r>
-                      <a:endParaRPr lang="en-US" sz="1300" dirty="0">
+                      <a:endParaRPr lang="en-US" sz="1250" dirty="0">
                         <a:latin typeface="Arial" charset="0"/>
                         <a:ea typeface="Arial" charset="0"/>
                         <a:cs typeface="Arial" charset="0"/>
                       </a:endParaRPr>
                     </a:p>
                   </a:txBody>
-                  <a:tcPr marL="57785" marR="57785" marT="57785" marB="57785" anchor="t">
+                  <a:tcPr marL="55563" marR="55563" marT="55563" marB="55563" anchor="t">
                     <a:lnL w="12700" cap="flat" cmpd="sng" algn="ctr">
                       <a:solidFill>
                         <a:srgbClr val="BCBCBC"/>
@@ -4806,12 +5078,12 @@
                     <a:p>
                       <a:pPr indent="0" marL="0">
                         <a:lnSpc>
-                          <a:spcPts val="1820"/>
+                          <a:spcPts val="1750"/>
                         </a:lnSpc>
                         <a:buNone/>
                       </a:pPr>
                       <a:r>
-                        <a:rPr lang="en-US" sz="1300" b="1" dirty="0">
+                        <a:rPr lang="en-US" sz="1250" b="1" dirty="0">
                           <a:solidFill>
                             <a:srgbClr val="14213D"/>
                           </a:solidFill>
@@ -4821,14 +5093,14 @@
                         </a:rPr>
                         <a:t>Por qué</a:t>
                       </a:r>
-                      <a:endParaRPr lang="en-US" sz="1300" dirty="0">
+                      <a:endParaRPr lang="en-US" sz="1250" dirty="0">
                         <a:latin typeface="Arial" charset="0"/>
                         <a:ea typeface="Arial" charset="0"/>
                         <a:cs typeface="Arial" charset="0"/>
                       </a:endParaRPr>
                     </a:p>
                   </a:txBody>
-                  <a:tcPr marL="57785" marR="57785" marT="57785" marB="57785" anchor="t">
+                  <a:tcPr marL="55563" marR="55563" marT="55563" marB="55563" anchor="t">
                     <a:lnL w="12700" cap="flat" cmpd="sng" algn="ctr">
                       <a:solidFill>
                         <a:srgbClr val="BCBCBC"/>
@@ -4871,7 +5143,7 @@
                   </a:tcPr>
                 </a:tc>
               </a:tr>
-              <a:tr h="359271">
+              <a:tr h="346075">
                 <a:tc>
                   <a:txBody>
                     <a:bodyPr/>
@@ -4879,12 +5151,12 @@
                     <a:p>
                       <a:pPr indent="0" marL="0">
                         <a:lnSpc>
-                          <a:spcPts val="1820"/>
+                          <a:spcPts val="1750"/>
                         </a:lnSpc>
                         <a:buNone/>
                       </a:pPr>
                       <a:r>
-                        <a:rPr lang="en-US" sz="1300" dirty="0">
+                        <a:rPr lang="en-US" sz="1250" dirty="0">
                           <a:solidFill>
                             <a:srgbClr val="14213D"/>
                           </a:solidFill>
@@ -4894,14 +5166,14 @@
                         </a:rPr>
                         <a:t>AUTO_INCREMENT</a:t>
                       </a:r>
-                      <a:endParaRPr lang="en-US" sz="1300" dirty="0">
+                      <a:endParaRPr lang="en-US" sz="1250" dirty="0">
                         <a:latin typeface="Arial" charset="0"/>
                         <a:ea typeface="Arial" charset="0"/>
                         <a:cs typeface="Arial" charset="0"/>
                       </a:endParaRPr>
                     </a:p>
                   </a:txBody>
-                  <a:tcPr marL="57785" marR="57785" marT="57785" marB="57785" anchor="t">
+                  <a:tcPr marL="55563" marR="55563" marT="55563" marB="55563" anchor="t">
                     <a:lnL w="12700" cap="flat" cmpd="sng" algn="ctr">
                       <a:solidFill>
                         <a:srgbClr val="CBCBCB"/>
@@ -4947,12 +5219,12 @@
                     <a:p>
                       <a:pPr indent="0" marL="0">
                         <a:lnSpc>
-                          <a:spcPts val="1820"/>
+                          <a:spcPts val="1750"/>
                         </a:lnSpc>
                         <a:buNone/>
                       </a:pPr>
                       <a:r>
-                        <a:rPr lang="en-US" sz="1300" dirty="0">
+                        <a:rPr lang="en-US" sz="1250" dirty="0">
                           <a:solidFill>
                             <a:srgbClr val="14213D"/>
                           </a:solidFill>
@@ -4962,14 +5234,14 @@
                         </a:rPr>
                         <a:t>GENERATED … AS IDENTITY</a:t>
                       </a:r>
-                      <a:endParaRPr lang="en-US" sz="1300" dirty="0">
+                      <a:endParaRPr lang="en-US" sz="1250" dirty="0">
                         <a:latin typeface="Arial" charset="0"/>
                         <a:ea typeface="Arial" charset="0"/>
                         <a:cs typeface="Arial" charset="0"/>
                       </a:endParaRPr>
                     </a:p>
                   </a:txBody>
-                  <a:tcPr marL="57785" marR="57785" marT="57785" marB="57785" anchor="t">
+                  <a:tcPr marL="55563" marR="55563" marT="55563" marB="55563" anchor="t">
                     <a:lnL w="12700" cap="flat" cmpd="sng" algn="ctr">
                       <a:solidFill>
                         <a:srgbClr val="CBCBCB"/>
@@ -5015,12 +5287,12 @@
                     <a:p>
                       <a:pPr indent="0" marL="0">
                         <a:lnSpc>
-                          <a:spcPts val="1820"/>
+                          <a:spcPts val="1750"/>
                         </a:lnSpc>
                         <a:buNone/>
                       </a:pPr>
                       <a:r>
-                        <a:rPr lang="en-US" sz="1300" dirty="0">
+                        <a:rPr lang="en-US" sz="1250" dirty="0">
                           <a:solidFill>
                             <a:srgbClr val="14213D"/>
                           </a:solidFill>
@@ -5030,14 +5302,14 @@
                         </a:rPr>
                         <a:t>Numeración automática estándar</a:t>
                       </a:r>
-                      <a:endParaRPr lang="en-US" sz="1300" dirty="0">
+                      <a:endParaRPr lang="en-US" sz="1250" dirty="0">
                         <a:latin typeface="Arial" charset="0"/>
                         <a:ea typeface="Arial" charset="0"/>
                         <a:cs typeface="Arial" charset="0"/>
                       </a:endParaRPr>
                     </a:p>
                   </a:txBody>
-                  <a:tcPr marL="57785" marR="57785" marT="57785" marB="57785" anchor="t">
+                  <a:tcPr marL="55563" marR="55563" marT="55563" marB="55563" anchor="t">
                     <a:lnL w="12700" cap="flat" cmpd="sng" algn="ctr">
                       <a:solidFill>
                         <a:srgbClr val="CBCBCB"/>
@@ -5077,7 +5349,7 @@
                   </a:tcPr>
                 </a:tc>
               </a:tr>
-              <a:tr h="359271">
+              <a:tr h="346075">
                 <a:tc>
                   <a:txBody>
                     <a:bodyPr/>
@@ -5085,12 +5357,12 @@
                     <a:p>
                       <a:pPr indent="0" marL="0">
                         <a:lnSpc>
-                          <a:spcPts val="1820"/>
+                          <a:spcPts val="1750"/>
                         </a:lnSpc>
                         <a:buNone/>
                       </a:pPr>
                       <a:r>
-                        <a:rPr lang="en-US" sz="1300" dirty="0">
+                        <a:rPr lang="en-US" sz="1250" dirty="0">
                           <a:solidFill>
                             <a:srgbClr val="14213D"/>
                           </a:solidFill>
@@ -5098,16 +5370,16 @@
                           <a:ea typeface="Arial" pitchFamily="34" charset="-122"/>
                           <a:cs typeface="Arial" pitchFamily="34" charset="-120"/>
                         </a:rPr>
-                        <a:t>CREATE DATABASE, USE</a:t>
+                        <a:t>ENUM('presencial','online')</a:t>
                       </a:r>
-                      <a:endParaRPr lang="en-US" sz="1300" dirty="0">
+                      <a:endParaRPr lang="en-US" sz="1250" dirty="0">
                         <a:latin typeface="Arial" charset="0"/>
                         <a:ea typeface="Arial" charset="0"/>
                         <a:cs typeface="Arial" charset="0"/>
                       </a:endParaRPr>
                     </a:p>
                   </a:txBody>
-                  <a:tcPr marL="57785" marR="57785" marT="57785" marB="57785" anchor="t">
+                  <a:tcPr marL="55563" marR="55563" marT="55563" marB="55563" anchor="t">
                     <a:lnL w="12700" cap="flat" cmpd="sng" algn="ctr">
                       <a:solidFill>
                         <a:srgbClr val="CBCBCB"/>
@@ -5153,12 +5425,12 @@
                     <a:p>
                       <a:pPr indent="0" marL="0">
                         <a:lnSpc>
-                          <a:spcPts val="1820"/>
+                          <a:spcPts val="1750"/>
                         </a:lnSpc>
                         <a:buNone/>
                       </a:pPr>
                       <a:r>
-                        <a:rPr lang="en-US" sz="1300" dirty="0">
+                        <a:rPr lang="en-US" sz="1250" dirty="0">
                           <a:solidFill>
                             <a:srgbClr val="14213D"/>
                           </a:solidFill>
@@ -5166,16 +5438,16 @@
                           <a:ea typeface="Arial" pitchFamily="34" charset="-122"/>
                           <a:cs typeface="Arial" pitchFamily="34" charset="-120"/>
                         </a:rPr>
-                        <a:t>Se quitan</a:t>
+                        <a:t>VARCHAR + CHECK</a:t>
                       </a:r>
-                      <a:endParaRPr lang="en-US" sz="1300" dirty="0">
+                      <a:endParaRPr lang="en-US" sz="1250" dirty="0">
                         <a:latin typeface="Arial" charset="0"/>
                         <a:ea typeface="Arial" charset="0"/>
                         <a:cs typeface="Arial" charset="0"/>
                       </a:endParaRPr>
                     </a:p>
                   </a:txBody>
-                  <a:tcPr marL="57785" marR="57785" marT="57785" marB="57785" anchor="t">
+                  <a:tcPr marL="55563" marR="55563" marT="55563" marB="55563" anchor="t">
                     <a:lnL w="12700" cap="flat" cmpd="sng" algn="ctr">
                       <a:solidFill>
                         <a:srgbClr val="CBCBCB"/>
@@ -5221,12 +5493,12 @@
                     <a:p>
                       <a:pPr indent="0" marL="0">
                         <a:lnSpc>
-                          <a:spcPts val="1820"/>
+                          <a:spcPts val="1750"/>
                         </a:lnSpc>
                         <a:buNone/>
                       </a:pPr>
                       <a:r>
-                        <a:rPr lang="en-US" sz="1300" dirty="0">
+                        <a:rPr lang="en-US" sz="1250" dirty="0">
                           <a:solidFill>
                             <a:srgbClr val="14213D"/>
                           </a:solidFill>
@@ -5234,16 +5506,16 @@
                           <a:ea typeface="Arial" pitchFamily="34" charset="-122"/>
                           <a:cs typeface="Arial" pitchFamily="34" charset="-120"/>
                         </a:rPr>
-                        <a:t>Supabase ya da la base</a:t>
+                        <a:t>No admite ENUM dentro de la tabla</a:t>
                       </a:r>
-                      <a:endParaRPr lang="en-US" sz="1300" dirty="0">
+                      <a:endParaRPr lang="en-US" sz="1250" dirty="0">
                         <a:latin typeface="Arial" charset="0"/>
                         <a:ea typeface="Arial" charset="0"/>
                         <a:cs typeface="Arial" charset="0"/>
                       </a:endParaRPr>
                     </a:p>
                   </a:txBody>
-                  <a:tcPr marL="57785" marR="57785" marT="57785" marB="57785" anchor="t">
+                  <a:tcPr marL="55563" marR="55563" marT="55563" marB="55563" anchor="t">
                     <a:lnL w="12700" cap="flat" cmpd="sng" algn="ctr">
                       <a:solidFill>
                         <a:srgbClr val="CBCBCB"/>
@@ -5283,7 +5555,7 @@
                   </a:tcPr>
                 </a:tc>
               </a:tr>
-              <a:tr h="359271">
+              <a:tr h="346075">
                 <a:tc>
                   <a:txBody>
                     <a:bodyPr/>
@@ -5291,12 +5563,12 @@
                     <a:p>
                       <a:pPr indent="0" marL="0">
                         <a:lnSpc>
-                          <a:spcPts val="1820"/>
+                          <a:spcPts val="1750"/>
                         </a:lnSpc>
                         <a:buNone/>
                       </a:pPr>
                       <a:r>
-                        <a:rPr lang="en-US" sz="1300" dirty="0">
+                        <a:rPr lang="en-US" sz="1250" dirty="0">
                           <a:solidFill>
                             <a:srgbClr val="14213D"/>
                           </a:solidFill>
@@ -5304,16 +5576,16 @@
                           <a:ea typeface="Arial" pitchFamily="34" charset="-122"/>
                           <a:cs typeface="Arial" pitchFamily="34" charset="-120"/>
                         </a:rPr>
-                        <a:t>`id` (comillas)</a:t>
+                        <a:t>MONTH(fecha)</a:t>
                       </a:r>
-                      <a:endParaRPr lang="en-US" sz="1300" dirty="0">
+                      <a:endParaRPr lang="en-US" sz="1250" dirty="0">
                         <a:latin typeface="Arial" charset="0"/>
                         <a:ea typeface="Arial" charset="0"/>
                         <a:cs typeface="Arial" charset="0"/>
                       </a:endParaRPr>
                     </a:p>
                   </a:txBody>
-                  <a:tcPr marL="57785" marR="57785" marT="57785" marB="57785" anchor="t">
+                  <a:tcPr marL="55563" marR="55563" marT="55563" marB="55563" anchor="t">
                     <a:lnL w="12700" cap="flat" cmpd="sng" algn="ctr">
                       <a:solidFill>
                         <a:srgbClr val="CBCBCB"/>
@@ -5359,12 +5631,12 @@
                     <a:p>
                       <a:pPr indent="0" marL="0">
                         <a:lnSpc>
-                          <a:spcPts val="1820"/>
+                          <a:spcPts val="1750"/>
                         </a:lnSpc>
                         <a:buNone/>
                       </a:pPr>
                       <a:r>
-                        <a:rPr lang="en-US" sz="1300" dirty="0">
+                        <a:rPr lang="en-US" sz="1250" dirty="0">
                           <a:solidFill>
                             <a:srgbClr val="14213D"/>
                           </a:solidFill>
@@ -5372,16 +5644,16 @@
                           <a:ea typeface="Arial" pitchFamily="34" charset="-122"/>
                           <a:cs typeface="Arial" pitchFamily="34" charset="-120"/>
                         </a:rPr>
-                        <a:t>Sin comillas</a:t>
+                        <a:t>EXTRACT(MONTH FROM fecha)</a:t>
                       </a:r>
-                      <a:endParaRPr lang="en-US" sz="1300" dirty="0">
+                      <a:endParaRPr lang="en-US" sz="1250" dirty="0">
                         <a:latin typeface="Arial" charset="0"/>
                         <a:ea typeface="Arial" charset="0"/>
                         <a:cs typeface="Arial" charset="0"/>
                       </a:endParaRPr>
                     </a:p>
                   </a:txBody>
-                  <a:tcPr marL="57785" marR="57785" marT="57785" marB="57785" anchor="t">
+                  <a:tcPr marL="55563" marR="55563" marT="55563" marB="55563" anchor="t">
                     <a:lnL w="12700" cap="flat" cmpd="sng" algn="ctr">
                       <a:solidFill>
                         <a:srgbClr val="CBCBCB"/>
@@ -5427,12 +5699,12 @@
                     <a:p>
                       <a:pPr indent="0" marL="0">
                         <a:lnSpc>
-                          <a:spcPts val="1820"/>
+                          <a:spcPts val="1750"/>
                         </a:lnSpc>
                         <a:buNone/>
                       </a:pPr>
                       <a:r>
-                        <a:rPr lang="en-US" sz="1300" dirty="0">
+                        <a:rPr lang="en-US" sz="1250" dirty="0">
                           <a:solidFill>
                             <a:srgbClr val="14213D"/>
                           </a:solidFill>
@@ -5440,16 +5712,16 @@
                           <a:ea typeface="Arial" pitchFamily="34" charset="-122"/>
                           <a:cs typeface="Arial" pitchFamily="34" charset="-120"/>
                         </a:rPr>
-                        <a:t>PostgreSQL no las entiende</a:t>
+                        <a:t>Para calcular MesPromoción</a:t>
                       </a:r>
-                      <a:endParaRPr lang="en-US" sz="1300" dirty="0">
+                      <a:endParaRPr lang="en-US" sz="1250" dirty="0">
                         <a:latin typeface="Arial" charset="0"/>
                         <a:ea typeface="Arial" charset="0"/>
                         <a:cs typeface="Arial" charset="0"/>
                       </a:endParaRPr>
                     </a:p>
                   </a:txBody>
-                  <a:tcPr marL="57785" marR="57785" marT="57785" marB="57785" anchor="t">
+                  <a:tcPr marL="55563" marR="55563" marT="55563" marB="55563" anchor="t">
                     <a:lnL w="12700" cap="flat" cmpd="sng" algn="ctr">
                       <a:solidFill>
                         <a:srgbClr val="CBCBCB"/>
@@ -5489,7 +5761,7 @@
                   </a:tcPr>
                 </a:tc>
               </a:tr>
-              <a:tr h="359271">
+              <a:tr h="346075">
                 <a:tc>
                   <a:txBody>
                     <a:bodyPr/>
@@ -5497,12 +5769,12 @@
                     <a:p>
                       <a:pPr indent="0" marL="0">
                         <a:lnSpc>
-                          <a:spcPts val="1820"/>
+                          <a:spcPts val="1750"/>
                         </a:lnSpc>
                         <a:buNone/>
                       </a:pPr>
                       <a:r>
-                        <a:rPr lang="en-US" sz="1300" dirty="0">
+                        <a:rPr lang="en-US" sz="1250" dirty="0">
                           <a:solidFill>
                             <a:srgbClr val="14213D"/>
                           </a:solidFill>
@@ -5510,16 +5782,16 @@
                           <a:ea typeface="Arial" pitchFamily="34" charset="-122"/>
                           <a:cs typeface="Arial" pitchFamily="34" charset="-120"/>
                         </a:rPr>
-                        <a:t>—</a:t>
+                        <a:t>CREATE DATABASE, USE</a:t>
                       </a:r>
-                      <a:endParaRPr lang="en-US" sz="1300" dirty="0">
+                      <a:endParaRPr lang="en-US" sz="1250" dirty="0">
                         <a:latin typeface="Arial" charset="0"/>
                         <a:ea typeface="Arial" charset="0"/>
                         <a:cs typeface="Arial" charset="0"/>
                       </a:endParaRPr>
                     </a:p>
                   </a:txBody>
-                  <a:tcPr marL="57785" marR="57785" marT="57785" marB="57785" anchor="t">
+                  <a:tcPr marL="55563" marR="55563" marT="55563" marB="55563" anchor="t">
                     <a:lnL w="12700" cap="flat" cmpd="sng" algn="ctr">
                       <a:solidFill>
                         <a:srgbClr val="CBCBCB"/>
@@ -5565,12 +5837,12 @@
                     <a:p>
                       <a:pPr indent="0" marL="0">
                         <a:lnSpc>
-                          <a:spcPts val="1820"/>
+                          <a:spcPts val="1750"/>
                         </a:lnSpc>
                         <a:buNone/>
                       </a:pPr>
                       <a:r>
-                        <a:rPr lang="en-US" sz="1300" dirty="0">
+                        <a:rPr lang="en-US" sz="1250" dirty="0">
                           <a:solidFill>
                             <a:srgbClr val="14213D"/>
                           </a:solidFill>
@@ -5578,16 +5850,16 @@
                           <a:ea typeface="Arial" pitchFamily="34" charset="-122"/>
                           <a:cs typeface="Arial" pitchFamily="34" charset="-120"/>
                         </a:rPr>
-                        <a:t>BEGIN … COMMIT</a:t>
+                        <a:t>CREATE SCHEMA v2</a:t>
                       </a:r>
-                      <a:endParaRPr lang="en-US" sz="1300" dirty="0">
+                      <a:endParaRPr lang="en-US" sz="1250" dirty="0">
                         <a:latin typeface="Arial" charset="0"/>
                         <a:ea typeface="Arial" charset="0"/>
                         <a:cs typeface="Arial" charset="0"/>
                       </a:endParaRPr>
                     </a:p>
                   </a:txBody>
-                  <a:tcPr marL="57785" marR="57785" marT="57785" marB="57785" anchor="t">
+                  <a:tcPr marL="55563" marR="55563" marT="55563" marB="55563" anchor="t">
                     <a:lnL w="12700" cap="flat" cmpd="sng" algn="ctr">
                       <a:solidFill>
                         <a:srgbClr val="CBCBCB"/>
@@ -5633,12 +5905,218 @@
                     <a:p>
                       <a:pPr indent="0" marL="0">
                         <a:lnSpc>
-                          <a:spcPts val="1820"/>
+                          <a:spcPts val="1750"/>
                         </a:lnSpc>
                         <a:buNone/>
                       </a:pPr>
                       <a:r>
-                        <a:rPr lang="en-US" sz="1300" dirty="0">
+                        <a:rPr lang="en-US" sz="1250" dirty="0">
+                          <a:solidFill>
+                            <a:srgbClr val="14213D"/>
+                          </a:solidFill>
+                          <a:latin typeface="Arial" pitchFamily="34" charset="0"/>
+                          <a:ea typeface="Arial" pitchFamily="34" charset="-122"/>
+                          <a:cs typeface="Arial" pitchFamily="34" charset="-120"/>
+                        </a:rPr>
+                        <a:t>Supabase ya da la base</a:t>
+                      </a:r>
+                      <a:endParaRPr lang="en-US" sz="1250" dirty="0">
+                        <a:latin typeface="Arial" charset="0"/>
+                        <a:ea typeface="Arial" charset="0"/>
+                        <a:cs typeface="Arial" charset="0"/>
+                      </a:endParaRPr>
+                    </a:p>
+                  </a:txBody>
+                  <a:tcPr marL="55563" marR="55563" marT="55563" marB="55563" anchor="t">
+                    <a:lnL w="12700" cap="flat" cmpd="sng" algn="ctr">
+                      <a:solidFill>
+                        <a:srgbClr val="CBCBCB"/>
+                      </a:solidFill>
+                      <a:prstDash val="solid"/>
+                      <a:round/>
+                      <a:headEnd type="none" w="med" len="med"/>
+                      <a:tailEnd type="none" w="med" len="med"/>
+                    </a:lnL>
+                    <a:lnR w="12700" cap="flat" cmpd="sng" algn="ctr">
+                      <a:solidFill>
+                        <a:srgbClr val="CBCBCB"/>
+                      </a:solidFill>
+                      <a:prstDash val="solid"/>
+                      <a:round/>
+                      <a:headEnd type="none" w="med" len="med"/>
+                      <a:tailEnd type="none" w="med" len="med"/>
+                    </a:lnR>
+                    <a:lnT w="12700" cap="flat" cmpd="sng" algn="ctr">
+                      <a:solidFill>
+                        <a:srgbClr val="CBCBCB"/>
+                      </a:solidFill>
+                      <a:prstDash val="solid"/>
+                      <a:round/>
+                      <a:headEnd type="none" w="med" len="med"/>
+                      <a:tailEnd type="none" w="med" len="med"/>
+                    </a:lnT>
+                    <a:lnB w="12700" cap="flat" cmpd="sng" algn="ctr">
+                      <a:solidFill>
+                        <a:srgbClr val="CBCBCB"/>
+                      </a:solidFill>
+                      <a:prstDash val="solid"/>
+                      <a:round/>
+                      <a:headEnd type="none" w="med" len="med"/>
+                      <a:tailEnd type="none" w="med" len="med"/>
+                    </a:lnB>
+                  </a:tcPr>
+                </a:tc>
+              </a:tr>
+              <a:tr h="346075">
+                <a:tc>
+                  <a:txBody>
+                    <a:bodyPr/>
+                    <a:lstStyle/>
+                    <a:p>
+                      <a:pPr indent="0" marL="0">
+                        <a:lnSpc>
+                          <a:spcPts val="1750"/>
+                        </a:lnSpc>
+                        <a:buNone/>
+                      </a:pPr>
+                      <a:r>
+                        <a:rPr lang="en-US" sz="1250" dirty="0">
+                          <a:solidFill>
+                            <a:srgbClr val="14213D"/>
+                          </a:solidFill>
+                          <a:latin typeface="Arial" pitchFamily="34" charset="0"/>
+                          <a:ea typeface="Arial" pitchFamily="34" charset="-122"/>
+                          <a:cs typeface="Arial" pitchFamily="34" charset="-120"/>
+                        </a:rPr>
+                        <a:t>—</a:t>
+                      </a:r>
+                      <a:endParaRPr lang="en-US" sz="1250" dirty="0">
+                        <a:latin typeface="Arial" charset="0"/>
+                        <a:ea typeface="Arial" charset="0"/>
+                        <a:cs typeface="Arial" charset="0"/>
+                      </a:endParaRPr>
+                    </a:p>
+                  </a:txBody>
+                  <a:tcPr marL="55563" marR="55563" marT="55563" marB="55563" anchor="t">
+                    <a:lnL w="12700" cap="flat" cmpd="sng" algn="ctr">
+                      <a:solidFill>
+                        <a:srgbClr val="CBCBCB"/>
+                      </a:solidFill>
+                      <a:prstDash val="solid"/>
+                      <a:round/>
+                      <a:headEnd type="none" w="med" len="med"/>
+                      <a:tailEnd type="none" w="med" len="med"/>
+                    </a:lnL>
+                    <a:lnR w="12700" cap="flat" cmpd="sng" algn="ctr">
+                      <a:solidFill>
+                        <a:srgbClr val="CBCBCB"/>
+                      </a:solidFill>
+                      <a:prstDash val="solid"/>
+                      <a:round/>
+                      <a:headEnd type="none" w="med" len="med"/>
+                      <a:tailEnd type="none" w="med" len="med"/>
+                    </a:lnR>
+                    <a:lnT w="12700" cap="flat" cmpd="sng" algn="ctr">
+                      <a:solidFill>
+                        <a:srgbClr val="CBCBCB"/>
+                      </a:solidFill>
+                      <a:prstDash val="solid"/>
+                      <a:round/>
+                      <a:headEnd type="none" w="med" len="med"/>
+                      <a:tailEnd type="none" w="med" len="med"/>
+                    </a:lnT>
+                    <a:lnB w="12700" cap="flat" cmpd="sng" algn="ctr">
+                      <a:solidFill>
+                        <a:srgbClr val="CBCBCB"/>
+                      </a:solidFill>
+                      <a:prstDash val="solid"/>
+                      <a:round/>
+                      <a:headEnd type="none" w="med" len="med"/>
+                      <a:tailEnd type="none" w="med" len="med"/>
+                    </a:lnB>
+                  </a:tcPr>
+                </a:tc>
+                <a:tc>
+                  <a:txBody>
+                    <a:bodyPr/>
+                    <a:lstStyle/>
+                    <a:p>
+                      <a:pPr indent="0" marL="0">
+                        <a:lnSpc>
+                          <a:spcPts val="1750"/>
+                        </a:lnSpc>
+                        <a:buNone/>
+                      </a:pPr>
+                      <a:r>
+                        <a:rPr lang="en-US" sz="1250" dirty="0">
+                          <a:solidFill>
+                            <a:srgbClr val="14213D"/>
+                          </a:solidFill>
+                          <a:latin typeface="Arial" pitchFamily="34" charset="0"/>
+                          <a:ea typeface="Arial" pitchFamily="34" charset="-122"/>
+                          <a:cs typeface="Arial" pitchFamily="34" charset="-120"/>
+                        </a:rPr>
+                        <a:t>BEGIN … COMMIT</a:t>
+                      </a:r>
+                      <a:endParaRPr lang="en-US" sz="1250" dirty="0">
+                        <a:latin typeface="Arial" charset="0"/>
+                        <a:ea typeface="Arial" charset="0"/>
+                        <a:cs typeface="Arial" charset="0"/>
+                      </a:endParaRPr>
+                    </a:p>
+                  </a:txBody>
+                  <a:tcPr marL="55563" marR="55563" marT="55563" marB="55563" anchor="t">
+                    <a:lnL w="12700" cap="flat" cmpd="sng" algn="ctr">
+                      <a:solidFill>
+                        <a:srgbClr val="CBCBCB"/>
+                      </a:solidFill>
+                      <a:prstDash val="solid"/>
+                      <a:round/>
+                      <a:headEnd type="none" w="med" len="med"/>
+                      <a:tailEnd type="none" w="med" len="med"/>
+                    </a:lnL>
+                    <a:lnR w="12700" cap="flat" cmpd="sng" algn="ctr">
+                      <a:solidFill>
+                        <a:srgbClr val="CBCBCB"/>
+                      </a:solidFill>
+                      <a:prstDash val="solid"/>
+                      <a:round/>
+                      <a:headEnd type="none" w="med" len="med"/>
+                      <a:tailEnd type="none" w="med" len="med"/>
+                    </a:lnR>
+                    <a:lnT w="12700" cap="flat" cmpd="sng" algn="ctr">
+                      <a:solidFill>
+                        <a:srgbClr val="CBCBCB"/>
+                      </a:solidFill>
+                      <a:prstDash val="solid"/>
+                      <a:round/>
+                      <a:headEnd type="none" w="med" len="med"/>
+                      <a:tailEnd type="none" w="med" len="med"/>
+                    </a:lnT>
+                    <a:lnB w="12700" cap="flat" cmpd="sng" algn="ctr">
+                      <a:solidFill>
+                        <a:srgbClr val="CBCBCB"/>
+                      </a:solidFill>
+                      <a:prstDash val="solid"/>
+                      <a:round/>
+                      <a:headEnd type="none" w="med" len="med"/>
+                      <a:tailEnd type="none" w="med" len="med"/>
+                    </a:lnB>
+                  </a:tcPr>
+                </a:tc>
+                <a:tc>
+                  <a:txBody>
+                    <a:bodyPr/>
+                    <a:lstStyle/>
+                    <a:p>
+                      <a:pPr indent="0" marL="0">
+                        <a:lnSpc>
+                          <a:spcPts val="1750"/>
+                        </a:lnSpc>
+                        <a:buNone/>
+                      </a:pPr>
+                      <a:r>
+                        <a:rPr lang="en-US" sz="1250" dirty="0">
                           <a:solidFill>
                             <a:srgbClr val="14213D"/>
                           </a:solidFill>
@@ -5648,14 +6126,14 @@
                         </a:rPr>
                         <a:t>Si algo falla, nada a medias</a:t>
                       </a:r>
-                      <a:endParaRPr lang="en-US" sz="1300" dirty="0">
+                      <a:endParaRPr lang="en-US" sz="1250" dirty="0">
                         <a:latin typeface="Arial" charset="0"/>
                         <a:ea typeface="Arial" charset="0"/>
                         <a:cs typeface="Arial" charset="0"/>
                       </a:endParaRPr>
                     </a:p>
                   </a:txBody>
-                  <a:tcPr marL="57785" marR="57785" marT="57785" marB="57785" anchor="t">
+                  <a:tcPr marL="55563" marR="55563" marT="55563" marB="55563" anchor="t">
                     <a:lnL w="12700" cap="flat" cmpd="sng" algn="ctr">
                       <a:solidFill>
                         <a:srgbClr val="CBCBCB"/>
@@ -5707,7 +6185,7 @@
         </p:nvSpPr>
         <p:spPr>
           <a:xfrm>
-            <a:off x="812800" y="3994150"/>
+            <a:off x="812800" y="4222750"/>
             <a:ext cx="3403600" cy="1066800"/>
           </a:xfrm>
           <a:prstGeom prst="roundRect">
@@ -5729,7 +6207,7 @@
         </p:nvSpPr>
         <p:spPr>
           <a:xfrm>
-            <a:off x="1016000" y="4171950"/>
+            <a:off x="1016000" y="4400550"/>
             <a:ext cx="3087116" cy="256480"/>
           </a:xfrm>
           <a:prstGeom prst="rect">
@@ -5773,7 +6251,7 @@
         </p:nvSpPr>
         <p:spPr>
           <a:xfrm>
-            <a:off x="1016000" y="4453830"/>
+            <a:off x="1016000" y="4682430"/>
             <a:ext cx="3087116" cy="452041"/>
           </a:xfrm>
           <a:prstGeom prst="rect">
@@ -5803,7 +6281,7 @@
                 <a:ea typeface="Arial" pitchFamily="34" charset="-122"/>
                 <a:cs typeface="Arial" pitchFamily="34" charset="-120"/>
               </a:rPr>
-              <a:t>Primero las 4 sin FK, después las intermedias</a:t>
+              <a:t>persona, promocion, proyecto → alumnos, profesor → intermedias</a:t>
             </a:r>
             <a:endParaRPr lang="en-US" sz="1200" dirty="0"/>
           </a:p>
@@ -5817,7 +6295,7 @@
         </p:nvSpPr>
         <p:spPr>
           <a:xfrm>
-            <a:off x="4394200" y="3994150"/>
+            <a:off x="4394200" y="4222750"/>
             <a:ext cx="3403600" cy="1066800"/>
           </a:xfrm>
           <a:prstGeom prst="roundRect">
@@ -5839,7 +6317,7 @@
         </p:nvSpPr>
         <p:spPr>
           <a:xfrm>
-            <a:off x="4597400" y="4171950"/>
+            <a:off x="4597400" y="4400550"/>
             <a:ext cx="3087116" cy="256480"/>
           </a:xfrm>
           <a:prstGeom prst="rect">
@@ -5883,7 +6361,7 @@
         </p:nvSpPr>
         <p:spPr>
           <a:xfrm>
-            <a:off x="4597400" y="4453830"/>
+            <a:off x="4597400" y="4682430"/>
             <a:ext cx="3087116" cy="452041"/>
           </a:xfrm>
           <a:prstGeom prst="rect">
@@ -5927,7 +6405,7 @@
         </p:nvSpPr>
         <p:spPr>
           <a:xfrm>
-            <a:off x="7975600" y="3994150"/>
+            <a:off x="7975600" y="4222750"/>
             <a:ext cx="3403600" cy="1066800"/>
           </a:xfrm>
           <a:prstGeom prst="roundRect">
@@ -5949,7 +6427,7 @@
         </p:nvSpPr>
         <p:spPr>
           <a:xfrm>
-            <a:off x="8178800" y="4171950"/>
+            <a:off x="8178800" y="4400550"/>
             <a:ext cx="3087116" cy="256480"/>
           </a:xfrm>
           <a:prstGeom prst="rect">
@@ -5993,7 +6471,7 @@
         </p:nvSpPr>
         <p:spPr>
           <a:xfrm>
-            <a:off x="8178800" y="4453830"/>
+            <a:off x="8178800" y="4682430"/>
             <a:ext cx="3087116" cy="238720"/>
           </a:xfrm>
           <a:prstGeom prst="rect">
@@ -6186,7 +6664,7 @@
       </p:sp>
       <p:pic>
         <p:nvPicPr>
-          <p:cNvPr id="5" name="Image 0" descr="Script de creación en MySQL Workbench: DROP y CREATE DATABASE y las tablas promocion, alumnos, proyectos y alumnosProyectos">    </p:cNvPr>
+          <p:cNvPr id="5" name="Image 0" descr="Script MySQL: CREATE DATABASE y las tablas persona, alumnos, profesor, promocion y proyecto">    </p:cNvPr>
           <p:cNvPicPr>
             <a:picLocks noChangeAspect="1"/>
           </p:cNvPicPr>
@@ -6200,8 +6678,8 @@
         </p:blipFill>
         <p:spPr>
           <a:xfrm>
-            <a:off x="1036043" y="1757561"/>
-            <a:ext cx="3617514" cy="4038600"/>
+            <a:off x="1613989" y="1757561"/>
+            <a:ext cx="2461623" cy="4038600"/>
           </a:xfrm>
           <a:prstGeom prst="rect">
             <a:avLst/>
@@ -6346,7 +6824,7 @@
       </p:sp>
       <p:pic>
         <p:nvPicPr>
-          <p:cNvPr id="10" name="Image 2" descr="El mismo script traducido a PostgreSQL, con BEGIN, DROP TABLE IF EXISTS y GENERATED BY DEFAULT AS IDENTITY resaltados">    </p:cNvPr>
+          <p:cNvPr id="10" name="Image 2" descr="El mismo script en PostgreSQL, con BEGIN, CREATE SCHEMA, IDENTITY y CHECK resaltados">    </p:cNvPr>
           <p:cNvPicPr>
             <a:picLocks noChangeAspect="1"/>
           </p:cNvPicPr>
@@ -6360,8 +6838,8 @@
         </p:blipFill>
         <p:spPr>
           <a:xfrm>
-            <a:off x="6189757" y="1757561"/>
-            <a:ext cx="4460686" cy="4038600"/>
+            <a:off x="6845256" y="1757561"/>
+            <a:ext cx="3149688" cy="4038600"/>
           </a:xfrm>
           <a:prstGeom prst="rect">
             <a:avLst/>
@@ -6553,7 +7031,18 @@
                 <a:ea typeface="Arial" pitchFamily="34" charset="-122"/>
                 <a:cs typeface="Arial" pitchFamily="34" charset="-120"/>
               </a:rPr>
-              <a:t>MySQL Workbench</a:t>
+              <a:t>Tablas intermedias</a:t>
+            </a:r>
+            <a:r>
+              <a:rPr lang="en-US" sz="1300" b="1" dirty="0">
+                <a:solidFill>
+                  <a:srgbClr val="14213D"/>
+                </a:solidFill>
+                <a:latin typeface="Arial" pitchFamily="34" charset="0"/>
+                <a:ea typeface="Arial" pitchFamily="34" charset="-122"/>
+                <a:cs typeface="Arial" pitchFamily="34" charset="-120"/>
+              </a:rPr>
+              <a:t> · iguales en los dos</a:t>
             </a:r>
             <a:endParaRPr lang="en-US" sz="1300" dirty="0"/>
           </a:p>
@@ -6583,7 +7072,7 @@
       </p:sp>
       <p:pic>
         <p:nvPicPr>
-          <p:cNvPr id="5" name="Image 0" descr="Script MySQL con las tablas alumnosPromocion, promocionProyectos, claustro con ENUM y promocionClaustro">    </p:cNvPr>
+          <p:cNvPr id="5" name="Image 0" descr="Las 5 tablas intermedias con sus claves primarias compuestas y claves foráneas">    </p:cNvPr>
           <p:cNvPicPr>
             <a:picLocks noChangeAspect="1"/>
           </p:cNvPicPr>
@@ -6597,8 +7086,8 @@
         </p:blipFill>
         <p:spPr>
           <a:xfrm>
-            <a:off x="994528" y="1757561"/>
-            <a:ext cx="3192543" cy="4038600"/>
+            <a:off x="1563493" y="1757561"/>
+            <a:ext cx="2054614" cy="4038600"/>
           </a:xfrm>
           <a:prstGeom prst="rect">
             <a:avLst/>
@@ -6630,39 +7119,16 @@
           </a:ln>
         </p:spPr>
       </p:sp>
-      <p:pic>
-        <p:nvPicPr>
-          <p:cNvPr id="7" name="Image 1" descr="arrow-right">    </p:cNvPr>
-          <p:cNvPicPr>
-            <a:picLocks noChangeAspect="1"/>
-          </p:cNvPicPr>
-          <p:nvPr/>
-        </p:nvPicPr>
-        <p:blipFill>
-          <a:blip r:embed="rId2"/>
-          <a:srcRect l="0" r="0" t="0" b="0"/>
-          <a:stretch/>
-        </p:blipFill>
-        <p:spPr>
-          <a:xfrm>
-            <a:off x="4546600" y="3496171"/>
-            <a:ext cx="457200" cy="254000"/>
-          </a:xfrm>
-          <a:prstGeom prst="rect">
-            <a:avLst/>
-          </a:prstGeom>
-        </p:spPr>
-      </p:pic>
-      <p:sp>
-        <p:nvSpPr>
-          <p:cNvPr id="8" name="Text 4"/>
-          <p:cNvSpPr/>
-          <p:nvPr/>
-        </p:nvSpPr>
-        <p:spPr>
-          <a:xfrm>
-            <a:off x="5181600" y="1437580"/>
-            <a:ext cx="4937760" cy="256480"/>
+      <p:sp>
+        <p:nvSpPr>
+          <p:cNvPr id="7" name="Text 4"/>
+          <p:cNvSpPr/>
+          <p:nvPr/>
+        </p:nvSpPr>
+        <p:spPr>
+          <a:xfrm>
+            <a:off x="4597400" y="2231330"/>
+            <a:ext cx="6985254" cy="256480"/>
           </a:xfrm>
           <a:prstGeom prst="rect">
             <a:avLst/>
@@ -6691,7 +7157,7 @@
                 <a:ea typeface="Arial" pitchFamily="34" charset="-122"/>
                 <a:cs typeface="Arial" pitchFamily="34" charset="-120"/>
               </a:rPr>
-              <a:t>PostgreSQL · Supabase</a:t>
+              <a:t>Final del script en PostgreSQL</a:t>
             </a:r>
             <a:r>
               <a:rPr lang="en-US" sz="1300" b="1" dirty="0">
@@ -6721,18 +7187,18 @@
       </p:sp>
       <p:sp>
         <p:nvSpPr>
-          <p:cNvPr id="9" name="Shape 5"/>
-          <p:cNvSpPr/>
-          <p:nvPr/>
-        </p:nvSpPr>
-        <p:spPr>
-          <a:xfrm>
-            <a:off x="5181600" y="1744861"/>
-            <a:ext cx="4064000" cy="4064000"/>
+          <p:cNvPr id="8" name="Shape 5"/>
+          <p:cNvSpPr/>
+          <p:nvPr/>
+        </p:nvSpPr>
+        <p:spPr>
+          <a:xfrm>
+            <a:off x="4597400" y="2614811"/>
+            <a:ext cx="6350000" cy="1206500"/>
           </a:xfrm>
           <a:prstGeom prst="roundRect">
             <a:avLst>
-              <a:gd name="adj" fmla="val 2500"/>
+              <a:gd name="adj" fmla="val 8421"/>
             </a:avLst>
           </a:prstGeom>
           <a:solidFill>
@@ -6743,43 +7209,42 @@
       </p:sp>
       <p:pic>
         <p:nvPicPr>
-          <p:cNvPr id="10" name="Image 2" descr="Las mismas tablas en PostgreSQL, con IDENTITY y la modalidad como VARCHAR con CHECK resaltados">    </p:cNvPr>
+          <p:cNvPr id="9" name="Image 1" descr="Final del script: setval para ajustar los contadores, COMMIT y la consulta con EXTRACT(MONTH FROM ...)">    </p:cNvPr>
           <p:cNvPicPr>
             <a:picLocks noChangeAspect="1"/>
           </p:cNvPicPr>
           <p:nvPr/>
         </p:nvPicPr>
         <p:blipFill>
-          <a:blip r:embed="rId3"/>
-          <a:srcRect l="-263" r="-263" t="0" b="0"/>
-          <a:stretch/>
+          <a:blip r:embed="rId2"/>
+          <a:stretch>
+            <a:fillRect/>
+          </a:stretch>
         </p:blipFill>
         <p:spPr>
           <a:xfrm>
-            <a:off x="5194300" y="1757561"/>
-            <a:ext cx="4038600" cy="4038600"/>
+            <a:off x="6193389" y="2627511"/>
+            <a:ext cx="3158021" cy="1181100"/>
+          </a:xfrm>
+          <a:prstGeom prst="rect">
+            <a:avLst/>
+          </a:prstGeom>
+        </p:spPr>
+      </p:pic>
+      <p:sp>
+        <p:nvSpPr>
+          <p:cNvPr id="10" name="Shape 6"/>
+          <p:cNvSpPr/>
+          <p:nvPr/>
+        </p:nvSpPr>
+        <p:spPr>
+          <a:xfrm>
+            <a:off x="4603750" y="2621161"/>
+            <a:ext cx="6337300" cy="1193800"/>
           </a:xfrm>
           <a:prstGeom prst="roundRect">
             <a:avLst>
-              <a:gd name="adj" fmla="val 2201"/>
-            </a:avLst>
-          </a:prstGeom>
-        </p:spPr>
-      </p:pic>
-      <p:sp>
-        <p:nvSpPr>
-          <p:cNvPr id="11" name="Shape 6"/>
-          <p:cNvSpPr/>
-          <p:nvPr/>
-        </p:nvSpPr>
-        <p:spPr>
-          <a:xfrm>
-            <a:off x="5187950" y="1751211"/>
-            <a:ext cx="4051300" cy="4051300"/>
-          </a:xfrm>
-          <a:prstGeom prst="roundRect">
-            <a:avLst>
-              <a:gd name="adj" fmla="val 2351"/>
+              <a:gd name="adj" fmla="val 7979"/>
             </a:avLst>
           </a:prstGeom>
           <a:noFill/>
@@ -6793,18 +7258,18 @@
       </p:sp>
       <p:sp>
         <p:nvSpPr>
-          <p:cNvPr id="12" name="Shape 7"/>
-          <p:cNvSpPr/>
-          <p:nvPr/>
-        </p:nvSpPr>
-        <p:spPr>
-          <a:xfrm>
-            <a:off x="9474200" y="2321719"/>
-            <a:ext cx="1905000" cy="2603004"/>
+          <p:cNvPr id="11" name="Shape 7"/>
+          <p:cNvSpPr/>
+          <p:nvPr/>
+        </p:nvSpPr>
+        <p:spPr>
+          <a:xfrm>
+            <a:off x="4597400" y="3973711"/>
+            <a:ext cx="3314700" cy="1041301"/>
           </a:xfrm>
           <a:prstGeom prst="roundRect">
             <a:avLst>
-              <a:gd name="adj" fmla="val 6667"/>
+              <a:gd name="adj" fmla="val 12196"/>
             </a:avLst>
           </a:prstGeom>
           <a:solidFill>
@@ -6815,14 +7280,58 @@
       </p:sp>
       <p:sp>
         <p:nvSpPr>
-          <p:cNvPr id="13" name="Text 8"/>
-          <p:cNvSpPr/>
-          <p:nvPr/>
-        </p:nvSpPr>
-        <p:spPr>
-          <a:xfrm>
-            <a:off x="9652000" y="2499519"/>
-            <a:ext cx="1600200" cy="452041"/>
+          <p:cNvPr id="12" name="Text 8"/>
+          <p:cNvSpPr/>
+          <p:nvPr/>
+        </p:nvSpPr>
+        <p:spPr>
+          <a:xfrm>
+            <a:off x="4775200" y="4151511"/>
+            <a:ext cx="3047873" cy="220960"/>
+          </a:xfrm>
+          <a:prstGeom prst="rect">
+            <a:avLst/>
+          </a:prstGeom>
+          <a:noFill/>
+          <a:ln/>
+        </p:spPr>
+        <p:txBody>
+          <a:bodyPr wrap="square" lIns="0" tIns="0" rIns="0" bIns="0" rtlCol="0" anchor="t">
+            <a:normAutofit/>
+          </a:bodyPr>
+          <a:lstStyle/>
+          <a:p>
+            <a:pPr algn="l" indent="0" marL="0">
+              <a:lnSpc>
+                <a:spcPts val="1540"/>
+              </a:lnSpc>
+              <a:buNone/>
+            </a:pPr>
+            <a:r>
+              <a:rPr lang="en-US" sz="1100" b="1" spc="100" kern="0" dirty="0">
+                <a:solidFill>
+                  <a:srgbClr val="F2A65A"/>
+                </a:solidFill>
+                <a:latin typeface="Arial" pitchFamily="34" charset="0"/>
+                <a:ea typeface="Arial" pitchFamily="34" charset="-122"/>
+                <a:cs typeface="Arial" pitchFamily="34" charset="-120"/>
+              </a:rPr>
+              <a:t>SETVAL</a:t>
+            </a:r>
+            <a:endParaRPr lang="en-US" sz="1100" dirty="0"/>
+          </a:p>
+        </p:txBody>
+      </p:sp>
+      <p:sp>
+        <p:nvSpPr>
+          <p:cNvPr id="13" name="Text 9"/>
+          <p:cNvSpPr/>
+          <p:nvPr/>
+        </p:nvSpPr>
+        <p:spPr>
+          <a:xfrm>
+            <a:off x="4775200" y="4410571"/>
+            <a:ext cx="3047873" cy="452041"/>
           </a:xfrm>
           <a:prstGeom prst="rect">
             <a:avLst/>
@@ -6843,15 +7352,15 @@
               <a:buNone/>
             </a:pPr>
             <a:r>
-              <a:rPr lang="en-US" sz="1200" b="1" spc="100" kern="0" dirty="0">
-                <a:solidFill>
-                  <a:srgbClr val="F2A65A"/>
-                </a:solidFill>
-                <a:latin typeface="Arial" pitchFamily="34" charset="0"/>
-                <a:ea typeface="Arial" pitchFamily="34" charset="-122"/>
-                <a:cs typeface="Arial" pitchFamily="34" charset="-120"/>
-              </a:rPr>
-              <a:t>EL CAMBIO CLAVE</a:t>
+              <a:rPr lang="en-US" sz="1200" dirty="0">
+                <a:solidFill>
+                  <a:srgbClr val="F6F5F0"/>
+                </a:solidFill>
+                <a:latin typeface="Arial" pitchFamily="34" charset="0"/>
+                <a:ea typeface="Arial" pitchFamily="34" charset="-122"/>
+                <a:cs typeface="Arial" pitchFamily="34" charset="-120"/>
+              </a:rPr>
+              <a:t>Como metimos los id a mano, ajusta el contador para que el siguiente sea el 63.</a:t>
             </a:r>
             <a:endParaRPr lang="en-US" sz="1200" dirty="0"/>
           </a:p>
@@ -6859,14 +7368,36 @@
       </p:sp>
       <p:sp>
         <p:nvSpPr>
-          <p:cNvPr id="14" name="Text 9"/>
-          <p:cNvSpPr/>
-          <p:nvPr/>
-        </p:nvSpPr>
-        <p:spPr>
-          <a:xfrm>
-            <a:off x="9652000" y="3027759"/>
-            <a:ext cx="1600200" cy="718641"/>
+          <p:cNvPr id="14" name="Shape 10"/>
+          <p:cNvSpPr/>
+          <p:nvPr/>
+        </p:nvSpPr>
+        <p:spPr>
+          <a:xfrm>
+            <a:off x="8064500" y="3973711"/>
+            <a:ext cx="3314700" cy="1041301"/>
+          </a:xfrm>
+          <a:prstGeom prst="roundRect">
+            <a:avLst>
+              <a:gd name="adj" fmla="val 12196"/>
+            </a:avLst>
+          </a:prstGeom>
+          <a:solidFill>
+            <a:srgbClr val="14213D"/>
+          </a:solidFill>
+          <a:ln/>
+        </p:spPr>
+      </p:sp>
+      <p:sp>
+        <p:nvSpPr>
+          <p:cNvPr id="15" name="Text 11"/>
+          <p:cNvSpPr/>
+          <p:nvPr/>
+        </p:nvSpPr>
+        <p:spPr>
+          <a:xfrm>
+            <a:off x="8242300" y="4151511"/>
+            <a:ext cx="3047873" cy="220960"/>
           </a:xfrm>
           <a:prstGeom prst="rect">
             <a:avLst/>
@@ -6882,57 +7413,35 @@
           <a:p>
             <a:pPr algn="l" indent="0" marL="0">
               <a:lnSpc>
-                <a:spcPts val="1820"/>
+                <a:spcPts val="1540"/>
               </a:lnSpc>
               <a:buNone/>
             </a:pPr>
             <a:r>
-              <a:rPr lang="en-US" sz="1300" dirty="0">
-                <a:solidFill>
-                  <a:srgbClr val="F6F5F0"/>
-                </a:solidFill>
-                <a:latin typeface="Arial" pitchFamily="34" charset="0"/>
-                <a:ea typeface="Arial" pitchFamily="34" charset="-122"/>
-                <a:cs typeface="Arial" pitchFamily="34" charset="-120"/>
-              </a:rPr>
-              <a:t>PostgreSQL no admite </a:t>
-            </a:r>
-            <a:r>
-              <a:rPr lang="en-US" sz="1300" b="1" dirty="0">
-                <a:solidFill>
-                  <a:srgbClr val="F6F5F0"/>
-                </a:solidFill>
-                <a:latin typeface="Arial" pitchFamily="34" charset="0"/>
-                <a:ea typeface="Arial" pitchFamily="34" charset="-122"/>
-                <a:cs typeface="Arial" pitchFamily="34" charset="-120"/>
-              </a:rPr>
-              <a:t>ENUM</a:t>
-            </a:r>
-            <a:r>
-              <a:rPr lang="en-US" sz="1300" dirty="0">
-                <a:solidFill>
-                  <a:srgbClr val="F6F5F0"/>
-                </a:solidFill>
-                <a:latin typeface="Arial" pitchFamily="34" charset="0"/>
-                <a:ea typeface="Arial" pitchFamily="34" charset="-122"/>
-                <a:cs typeface="Arial" pitchFamily="34" charset="-120"/>
-              </a:rPr>
-              <a:t> dentro de la tabla.</a:t>
-            </a:r>
-            <a:endParaRPr lang="en-US" sz="1300" dirty="0"/>
-          </a:p>
-        </p:txBody>
-      </p:sp>
-      <p:sp>
-        <p:nvSpPr>
-          <p:cNvPr id="15" name="Text 10"/>
-          <p:cNvSpPr/>
-          <p:nvPr/>
-        </p:nvSpPr>
-        <p:spPr>
-          <a:xfrm>
-            <a:off x="9652000" y="3822601"/>
-            <a:ext cx="1600200" cy="949722"/>
+              <a:rPr lang="en-US" sz="1100" b="1" spc="100" kern="0" dirty="0">
+                <a:solidFill>
+                  <a:srgbClr val="F2A65A"/>
+                </a:solidFill>
+                <a:latin typeface="Arial" pitchFamily="34" charset="0"/>
+                <a:ea typeface="Arial" pitchFamily="34" charset="-122"/>
+                <a:cs typeface="Arial" pitchFamily="34" charset="-120"/>
+              </a:rPr>
+              <a:t>EXTRACT</a:t>
+            </a:r>
+            <a:endParaRPr lang="en-US" sz="1100" dirty="0"/>
+          </a:p>
+        </p:txBody>
+      </p:sp>
+      <p:sp>
+        <p:nvSpPr>
+          <p:cNvPr id="16" name="Text 12"/>
+          <p:cNvSpPr/>
+          <p:nvPr/>
+        </p:nvSpPr>
+        <p:spPr>
+          <a:xfrm>
+            <a:off x="8242300" y="4410571"/>
+            <a:ext cx="3047873" cy="452041"/>
           </a:xfrm>
           <a:prstGeom prst="rect">
             <a:avLst/>
@@ -6948,12 +7457,12 @@
           <a:p>
             <a:pPr algn="l" indent="0" marL="0">
               <a:lnSpc>
-                <a:spcPts val="1820"/>
+                <a:spcPts val="1680"/>
               </a:lnSpc>
               <a:buNone/>
             </a:pPr>
             <a:r>
-              <a:rPr lang="en-US" sz="1300" dirty="0">
+              <a:rPr lang="en-US" sz="1200" dirty="0">
                 <a:solidFill>
                   <a:srgbClr val="F6F5F0"/>
                 </a:solidFill>
@@ -6961,81 +7470,15 @@
                 <a:ea typeface="Arial" pitchFamily="34" charset="-122"/>
                 <a:cs typeface="Arial" pitchFamily="34" charset="-120"/>
               </a:rPr>
-              <a:t>Usamos </a:t>
-            </a:r>
-            <a:r>
-              <a:rPr lang="en-US" sz="1300" b="1" dirty="0">
-                <a:solidFill>
-                  <a:srgbClr val="F6F5F0"/>
-                </a:solidFill>
-                <a:latin typeface="Arial" pitchFamily="34" charset="0"/>
-                <a:ea typeface="Arial" pitchFamily="34" charset="-122"/>
-                <a:cs typeface="Arial" pitchFamily="34" charset="-120"/>
-              </a:rPr>
-              <a:t>VARCHAR + CHECK</a:t>
-            </a:r>
-            <a:r>
-              <a:rPr lang="en-US" sz="1300" dirty="0">
-                <a:solidFill>
-                  <a:srgbClr val="F6F5F0"/>
-                </a:solidFill>
-                <a:latin typeface="Arial" pitchFamily="34" charset="0"/>
-                <a:ea typeface="Arial" pitchFamily="34" charset="-122"/>
-                <a:cs typeface="Arial" pitchFamily="34" charset="-120"/>
-              </a:rPr>
-              <a:t>: solo deja guardar </a:t>
-            </a:r>
-            <a:r>
-              <a:rPr lang="en-US" sz="1300" dirty="0">
-                <a:solidFill>
-                  <a:srgbClr val="A6E3A1"/>
-                </a:solidFill>
-                <a:latin typeface="Arial" pitchFamily="34" charset="0"/>
-                <a:ea typeface="Arial" pitchFamily="34" charset="-122"/>
-                <a:cs typeface="Arial" pitchFamily="34" charset="-120"/>
-              </a:rPr>
-              <a:t>presencial</a:t>
-            </a:r>
-            <a:r>
-              <a:rPr lang="en-US" sz="1300" dirty="0">
-                <a:solidFill>
-                  <a:srgbClr val="F6F5F0"/>
-                </a:solidFill>
-                <a:latin typeface="Arial" pitchFamily="34" charset="0"/>
-                <a:ea typeface="Arial" pitchFamily="34" charset="-122"/>
-                <a:cs typeface="Arial" pitchFamily="34" charset="-120"/>
-              </a:rPr>
-              <a:t> u </a:t>
-            </a:r>
-            <a:r>
-              <a:rPr lang="en-US" sz="1300" dirty="0">
-                <a:solidFill>
-                  <a:srgbClr val="A6E3A1"/>
-                </a:solidFill>
-                <a:latin typeface="Arial" pitchFamily="34" charset="0"/>
-                <a:ea typeface="Arial" pitchFamily="34" charset="-122"/>
-                <a:cs typeface="Arial" pitchFamily="34" charset="-120"/>
-              </a:rPr>
-              <a:t>online</a:t>
-            </a:r>
-            <a:r>
-              <a:rPr lang="en-US" sz="1300" dirty="0">
-                <a:solidFill>
-                  <a:srgbClr val="F6F5F0"/>
-                </a:solidFill>
-                <a:latin typeface="Arial" pitchFamily="34" charset="0"/>
-                <a:ea typeface="Arial" pitchFamily="34" charset="-122"/>
-                <a:cs typeface="Arial" pitchFamily="34" charset="-120"/>
-              </a:rPr>
-              <a:t>.</a:t>
-            </a:r>
-            <a:endParaRPr lang="en-US" sz="1300" dirty="0"/>
-          </a:p>
-        </p:txBody>
-      </p:sp>
-      <p:sp>
-        <p:nvSpPr>
-          <p:cNvPr id="16" name="Text 11"/>
+              <a:t>MesPromoción no se guarda: se calcula. En MySQL era MONTH(fecha).</a:t>
+            </a:r>
+            <a:endParaRPr lang="en-US" sz="1200" dirty="0"/>
+          </a:p>
+        </p:txBody>
+      </p:sp>
+      <p:sp>
+        <p:nvSpPr>
+          <p:cNvPr id="17" name="Text 13"/>
           <p:cNvSpPr/>
           <p:nvPr/>
         </p:nvSpPr>
@@ -7179,7 +7622,7 @@
       </p:sp>
       <p:pic>
         <p:nvPicPr>
-          <p:cNvPr id="4" name="Image 0" descr="Schema Visualizer de Supabase con las 8 tablas">    </p:cNvPr>
+          <p:cNvPr id="4" name="Image 0" descr="Schema Visualizer de Supabase con las 10 tablas del esquema v2">    </p:cNvPr>
           <p:cNvPicPr>
             <a:picLocks noChangeAspect="1"/>
           </p:cNvPicPr>
@@ -7193,8 +7636,8 @@
         </p:blipFill>
         <p:spPr>
           <a:xfrm>
-            <a:off x="1567686" y="1995289"/>
-            <a:ext cx="3646428" cy="3510657"/>
+            <a:off x="1484363" y="1995289"/>
+            <a:ext cx="3813073" cy="3510657"/>
           </a:xfrm>
           <a:prstGeom prst="rect">
             <a:avLst/>
@@ -7275,7 +7718,7 @@
                 <a:ea typeface="Arial" pitchFamily="34" charset="-122"/>
                 <a:cs typeface="Arial" pitchFamily="34" charset="-120"/>
               </a:rPr>
-              <a:t> · Schema Visualizer</a:t>
+              <a:t> · Schema Visualizer (esquema v2)</a:t>
             </a:r>
             <a:endParaRPr lang="en-US" sz="1268" dirty="0"/>
           </a:p>
@@ -7305,7 +7748,7 @@
       </p:sp>
       <p:pic>
         <p:nvPicPr>
-          <p:cNvPr id="8" name="Image 1" descr="Ingeniería inversa del esquema en MySQL Workbench">    </p:cNvPr>
+          <p:cNvPr id="8" name="Image 1" descr="Ingeniería inversa del esquema en MySQL Workbench con las 10 tablas">    </p:cNvPr>
           <p:cNvPicPr>
             <a:picLocks noChangeAspect="1"/>
           </p:cNvPicPr>
@@ -7319,8 +7762,8 @@
         </p:blipFill>
         <p:spPr>
           <a:xfrm>
-            <a:off x="6688797" y="1995289"/>
-            <a:ext cx="4224606" cy="3510657"/>
+            <a:off x="7043495" y="1995289"/>
+            <a:ext cx="3515210" cy="3510657"/>
           </a:xfrm>
           <a:prstGeom prst="rect">
             <a:avLst/>
@@ -7489,7 +7932,7 @@
                 <a:ea typeface="Arial" pitchFamily="34" charset="-122"/>
                 <a:cs typeface="Arial" pitchFamily="34" charset="-120"/>
               </a:rPr>
-              <a:t>14</a:t>
+              <a:t>15</a:t>
             </a:r>
             <a:endParaRPr lang="en-US" sz="1200" dirty="0"/>
           </a:p>
@@ -7597,7 +8040,7 @@
       </p:sp>
       <p:pic>
         <p:nvPicPr>
-          <p:cNvPr id="4" name="Image 0" descr="Consulta de recuento de filas ejecutada en el SQL Editor de Supabase">    </p:cNvPr>
+          <p:cNvPr id="4" name="Image 0" descr="Consulta de recuento de filas del esquema v2 ejecutada en el SQL Editor de Supabase">    </p:cNvPr>
           <p:cNvPicPr>
             <a:picLocks noChangeAspect="1"/>
           </p:cNvPicPr>
@@ -7611,37 +8054,12 @@
         </p:blipFill>
         <p:spPr>
           <a:xfrm>
-            <a:off x="871014" y="1531541"/>
-            <a:ext cx="4074572" cy="4165600"/>
-          </a:xfrm>
-          <a:custGeom>
+            <a:off x="972067" y="1531541"/>
+            <a:ext cx="3872465" cy="4165600"/>
+          </a:xfrm>
+          <a:prstGeom prst="rect">
             <a:avLst/>
-            <a:gdLst/>
-            <a:ahLst/>
-            <a:cxnLst/>
-            <a:rect l="l" t="t" r="r" b="b"/>
-            <a:pathLst>
-              <a:path w="4074572" h="4165600">
-                <a:moveTo>
-                  <a:pt x="0" y="11306"/>
-                </a:moveTo>
-                <a:arcTo wR="88900" hR="88900" stAng="14447316" swAng="1752684"/>
-                <a:lnTo>
-                  <a:pt x="4031186" y="0"/>
-                </a:lnTo>
-                <a:arcTo wR="88900" hR="88900" stAng="16200000" swAng="1752684"/>
-                <a:lnTo>
-                  <a:pt x="4074572" y="4154294"/>
-                </a:lnTo>
-                <a:arcTo wR="88900" hR="88900" stAng="3647316" swAng="1752684"/>
-                <a:lnTo>
-                  <a:pt x="43386" y="4165600"/>
-                </a:lnTo>
-                <a:arcTo wR="88900" hR="88900" stAng="5400000" swAng="1752684"/>
-                <a:close/>
-              </a:path>
-            </a:pathLst>
-          </a:custGeom>
+          </a:prstGeom>
         </p:spPr>
       </p:pic>
       <p:sp>
@@ -7677,7 +8095,7 @@
         </p:nvSpPr>
         <p:spPr>
           <a:xfrm>
-            <a:off x="5359400" y="1684338"/>
+            <a:off x="5359400" y="1749326"/>
             <a:ext cx="6200394" cy="1041400"/>
           </a:xfrm>
           <a:prstGeom prst="rect">
@@ -7707,7 +8125,7 @@
                 <a:ea typeface="Arial" pitchFamily="34" charset="-122"/>
                 <a:cs typeface="Arial" pitchFamily="34" charset="-120"/>
               </a:rPr>
-              <a:t>420</a:t>
+              <a:t>500</a:t>
             </a:r>
             <a:endParaRPr lang="en-US" sz="8000" dirty="0"/>
           </a:p>
@@ -7721,7 +8139,7 @@
         </p:nvSpPr>
         <p:spPr>
           <a:xfrm>
-            <a:off x="5359400" y="2878138"/>
+            <a:off x="5359400" y="2917726"/>
             <a:ext cx="6200394" cy="345380"/>
           </a:xfrm>
           <a:prstGeom prst="rect">
@@ -7751,7 +8169,7 @@
                 <a:ea typeface="Arial" pitchFamily="34" charset="-122"/>
                 <a:cs typeface="Arial" pitchFamily="34" charset="-120"/>
               </a:rPr>
-              <a:t>filas en 8 tablas, igual que en los CSV</a:t>
+              <a:t>filas repartidas en 10 tablas</a:t>
             </a:r>
             <a:endParaRPr lang="en-US" sz="1800" dirty="0"/>
           </a:p>
@@ -7765,8 +8183,8 @@
         </p:nvSpPr>
         <p:spPr>
           <a:xfrm>
-            <a:off x="5359400" y="3375918"/>
-            <a:ext cx="6019800" cy="2168327"/>
+            <a:off x="5359400" y="3390106"/>
+            <a:ext cx="6019800" cy="2089150"/>
           </a:xfrm>
           <a:prstGeom prst="rect">
             <a:avLst/>
@@ -7792,18 +8210,18 @@
           </p:nvPr>
         </p:nvGraphicFramePr>
         <p:xfrm>
-          <a:off x="5372100" y="3388618"/>
-          <a:ext cx="6007100" cy="2155627"/>
+          <a:off x="5372100" y="3402806"/>
+          <a:ext cx="6007100" cy="2076450"/>
         </p:xfrm>
         <a:graphic>
           <a:graphicData uri="http://schemas.openxmlformats.org/drawingml/2006/table">
             <a:tbl>
               <a:tblPr/>
               <a:tblGrid>
-                <a:gridCol w="3724402"/>
-                <a:gridCol w="2282698"/>
+                <a:gridCol w="3964686"/>
+                <a:gridCol w="2042414"/>
               </a:tblGrid>
-              <a:tr h="359271">
+              <a:tr h="346075">
                 <a:tc>
                   <a:txBody>
                     <a:bodyPr/>
@@ -7811,12 +8229,12 @@
                     <a:p>
                       <a:pPr indent="0" marL="0">
                         <a:lnSpc>
-                          <a:spcPts val="1820"/>
+                          <a:spcPts val="1750"/>
                         </a:lnSpc>
                         <a:buNone/>
                       </a:pPr>
                       <a:r>
-                        <a:rPr lang="en-US" sz="1300" b="1" dirty="0">
+                        <a:rPr lang="en-US" sz="1250" b="1" dirty="0">
                           <a:solidFill>
                             <a:srgbClr val="14213D"/>
                           </a:solidFill>
@@ -7826,14 +8244,14 @@
                         </a:rPr>
                         <a:t>Tabla</a:t>
                       </a:r>
-                      <a:endParaRPr lang="en-US" sz="1300" dirty="0">
+                      <a:endParaRPr lang="en-US" sz="1250" dirty="0">
                         <a:latin typeface="Arial" charset="0"/>
                         <a:ea typeface="Arial" charset="0"/>
                         <a:cs typeface="Arial" charset="0"/>
                       </a:endParaRPr>
                     </a:p>
                   </a:txBody>
-                  <a:tcPr marL="57785" marR="57785" marT="57785" marB="57785" anchor="t">
+                  <a:tcPr marL="55563" marR="55563" marT="55563" marB="55563" anchor="t">
                     <a:lnL w="12700" cap="flat" cmpd="sng" algn="ctr">
                       <a:solidFill>
                         <a:srgbClr val="CBCBCB"/>
@@ -7882,12 +8300,12 @@
                     <a:p>
                       <a:pPr algn="r" indent="0" marL="0">
                         <a:lnSpc>
-                          <a:spcPts val="1820"/>
+                          <a:spcPts val="1750"/>
                         </a:lnSpc>
                         <a:buNone/>
                       </a:pPr>
                       <a:r>
-                        <a:rPr lang="en-US" sz="1300" b="1" dirty="0">
+                        <a:rPr lang="en-US" sz="1250" b="1" dirty="0">
                           <a:solidFill>
                             <a:srgbClr val="14213D"/>
                           </a:solidFill>
@@ -7897,14 +8315,14 @@
                         </a:rPr>
                         <a:t>Filas</a:t>
                       </a:r>
-                      <a:endParaRPr lang="en-US" sz="1300" dirty="0">
+                      <a:endParaRPr lang="en-US" sz="1250" dirty="0">
                         <a:latin typeface="Arial" charset="0"/>
                         <a:ea typeface="Arial" charset="0"/>
                         <a:cs typeface="Arial" charset="0"/>
                       </a:endParaRPr>
                     </a:p>
                   </a:txBody>
-                  <a:tcPr marL="57785" marR="57785" marT="57785" marB="57785" anchor="t">
+                  <a:tcPr marL="55563" marR="55563" marT="55563" marB="55563" anchor="t">
                     <a:lnL w="12700" cap="flat" cmpd="sng" algn="ctr">
                       <a:solidFill>
                         <a:srgbClr val="BCBCBC"/>
@@ -7947,7 +8365,7 @@
                   </a:tcPr>
                 </a:tc>
               </a:tr>
-              <a:tr h="359271">
+              <a:tr h="346075">
                 <a:tc>
                   <a:txBody>
                     <a:bodyPr/>
@@ -7955,12 +8373,12 @@
                     <a:p>
                       <a:pPr indent="0" marL="0">
                         <a:lnSpc>
-                          <a:spcPts val="1820"/>
+                          <a:spcPts val="1750"/>
                         </a:lnSpc>
                         <a:buNone/>
                       </a:pPr>
                       <a:r>
-                        <a:rPr lang="en-US" sz="1300" dirty="0">
+                        <a:rPr lang="en-US" sz="1250" dirty="0">
                           <a:solidFill>
                             <a:srgbClr val="14213D"/>
                           </a:solidFill>
@@ -7968,16 +8386,16 @@
                           <a:ea typeface="Arial" pitchFamily="34" charset="-122"/>
                           <a:cs typeface="Arial" pitchFamily="34" charset="-120"/>
                         </a:rPr>
-                        <a:t>alumnos · alumnosPromocion</a:t>
+                        <a:t>persona = alumnos + profesor</a:t>
                       </a:r>
-                      <a:endParaRPr lang="en-US" sz="1300" dirty="0">
+                      <a:endParaRPr lang="en-US" sz="1250" dirty="0">
                         <a:latin typeface="Arial" charset="0"/>
                         <a:ea typeface="Arial" charset="0"/>
                         <a:cs typeface="Arial" charset="0"/>
                       </a:endParaRPr>
                     </a:p>
                   </a:txBody>
-                  <a:tcPr marL="57785" marR="57785" marT="57785" marB="57785" anchor="t">
+                  <a:tcPr marL="55563" marR="55563" marT="55563" marB="55563" anchor="t">
                     <a:lnL w="12700" cap="flat" cmpd="sng" algn="ctr">
                       <a:solidFill>
                         <a:srgbClr val="CBCBCB"/>
@@ -8023,12 +8441,12 @@
                     <a:p>
                       <a:pPr algn="r" indent="0" marL="0">
                         <a:lnSpc>
-                          <a:spcPts val="1820"/>
+                          <a:spcPts val="1750"/>
                         </a:lnSpc>
                         <a:buNone/>
                       </a:pPr>
                       <a:r>
-                        <a:rPr lang="en-US" sz="1300" dirty="0">
+                        <a:rPr lang="en-US" sz="1250" dirty="0">
                           <a:solidFill>
                             <a:srgbClr val="14213D"/>
                           </a:solidFill>
@@ -8036,16 +8454,16 @@
                           <a:ea typeface="Arial" pitchFamily="34" charset="-122"/>
                           <a:cs typeface="Arial" pitchFamily="34" charset="-120"/>
                         </a:rPr>
-                        <a:t>52 · 52</a:t>
+                        <a:t>62 = 52 + 10</a:t>
                       </a:r>
-                      <a:endParaRPr lang="en-US" sz="1300" dirty="0">
+                      <a:endParaRPr lang="en-US" sz="1250" dirty="0">
                         <a:latin typeface="Arial" charset="0"/>
                         <a:ea typeface="Arial" charset="0"/>
                         <a:cs typeface="Arial" charset="0"/>
                       </a:endParaRPr>
                     </a:p>
                   </a:txBody>
-                  <a:tcPr marL="57785" marR="57785" marT="57785" marB="57785" anchor="t">
+                  <a:tcPr marL="55563" marR="55563" marT="55563" marB="55563" anchor="t">
                     <a:lnL w="12700" cap="flat" cmpd="sng" algn="ctr">
                       <a:solidFill>
                         <a:srgbClr val="CBCBCB"/>
@@ -8085,7 +8503,7 @@
                   </a:tcPr>
                 </a:tc>
               </a:tr>
-              <a:tr h="359271">
+              <a:tr h="346075">
                 <a:tc>
                   <a:txBody>
                     <a:bodyPr/>
@@ -8093,12 +8511,12 @@
                     <a:p>
                       <a:pPr indent="0" marL="0">
                         <a:lnSpc>
-                          <a:spcPts val="1820"/>
+                          <a:spcPts val="1750"/>
                         </a:lnSpc>
                         <a:buNone/>
                       </a:pPr>
                       <a:r>
-                        <a:rPr lang="en-US" sz="1300" dirty="0">
+                        <a:rPr lang="en-US" sz="1250" dirty="0">
                           <a:solidFill>
                             <a:srgbClr val="14213D"/>
                           </a:solidFill>
@@ -8106,16 +8524,16 @@
                           <a:ea typeface="Arial" pitchFamily="34" charset="-122"/>
                           <a:cs typeface="Arial" pitchFamily="34" charset="-120"/>
                         </a:rPr>
-                        <a:t>alumnosProyectos (notas)</a:t>
+                        <a:t>alumnoProyecto (notas)</a:t>
                       </a:r>
-                      <a:endParaRPr lang="en-US" sz="1300" dirty="0">
+                      <a:endParaRPr lang="en-US" sz="1250" dirty="0">
                         <a:latin typeface="Arial" charset="0"/>
                         <a:ea typeface="Arial" charset="0"/>
                         <a:cs typeface="Arial" charset="0"/>
                       </a:endParaRPr>
                     </a:p>
                   </a:txBody>
-                  <a:tcPr marL="57785" marR="57785" marT="57785" marB="57785" anchor="t">
+                  <a:tcPr marL="55563" marR="55563" marT="55563" marB="55563" anchor="t">
                     <a:lnL w="12700" cap="flat" cmpd="sng" algn="ctr">
                       <a:solidFill>
                         <a:srgbClr val="CBCBCB"/>
@@ -8161,12 +8579,12 @@
                     <a:p>
                       <a:pPr algn="r" indent="0" marL="0">
                         <a:lnSpc>
-                          <a:spcPts val="1820"/>
+                          <a:spcPts val="1750"/>
                         </a:lnSpc>
                         <a:buNone/>
                       </a:pPr>
                       <a:r>
-                        <a:rPr lang="en-US" sz="1300" dirty="0">
+                        <a:rPr lang="en-US" sz="1250" dirty="0">
                           <a:solidFill>
                             <a:srgbClr val="14213D"/>
                           </a:solidFill>
@@ -8176,14 +8594,14 @@
                         </a:rPr>
                         <a:t>260</a:t>
                       </a:r>
-                      <a:endParaRPr lang="en-US" sz="1300" dirty="0">
+                      <a:endParaRPr lang="en-US" sz="1250" dirty="0">
                         <a:latin typeface="Arial" charset="0"/>
                         <a:ea typeface="Arial" charset="0"/>
                         <a:cs typeface="Arial" charset="0"/>
                       </a:endParaRPr>
                     </a:p>
                   </a:txBody>
-                  <a:tcPr marL="57785" marR="57785" marT="57785" marB="57785" anchor="t">
+                  <a:tcPr marL="55563" marR="55563" marT="55563" marB="55563" anchor="t">
                     <a:lnL w="12700" cap="flat" cmpd="sng" algn="ctr">
                       <a:solidFill>
                         <a:srgbClr val="CBCBCB"/>
@@ -8223,7 +8641,7 @@
                   </a:tcPr>
                 </a:tc>
               </a:tr>
-              <a:tr h="359271">
+              <a:tr h="346075">
                 <a:tc>
                   <a:txBody>
                     <a:bodyPr/>
@@ -8231,12 +8649,12 @@
                     <a:p>
                       <a:pPr indent="0" marL="0">
                         <a:lnSpc>
-                          <a:spcPts val="1820"/>
+                          <a:spcPts val="1750"/>
                         </a:lnSpc>
                         <a:buNone/>
                       </a:pPr>
                       <a:r>
-                        <a:rPr lang="en-US" sz="1300" dirty="0">
+                        <a:rPr lang="en-US" sz="1250" dirty="0">
                           <a:solidFill>
                             <a:srgbClr val="14213D"/>
                           </a:solidFill>
@@ -8244,16 +8662,16 @@
                           <a:ea typeface="Arial" pitchFamily="34" charset="-122"/>
                           <a:cs typeface="Arial" pitchFamily="34" charset="-120"/>
                         </a:rPr>
-                        <a:t>promocionProyectos</a:t>
+                        <a:t>alumnosPromocion · profesorPromocion</a:t>
                       </a:r>
-                      <a:endParaRPr lang="en-US" sz="1300" dirty="0">
+                      <a:endParaRPr lang="en-US" sz="1250" dirty="0">
                         <a:latin typeface="Arial" charset="0"/>
                         <a:ea typeface="Arial" charset="0"/>
                         <a:cs typeface="Arial" charset="0"/>
                       </a:endParaRPr>
                     </a:p>
                   </a:txBody>
-                  <a:tcPr marL="57785" marR="57785" marT="57785" marB="57785" anchor="t">
+                  <a:tcPr marL="55563" marR="55563" marT="55563" marB="55563" anchor="t">
                     <a:lnL w="12700" cap="flat" cmpd="sng" algn="ctr">
                       <a:solidFill>
                         <a:srgbClr val="CBCBCB"/>
@@ -8299,12 +8717,12 @@
                     <a:p>
                       <a:pPr algn="r" indent="0" marL="0">
                         <a:lnSpc>
-                          <a:spcPts val="1820"/>
+                          <a:spcPts val="1750"/>
                         </a:lnSpc>
                         <a:buNone/>
                       </a:pPr>
                       <a:r>
-                        <a:rPr lang="en-US" sz="1300" dirty="0">
+                        <a:rPr lang="en-US" sz="1250" dirty="0">
                           <a:solidFill>
                             <a:srgbClr val="14213D"/>
                           </a:solidFill>
@@ -8312,16 +8730,16 @@
                           <a:ea typeface="Arial" pitchFamily="34" charset="-122"/>
                           <a:cs typeface="Arial" pitchFamily="34" charset="-120"/>
                         </a:rPr>
-                        <a:t>20</a:t>
+                        <a:t>52 · 10</a:t>
                       </a:r>
-                      <a:endParaRPr lang="en-US" sz="1300" dirty="0">
+                      <a:endParaRPr lang="en-US" sz="1250" dirty="0">
                         <a:latin typeface="Arial" charset="0"/>
                         <a:ea typeface="Arial" charset="0"/>
                         <a:cs typeface="Arial" charset="0"/>
                       </a:endParaRPr>
                     </a:p>
                   </a:txBody>
-                  <a:tcPr marL="57785" marR="57785" marT="57785" marB="57785" anchor="t">
+                  <a:tcPr marL="55563" marR="55563" marT="55563" marB="55563" anchor="t">
                     <a:lnL w="12700" cap="flat" cmpd="sng" algn="ctr">
                       <a:solidFill>
                         <a:srgbClr val="CBCBCB"/>
@@ -8361,7 +8779,7 @@
                   </a:tcPr>
                 </a:tc>
               </a:tr>
-              <a:tr h="359271">
+              <a:tr h="346075">
                 <a:tc>
                   <a:txBody>
                     <a:bodyPr/>
@@ -8369,12 +8787,12 @@
                     <a:p>
                       <a:pPr indent="0" marL="0">
                         <a:lnSpc>
-                          <a:spcPts val="1820"/>
+                          <a:spcPts val="1750"/>
                         </a:lnSpc>
                         <a:buNone/>
                       </a:pPr>
                       <a:r>
-                        <a:rPr lang="en-US" sz="1300" dirty="0">
+                        <a:rPr lang="en-US" sz="1250" dirty="0">
                           <a:solidFill>
                             <a:srgbClr val="14213D"/>
                           </a:solidFill>
@@ -8382,16 +8800,16 @@
                           <a:ea typeface="Arial" pitchFamily="34" charset="-122"/>
                           <a:cs typeface="Arial" pitchFamily="34" charset="-120"/>
                         </a:rPr>
-                        <a:t>claustro · promocionClaustro</a:t>
+                        <a:t>promocionProyecto · profesorProyecto</a:t>
                       </a:r>
-                      <a:endParaRPr lang="en-US" sz="1300" dirty="0">
+                      <a:endParaRPr lang="en-US" sz="1250" dirty="0">
                         <a:latin typeface="Arial" charset="0"/>
                         <a:ea typeface="Arial" charset="0"/>
                         <a:cs typeface="Arial" charset="0"/>
                       </a:endParaRPr>
                     </a:p>
                   </a:txBody>
-                  <a:tcPr marL="57785" marR="57785" marT="57785" marB="57785" anchor="t">
+                  <a:tcPr marL="55563" marR="55563" marT="55563" marB="55563" anchor="t">
                     <a:lnL w="12700" cap="flat" cmpd="sng" algn="ctr">
                       <a:solidFill>
                         <a:srgbClr val="CBCBCB"/>
@@ -8437,12 +8855,12 @@
                     <a:p>
                       <a:pPr algn="r" indent="0" marL="0">
                         <a:lnSpc>
-                          <a:spcPts val="1820"/>
+                          <a:spcPts val="1750"/>
                         </a:lnSpc>
                         <a:buNone/>
                       </a:pPr>
                       <a:r>
-                        <a:rPr lang="en-US" sz="1300" dirty="0">
+                        <a:rPr lang="en-US" sz="1250" dirty="0">
                           <a:solidFill>
                             <a:srgbClr val="14213D"/>
                           </a:solidFill>
@@ -8450,16 +8868,16 @@
                           <a:ea typeface="Arial" pitchFamily="34" charset="-122"/>
                           <a:cs typeface="Arial" pitchFamily="34" charset="-120"/>
                         </a:rPr>
-                        <a:t>10 · 10</a:t>
+                        <a:t>20 · 18</a:t>
                       </a:r>
-                      <a:endParaRPr lang="en-US" sz="1300" dirty="0">
+                      <a:endParaRPr lang="en-US" sz="1250" dirty="0">
                         <a:latin typeface="Arial" charset="0"/>
                         <a:ea typeface="Arial" charset="0"/>
                         <a:cs typeface="Arial" charset="0"/>
                       </a:endParaRPr>
                     </a:p>
                   </a:txBody>
-                  <a:tcPr marL="57785" marR="57785" marT="57785" marB="57785" anchor="t">
+                  <a:tcPr marL="55563" marR="55563" marT="55563" marB="55563" anchor="t">
                     <a:lnL w="12700" cap="flat" cmpd="sng" algn="ctr">
                       <a:solidFill>
                         <a:srgbClr val="CBCBCB"/>
@@ -8499,7 +8917,7 @@
                   </a:tcPr>
                 </a:tc>
               </a:tr>
-              <a:tr h="359271">
+              <a:tr h="346075">
                 <a:tc>
                   <a:txBody>
                     <a:bodyPr/>
@@ -8507,12 +8925,12 @@
                     <a:p>
                       <a:pPr indent="0" marL="0">
                         <a:lnSpc>
-                          <a:spcPts val="1820"/>
+                          <a:spcPts val="1750"/>
                         </a:lnSpc>
                         <a:buNone/>
                       </a:pPr>
                       <a:r>
-                        <a:rPr lang="en-US" sz="1300" dirty="0">
+                        <a:rPr lang="en-US" sz="1250" dirty="0">
                           <a:solidFill>
                             <a:srgbClr val="14213D"/>
                           </a:solidFill>
@@ -8520,16 +8938,16 @@
                           <a:ea typeface="Arial" pitchFamily="34" charset="-122"/>
                           <a:cs typeface="Arial" pitchFamily="34" charset="-120"/>
                         </a:rPr>
-                        <a:t>proyectos · promocion</a:t>
+                        <a:t>proyecto · promocion</a:t>
                       </a:r>
-                      <a:endParaRPr lang="en-US" sz="1300" dirty="0">
+                      <a:endParaRPr lang="en-US" sz="1250" dirty="0">
                         <a:latin typeface="Arial" charset="0"/>
                         <a:ea typeface="Arial" charset="0"/>
                         <a:cs typeface="Arial" charset="0"/>
                       </a:endParaRPr>
                     </a:p>
                   </a:txBody>
-                  <a:tcPr marL="57785" marR="57785" marT="57785" marB="57785" anchor="t">
+                  <a:tcPr marL="55563" marR="55563" marT="55563" marB="55563" anchor="t">
                     <a:lnL w="12700" cap="flat" cmpd="sng" algn="ctr">
                       <a:solidFill>
                         <a:srgbClr val="CBCBCB"/>
@@ -8575,12 +8993,12 @@
                     <a:p>
                       <a:pPr algn="r" indent="0" marL="0">
                         <a:lnSpc>
-                          <a:spcPts val="1820"/>
+                          <a:spcPts val="1750"/>
                         </a:lnSpc>
                         <a:buNone/>
                       </a:pPr>
                       <a:r>
-                        <a:rPr lang="en-US" sz="1300" dirty="0">
+                        <a:rPr lang="en-US" sz="1250" dirty="0">
                           <a:solidFill>
                             <a:srgbClr val="14213D"/>
                           </a:solidFill>
@@ -8590,14 +9008,14 @@
                         </a:rPr>
                         <a:t>10 · 6</a:t>
                       </a:r>
-                      <a:endParaRPr lang="en-US" sz="1300" dirty="0">
+                      <a:endParaRPr lang="en-US" sz="1250" dirty="0">
                         <a:latin typeface="Arial" charset="0"/>
                         <a:ea typeface="Arial" charset="0"/>
                         <a:cs typeface="Arial" charset="0"/>
                       </a:endParaRPr>
                     </a:p>
                   </a:txBody>
-                  <a:tcPr marL="57785" marR="57785" marT="57785" marB="57785" anchor="t">
+                  <a:tcPr marL="55563" marR="55563" marT="55563" marB="55563" anchor="t">
                     <a:lnL w="12700" cap="flat" cmpd="sng" algn="ctr">
                       <a:solidFill>
                         <a:srgbClr val="CBCBCB"/>
@@ -8723,7 +9141,7 @@
                 <a:ea typeface="Arial" pitchFamily="34" charset="-122"/>
                 <a:cs typeface="Arial" pitchFamily="34" charset="-120"/>
               </a:rPr>
-              <a:t>15</a:t>
+              <a:t>16</a:t>
             </a:r>
             <a:endParaRPr lang="en-US" sz="1200" dirty="0"/>
           </a:p>
@@ -11173,7 +11591,7 @@
                 <a:ea typeface="Arial" pitchFamily="34" charset="-122"/>
                 <a:cs typeface="Arial" pitchFamily="34" charset="-120"/>
               </a:rPr>
-              <a:t>Bloque 1 · </a:t>
+              <a:t>Bloque · </a:t>
             </a:r>
             <a:endParaRPr lang="en-US" sz="1200" dirty="0"/>
           </a:p>
@@ -12413,94 +12831,6 @@
         <p:nvSpPr>
           <p:cNvPr id="2" name="Text 0"/>
           <p:cNvSpPr/>
-          <p:nvPr/>
-        </p:nvSpPr>
-        <p:spPr>
-          <a:xfrm>
-            <a:off x="812800" y="6238280"/>
-            <a:ext cx="7848600" cy="238720"/>
-          </a:xfrm>
-          <a:prstGeom prst="rect">
-            <a:avLst/>
-          </a:prstGeom>
-          <a:noFill/>
-          <a:ln/>
-        </p:spPr>
-        <p:txBody>
-          <a:bodyPr wrap="square" lIns="0" tIns="0" rIns="0" bIns="0" rtlCol="0" anchor="t">
-            <a:normAutofit/>
-          </a:bodyPr>
-          <a:lstStyle/>
-          <a:p>
-            <a:pPr algn="l" indent="0" marL="0">
-              <a:lnSpc>
-                <a:spcPts val="1680"/>
-              </a:lnSpc>
-              <a:buNone/>
-            </a:pPr>
-            <a:r>
-              <a:rPr lang="en-US" sz="1200" dirty="0">
-                <a:solidFill>
-                  <a:srgbClr val="6B7690"/>
-                </a:solidFill>
-                <a:latin typeface="Arial" pitchFamily="34" charset="0"/>
-                <a:ea typeface="Arial" pitchFamily="34" charset="-122"/>
-                <a:cs typeface="Arial" pitchFamily="34" charset="-120"/>
-              </a:rPr>
-              <a:t>Bloque 6 · Captura de Supabase</a:t>
-            </a:r>
-            <a:endParaRPr lang="en-US" sz="1200" dirty="0"/>
-          </a:p>
-        </p:txBody>
-      </p:sp>
-      <p:sp>
-        <p:nvSpPr>
-          <p:cNvPr id="3" name="Text 1"/>
-          <p:cNvSpPr/>
-          <p:nvPr/>
-        </p:nvSpPr>
-        <p:spPr>
-          <a:xfrm>
-            <a:off x="10058400" y="6238280"/>
-            <a:ext cx="1320800" cy="238720"/>
-          </a:xfrm>
-          <a:prstGeom prst="rect">
-            <a:avLst/>
-          </a:prstGeom>
-          <a:noFill/>
-          <a:ln/>
-        </p:spPr>
-        <p:txBody>
-          <a:bodyPr wrap="square" lIns="0" tIns="0" rIns="0" bIns="0" rtlCol="0" anchor="t">
-            <a:normAutofit/>
-          </a:bodyPr>
-          <a:lstStyle/>
-          <a:p>
-            <a:pPr algn="r" indent="0" marL="0">
-              <a:lnSpc>
-                <a:spcPts val="1680"/>
-              </a:lnSpc>
-              <a:buNone/>
-            </a:pPr>
-            <a:r>
-              <a:rPr lang="en-US" sz="1200" dirty="0">
-                <a:solidFill>
-                  <a:srgbClr val="6B7690"/>
-                </a:solidFill>
-                <a:latin typeface="Arial" pitchFamily="34" charset="0"/>
-                <a:ea typeface="Arial" pitchFamily="34" charset="-122"/>
-                <a:cs typeface="Arial" pitchFamily="34" charset="-120"/>
-              </a:rPr>
-              <a:t>16</a:t>
-            </a:r>
-            <a:endParaRPr lang="en-US" sz="1200" dirty="0"/>
-          </a:p>
-        </p:txBody>
-      </p:sp>
-      <p:sp>
-        <p:nvSpPr>
-          <p:cNvPr id="4" name="Text 2"/>
-          <p:cNvSpPr/>
           <p:nvPr>
             <p:ph type="title"/>
           </p:nvPr>
@@ -12537,7 +12867,7 @@
                 <a:ea typeface="Arial" pitchFamily="34" charset="-122"/>
                 <a:cs typeface="Arial" pitchFamily="34" charset="-120"/>
               </a:rPr>
-              <a:t>Demo: ¿qué proyecto cuesta más?</a:t>
+              <a:t>Demo: ¿quién corrige cada proyecto?</a:t>
             </a:r>
             <a:endParaRPr lang="en-US" sz="3600" dirty="0"/>
           </a:p>
@@ -12545,18 +12875,18 @@
       </p:sp>
       <p:sp>
         <p:nvSpPr>
-          <p:cNvPr id="5" name="Shape 3"/>
-          <p:cNvSpPr/>
-          <p:nvPr/>
-        </p:nvSpPr>
-        <p:spPr>
-          <a:xfrm>
-            <a:off x="812800" y="1517650"/>
-            <a:ext cx="4191000" cy="4191000"/>
+          <p:cNvPr id="3" name="Shape 1"/>
+          <p:cNvSpPr/>
+          <p:nvPr/>
+        </p:nvSpPr>
+        <p:spPr>
+          <a:xfrm>
+            <a:off x="812800" y="1518841"/>
+            <a:ext cx="4826000" cy="4318000"/>
           </a:xfrm>
           <a:prstGeom prst="roundRect">
             <a:avLst>
-              <a:gd name="adj" fmla="val 2424"/>
+              <a:gd name="adj" fmla="val 2353"/>
             </a:avLst>
           </a:prstGeom>
           <a:solidFill>
@@ -12567,7 +12897,7 @@
       </p:sp>
       <p:pic>
         <p:nvPicPr>
-          <p:cNvPr id="6" name="Image 0" descr="Consulta del porcentaje de aptos por proyecto ejecutada en Supabase">    </p:cNvPr>
+          <p:cNvPr id="4" name="Image 0" descr="Consulta en Supabase con los profesores que corrigen cada proyecto y el porcentaje de aptos">    </p:cNvPr>
           <p:cNvPicPr>
             <a:picLocks noChangeAspect="1"/>
           </p:cNvPicPr>
@@ -12575,59 +12905,35 @@
         </p:nvPicPr>
         <p:blipFill>
           <a:blip r:embed="rId1"/>
-          <a:stretch>
-            <a:fillRect/>
-          </a:stretch>
+          <a:srcRect l="-344" r="-344" t="0" b="0"/>
+          <a:stretch/>
         </p:blipFill>
         <p:spPr>
           <a:xfrm>
-            <a:off x="871014" y="1530350"/>
-            <a:ext cx="4074572" cy="4165600"/>
-          </a:xfrm>
-          <a:custGeom>
-            <a:avLst/>
-            <a:gdLst/>
-            <a:ahLst/>
-            <a:cxnLst/>
-            <a:rect l="l" t="t" r="r" b="b"/>
-            <a:pathLst>
-              <a:path w="4074572" h="4165600">
-                <a:moveTo>
-                  <a:pt x="0" y="11306"/>
-                </a:moveTo>
-                <a:arcTo wR="88900" hR="88900" stAng="14447316" swAng="1752684"/>
-                <a:lnTo>
-                  <a:pt x="4031186" y="0"/>
-                </a:lnTo>
-                <a:arcTo wR="88900" hR="88900" stAng="16200000" swAng="1752684"/>
-                <a:lnTo>
-                  <a:pt x="4074572" y="4154294"/>
-                </a:lnTo>
-                <a:arcTo wR="88900" hR="88900" stAng="3647316" swAng="1752684"/>
-                <a:lnTo>
-                  <a:pt x="43386" y="4165600"/>
-                </a:lnTo>
-                <a:arcTo wR="88900" hR="88900" stAng="5400000" swAng="1752684"/>
-                <a:close/>
-              </a:path>
-            </a:pathLst>
-          </a:custGeom>
-        </p:spPr>
-      </p:pic>
-      <p:sp>
-        <p:nvSpPr>
-          <p:cNvPr id="7" name="Shape 4"/>
-          <p:cNvSpPr/>
-          <p:nvPr/>
-        </p:nvSpPr>
-        <p:spPr>
-          <a:xfrm>
-            <a:off x="819150" y="1524000"/>
-            <a:ext cx="4178300" cy="4178300"/>
+            <a:off x="825500" y="1531541"/>
+            <a:ext cx="4800600" cy="4292600"/>
           </a:xfrm>
           <a:prstGeom prst="roundRect">
             <a:avLst>
-              <a:gd name="adj" fmla="val 2280"/>
+              <a:gd name="adj" fmla="val 2071"/>
+            </a:avLst>
+          </a:prstGeom>
+        </p:spPr>
+      </p:pic>
+      <p:sp>
+        <p:nvSpPr>
+          <p:cNvPr id="5" name="Shape 2"/>
+          <p:cNvSpPr/>
+          <p:nvPr/>
+        </p:nvSpPr>
+        <p:spPr>
+          <a:xfrm>
+            <a:off x="819150" y="1525191"/>
+            <a:ext cx="4813300" cy="4305300"/>
+          </a:xfrm>
+          <a:prstGeom prst="roundRect">
+            <a:avLst>
+              <a:gd name="adj" fmla="val 2212"/>
             </a:avLst>
           </a:prstGeom>
           <a:noFill/>
@@ -12641,36 +12947,36 @@
       </p:sp>
       <p:sp>
         <p:nvSpPr>
-          <p:cNvPr id="8" name="Shape 5"/>
-          <p:cNvSpPr/>
-          <p:nvPr/>
-        </p:nvSpPr>
-        <p:spPr>
-          <a:xfrm>
-            <a:off x="5359400" y="2236589"/>
-            <a:ext cx="2921000" cy="1315641"/>
+          <p:cNvPr id="6" name="Shape 3"/>
+          <p:cNvSpPr/>
+          <p:nvPr/>
+        </p:nvSpPr>
+        <p:spPr>
+          <a:xfrm>
+            <a:off x="5943600" y="2454970"/>
+            <a:ext cx="2641600" cy="1094680"/>
           </a:xfrm>
           <a:prstGeom prst="roundRect">
             <a:avLst>
-              <a:gd name="adj" fmla="val 9653"/>
+              <a:gd name="adj" fmla="val 11602"/>
             </a:avLst>
           </a:prstGeom>
           <a:solidFill>
-            <a:srgbClr val="FFF1E5"/>
+            <a:srgbClr val="EAEEF6"/>
           </a:solidFill>
           <a:ln/>
         </p:spPr>
       </p:sp>
       <p:sp>
         <p:nvSpPr>
-          <p:cNvPr id="9" name="Text 6"/>
-          <p:cNvSpPr/>
-          <p:nvPr/>
-        </p:nvSpPr>
-        <p:spPr>
-          <a:xfrm>
-            <a:off x="5562600" y="2439789"/>
-            <a:ext cx="2590038" cy="635000"/>
+          <p:cNvPr id="7" name="Text 4"/>
+          <p:cNvSpPr/>
+          <p:nvPr/>
+        </p:nvSpPr>
+        <p:spPr>
+          <a:xfrm>
+            <a:off x="6121400" y="2632770"/>
+            <a:ext cx="2354580" cy="482600"/>
           </a:xfrm>
           <a:prstGeom prst="rect">
             <a:avLst/>
@@ -12686,14 +12992,14 @@
           <a:p>
             <a:pPr algn="l" indent="0" marL="0">
               <a:lnSpc>
-                <a:spcPts val="4800"/>
+                <a:spcPts val="3600"/>
               </a:lnSpc>
               <a:buNone/>
             </a:pPr>
             <a:r>
-              <a:rPr lang="en-US" sz="4800" b="1" dirty="0">
-                <a:solidFill>
-                  <a:srgbClr val="B45309"/>
+              <a:rPr lang="en-US" sz="3600" b="1" dirty="0">
+                <a:solidFill>
+                  <a:srgbClr val="2F6FEB"/>
                 </a:solidFill>
                 <a:latin typeface="Arial" pitchFamily="34" charset="0"/>
                 <a:ea typeface="Arial" pitchFamily="34" charset="-122"/>
@@ -12701,9 +13007,97 @@
               </a:rPr>
               <a:t>56 %</a:t>
             </a:r>
-            <a:endParaRPr lang="en-US" sz="4800" dirty="0"/>
-          </a:p>
-        </p:txBody>
+            <a:endParaRPr lang="en-US" sz="3600" dirty="0"/>
+          </a:p>
+        </p:txBody>
+      </p:sp>
+      <p:sp>
+        <p:nvSpPr>
+          <p:cNvPr id="8" name="Text 5"/>
+          <p:cNvSpPr/>
+          <p:nvPr/>
+        </p:nvSpPr>
+        <p:spPr>
+          <a:xfrm>
+            <a:off x="6121400" y="3140770"/>
+            <a:ext cx="2354580" cy="256480"/>
+          </a:xfrm>
+          <a:prstGeom prst="rect">
+            <a:avLst/>
+          </a:prstGeom>
+          <a:noFill/>
+          <a:ln/>
+        </p:spPr>
+        <p:txBody>
+          <a:bodyPr wrap="square" lIns="0" tIns="0" rIns="0" bIns="0" rtlCol="0" anchor="t">
+            <a:normAutofit/>
+          </a:bodyPr>
+          <a:lstStyle/>
+          <a:p>
+            <a:pPr algn="l" indent="0" marL="0">
+              <a:lnSpc>
+                <a:spcPts val="1820"/>
+              </a:lnSpc>
+              <a:buNone/>
+            </a:pPr>
+            <a:r>
+              <a:rPr lang="en-US" sz="1300" dirty="0">
+                <a:solidFill>
+                  <a:srgbClr val="3E4A5E"/>
+                </a:solidFill>
+                <a:latin typeface="Arial" pitchFamily="34" charset="0"/>
+                <a:ea typeface="Arial" pitchFamily="34" charset="-122"/>
+                <a:cs typeface="Arial" pitchFamily="34" charset="-120"/>
+              </a:rPr>
+              <a:t>aptos en </a:t>
+            </a:r>
+            <a:r>
+              <a:rPr lang="en-US" sz="1300" b="1" dirty="0">
+                <a:solidFill>
+                  <a:srgbClr val="3E4A5E"/>
+                </a:solidFill>
+                <a:latin typeface="Arial" pitchFamily="34" charset="0"/>
+                <a:ea typeface="Arial" pitchFamily="34" charset="-122"/>
+                <a:cs typeface="Arial" pitchFamily="34" charset="-120"/>
+              </a:rPr>
+              <a:t>EDA</a:t>
+            </a:r>
+            <a:r>
+              <a:rPr lang="en-US" sz="1300" dirty="0">
+                <a:solidFill>
+                  <a:srgbClr val="3E4A5E"/>
+                </a:solidFill>
+                <a:latin typeface="Arial" pitchFamily="34" charset="0"/>
+                <a:ea typeface="Arial" pitchFamily="34" charset="-122"/>
+                <a:cs typeface="Arial" pitchFamily="34" charset="-120"/>
+              </a:rPr>
+              <a:t>, el más difícil</a:t>
+            </a:r>
+            <a:endParaRPr lang="en-US" sz="1300" dirty="0"/>
+          </a:p>
+        </p:txBody>
+      </p:sp>
+      <p:sp>
+        <p:nvSpPr>
+          <p:cNvPr id="9" name="Shape 6"/>
+          <p:cNvSpPr/>
+          <p:nvPr/>
+        </p:nvSpPr>
+        <p:spPr>
+          <a:xfrm>
+            <a:off x="8737600" y="2454970"/>
+            <a:ext cx="2641600" cy="1094680"/>
+          </a:xfrm>
+          <a:prstGeom prst="roundRect">
+            <a:avLst>
+              <a:gd name="adj" fmla="val 11602"/>
+            </a:avLst>
+          </a:prstGeom>
+          <a:solidFill>
+            <a:srgbClr val="EAEEF6"/>
+          </a:solidFill>
+          <a:ln/>
+        </p:spPr>
       </p:sp>
       <p:sp>
         <p:nvSpPr>
@@ -12713,8 +13107,129 @@
         </p:nvSpPr>
         <p:spPr>
           <a:xfrm>
-            <a:off x="5562600" y="3100189"/>
-            <a:ext cx="2590038" cy="274241"/>
+            <a:off x="8915400" y="2632770"/>
+            <a:ext cx="2354580" cy="482600"/>
+          </a:xfrm>
+          <a:prstGeom prst="rect">
+            <a:avLst/>
+          </a:prstGeom>
+          <a:noFill/>
+          <a:ln/>
+        </p:spPr>
+        <p:txBody>
+          <a:bodyPr wrap="square" lIns="0" tIns="0" rIns="0" bIns="0" rtlCol="0" anchor="t">
+            <a:normAutofit/>
+          </a:bodyPr>
+          <a:lstStyle/>
+          <a:p>
+            <a:pPr algn="l" indent="0" marL="0">
+              <a:lnSpc>
+                <a:spcPts val="3600"/>
+              </a:lnSpc>
+              <a:buNone/>
+            </a:pPr>
+            <a:r>
+              <a:rPr lang="en-US" sz="3600" b="1" dirty="0">
+                <a:solidFill>
+                  <a:srgbClr val="2F6FEB"/>
+                </a:solidFill>
+                <a:latin typeface="Arial" pitchFamily="34" charset="0"/>
+                <a:ea typeface="Arial" pitchFamily="34" charset="-122"/>
+                <a:cs typeface="Arial" pitchFamily="34" charset="-120"/>
+              </a:rPr>
+              <a:t>88 %</a:t>
+            </a:r>
+            <a:endParaRPr lang="en-US" sz="3600" dirty="0"/>
+          </a:p>
+        </p:txBody>
+      </p:sp>
+      <p:sp>
+        <p:nvSpPr>
+          <p:cNvPr id="11" name="Text 8"/>
+          <p:cNvSpPr/>
+          <p:nvPr/>
+        </p:nvSpPr>
+        <p:spPr>
+          <a:xfrm>
+            <a:off x="8915400" y="3140770"/>
+            <a:ext cx="2354580" cy="256480"/>
+          </a:xfrm>
+          <a:prstGeom prst="rect">
+            <a:avLst/>
+          </a:prstGeom>
+          <a:noFill/>
+          <a:ln/>
+        </p:spPr>
+        <p:txBody>
+          <a:bodyPr wrap="square" lIns="0" tIns="0" rIns="0" bIns="0" rtlCol="0" anchor="t">
+            <a:normAutofit/>
+          </a:bodyPr>
+          <a:lstStyle/>
+          <a:p>
+            <a:pPr algn="l" indent="0" marL="0">
+              <a:lnSpc>
+                <a:spcPts val="1820"/>
+              </a:lnSpc>
+              <a:buNone/>
+            </a:pPr>
+            <a:r>
+              <a:rPr lang="en-US" sz="1300" dirty="0">
+                <a:solidFill>
+                  <a:srgbClr val="3E4A5E"/>
+                </a:solidFill>
+                <a:latin typeface="Arial" pitchFamily="34" charset="0"/>
+                <a:ea typeface="Arial" pitchFamily="34" charset="-122"/>
+                <a:cs typeface="Arial" pitchFamily="34" charset="-120"/>
+              </a:rPr>
+              <a:t>aptos en </a:t>
+            </a:r>
+            <a:r>
+              <a:rPr lang="en-US" sz="1300" b="1" dirty="0">
+                <a:solidFill>
+                  <a:srgbClr val="3E4A5E"/>
+                </a:solidFill>
+                <a:latin typeface="Arial" pitchFamily="34" charset="0"/>
+                <a:ea typeface="Arial" pitchFamily="34" charset="-122"/>
+                <a:cs typeface="Arial" pitchFamily="34" charset="-120"/>
+              </a:rPr>
+              <a:t>ML</a:t>
+            </a:r>
+            <a:r>
+              <a:rPr lang="en-US" sz="1300" dirty="0">
+                <a:solidFill>
+                  <a:srgbClr val="3E4A5E"/>
+                </a:solidFill>
+                <a:latin typeface="Arial" pitchFamily="34" charset="0"/>
+                <a:ea typeface="Arial" pitchFamily="34" charset="-122"/>
+                <a:cs typeface="Arial" pitchFamily="34" charset="-120"/>
+              </a:rPr>
+              <a:t> y </a:t>
+            </a:r>
+            <a:r>
+              <a:rPr lang="en-US" sz="1300" b="1" dirty="0">
+                <a:solidFill>
+                  <a:srgbClr val="3E4A5E"/>
+                </a:solidFill>
+                <a:latin typeface="Arial" pitchFamily="34" charset="0"/>
+                <a:ea typeface="Arial" pitchFamily="34" charset="-122"/>
+                <a:cs typeface="Arial" pitchFamily="34" charset="-120"/>
+              </a:rPr>
+              <a:t>Deployment</a:t>
+            </a:r>
+            <a:endParaRPr lang="en-US" sz="1300" dirty="0"/>
+          </a:p>
+        </p:txBody>
+      </p:sp>
+      <p:sp>
+        <p:nvSpPr>
+          <p:cNvPr id="12" name="Text 9"/>
+          <p:cNvSpPr/>
+          <p:nvPr/>
+        </p:nvSpPr>
+        <p:spPr>
+          <a:xfrm>
+            <a:off x="5943600" y="3727450"/>
+            <a:ext cx="5598668" cy="523081"/>
           </a:xfrm>
           <a:prstGeom prst="rect">
             <a:avLst/>
@@ -12737,35 +13252,57 @@
             <a:r>
               <a:rPr lang="en-US" sz="1400" dirty="0">
                 <a:solidFill>
-                  <a:srgbClr val="5A3A1A"/>
-                </a:solidFill>
-                <a:latin typeface="Arial" pitchFamily="34" charset="0"/>
-                <a:ea typeface="Arial" pitchFamily="34" charset="-122"/>
-                <a:cs typeface="Arial" pitchFamily="34" charset="-120"/>
-              </a:rPr>
-              <a:t>aptos en </a:t>
+                  <a:srgbClr val="3E4A5E"/>
+                </a:solidFill>
+                <a:latin typeface="Arial" pitchFamily="34" charset="0"/>
+                <a:ea typeface="Arial" pitchFamily="34" charset="-122"/>
+                <a:cs typeface="Arial" pitchFamily="34" charset="-120"/>
+              </a:rPr>
+              <a:t>Cinco </a:t>
             </a:r>
             <a:r>
               <a:rPr lang="en-US" sz="1400" b="1" dirty="0">
                 <a:solidFill>
-                  <a:srgbClr val="5A3A1A"/>
-                </a:solidFill>
-                <a:latin typeface="Arial" pitchFamily="34" charset="0"/>
-                <a:ea typeface="Arial" pitchFamily="34" charset="-122"/>
-                <a:cs typeface="Arial" pitchFamily="34" charset="-120"/>
-              </a:rPr>
-              <a:t>EDA</a:t>
+                  <a:srgbClr val="14213D"/>
+                </a:solidFill>
+                <a:latin typeface="Arial" pitchFamily="34" charset="0"/>
+                <a:ea typeface="Arial" pitchFamily="34" charset="-122"/>
+                <a:cs typeface="Arial" pitchFamily="34" charset="-120"/>
+              </a:rPr>
+              <a:t>JOIN</a:t>
             </a:r>
             <a:r>
               <a:rPr lang="en-US" sz="1400" dirty="0">
                 <a:solidFill>
-                  <a:srgbClr val="5A3A1A"/>
-                </a:solidFill>
-                <a:latin typeface="Arial" pitchFamily="34" charset="0"/>
-                <a:ea typeface="Arial" pitchFamily="34" charset="-122"/>
-                <a:cs typeface="Arial" pitchFamily="34" charset="-120"/>
-              </a:rPr>
-              <a:t>, el más difícil</a:t>
+                  <a:srgbClr val="3E4A5E"/>
+                </a:solidFill>
+                <a:latin typeface="Arial" pitchFamily="34" charset="0"/>
+                <a:ea typeface="Arial" pitchFamily="34" charset="-122"/>
+                <a:cs typeface="Arial" pitchFamily="34" charset="-120"/>
+              </a:rPr>
+              <a:t> juntan proyecto, profesor, persona y notas, y </a:t>
+            </a:r>
+            <a:r>
+              <a:rPr lang="en-US" sz="1400" b="1" dirty="0">
+                <a:solidFill>
+                  <a:srgbClr val="14213D"/>
+                </a:solidFill>
+                <a:latin typeface="Arial" pitchFamily="34" charset="0"/>
+                <a:ea typeface="Arial" pitchFamily="34" charset="-122"/>
+                <a:cs typeface="Arial" pitchFamily="34" charset="-120"/>
+              </a:rPr>
+              <a:t>GROUP BY</a:t>
+            </a:r>
+            <a:r>
+              <a:rPr lang="en-US" sz="1400" dirty="0">
+                <a:solidFill>
+                  <a:srgbClr val="3E4A5E"/>
+                </a:solidFill>
+                <a:latin typeface="Arial" pitchFamily="34" charset="0"/>
+                <a:ea typeface="Arial" pitchFamily="34" charset="-122"/>
+                <a:cs typeface="Arial" pitchFamily="34" charset="-120"/>
+              </a:rPr>
+              <a:t> calcula el porcentaje de cada proyecto.</a:t>
             </a:r>
             <a:endParaRPr lang="en-US" sz="1400" dirty="0"/>
           </a:p>
@@ -12773,80 +13310,14 @@
       </p:sp>
       <p:sp>
         <p:nvSpPr>
-          <p:cNvPr id="11" name="Shape 8"/>
-          <p:cNvSpPr/>
-          <p:nvPr/>
-        </p:nvSpPr>
-        <p:spPr>
-          <a:xfrm>
-            <a:off x="8458200" y="2236589"/>
-            <a:ext cx="2921000" cy="1315641"/>
-          </a:xfrm>
-          <a:prstGeom prst="roundRect">
-            <a:avLst>
-              <a:gd name="adj" fmla="val 9653"/>
-            </a:avLst>
-          </a:prstGeom>
-          <a:solidFill>
-            <a:srgbClr val="E6F2EB"/>
-          </a:solidFill>
-          <a:ln/>
-        </p:spPr>
-      </p:sp>
-      <p:sp>
-        <p:nvSpPr>
-          <p:cNvPr id="12" name="Text 9"/>
-          <p:cNvSpPr/>
-          <p:nvPr/>
-        </p:nvSpPr>
-        <p:spPr>
-          <a:xfrm>
-            <a:off x="8661400" y="2439789"/>
-            <a:ext cx="2590038" cy="635000"/>
-          </a:xfrm>
-          <a:prstGeom prst="rect">
-            <a:avLst/>
-          </a:prstGeom>
-          <a:noFill/>
-          <a:ln/>
-        </p:spPr>
-        <p:txBody>
-          <a:bodyPr wrap="square" lIns="0" tIns="0" rIns="0" bIns="0" rtlCol="0" anchor="t">
-            <a:normAutofit/>
-          </a:bodyPr>
-          <a:lstStyle/>
-          <a:p>
-            <a:pPr algn="l" indent="0" marL="0">
-              <a:lnSpc>
-                <a:spcPts val="4800"/>
-              </a:lnSpc>
-              <a:buNone/>
-            </a:pPr>
-            <a:r>
-              <a:rPr lang="en-US" sz="4800" b="1" dirty="0">
-                <a:solidFill>
-                  <a:srgbClr val="1F7A4D"/>
-                </a:solidFill>
-                <a:latin typeface="Arial" pitchFamily="34" charset="0"/>
-                <a:ea typeface="Arial" pitchFamily="34" charset="-122"/>
-                <a:cs typeface="Arial" pitchFamily="34" charset="-120"/>
-              </a:rPr>
-              <a:t>88 %</a:t>
-            </a:r>
-            <a:endParaRPr lang="en-US" sz="4800" dirty="0"/>
-          </a:p>
-        </p:txBody>
-      </p:sp>
-      <p:sp>
-        <p:nvSpPr>
           <p:cNvPr id="13" name="Text 10"/>
           <p:cNvSpPr/>
           <p:nvPr/>
         </p:nvSpPr>
         <p:spPr>
           <a:xfrm>
-            <a:off x="8661400" y="3100189"/>
-            <a:ext cx="2590038" cy="274241"/>
+            <a:off x="5943600" y="4402931"/>
+            <a:ext cx="5598668" cy="523081"/>
           </a:xfrm>
           <a:prstGeom prst="rect">
             <a:avLst/>
@@ -12869,46 +13340,35 @@
             <a:r>
               <a:rPr lang="en-US" sz="1400" dirty="0">
                 <a:solidFill>
-                  <a:srgbClr val="2E4A3A"/>
-                </a:solidFill>
-                <a:latin typeface="Arial" pitchFamily="34" charset="0"/>
-                <a:ea typeface="Arial" pitchFamily="34" charset="-122"/>
-                <a:cs typeface="Arial" pitchFamily="34" charset="-120"/>
-              </a:rPr>
-              <a:t>aptos en </a:t>
+                  <a:srgbClr val="3E4A5E"/>
+                </a:solidFill>
+                <a:latin typeface="Arial" pitchFamily="34" charset="0"/>
+                <a:ea typeface="Arial" pitchFamily="34" charset="-122"/>
+                <a:cs typeface="Arial" pitchFamily="34" charset="-120"/>
+              </a:rPr>
+              <a:t>La columna </a:t>
             </a:r>
             <a:r>
               <a:rPr lang="en-US" sz="1400" b="1" dirty="0">
                 <a:solidFill>
-                  <a:srgbClr val="2E4A3A"/>
-                </a:solidFill>
-                <a:latin typeface="Arial" pitchFamily="34" charset="0"/>
-                <a:ea typeface="Arial" pitchFamily="34" charset="-122"/>
-                <a:cs typeface="Arial" pitchFamily="34" charset="-120"/>
-              </a:rPr>
-              <a:t>ML</a:t>
+                  <a:srgbClr val="14213D"/>
+                </a:solidFill>
+                <a:latin typeface="Arial" pitchFamily="34" charset="0"/>
+                <a:ea typeface="Arial" pitchFamily="34" charset="-122"/>
+                <a:cs typeface="Arial" pitchFamily="34" charset="-120"/>
+              </a:rPr>
+              <a:t>corrigen</a:t>
             </a:r>
             <a:r>
               <a:rPr lang="en-US" sz="1400" dirty="0">
                 <a:solidFill>
-                  <a:srgbClr val="2E4A3A"/>
-                </a:solidFill>
-                <a:latin typeface="Arial" pitchFamily="34" charset="0"/>
-                <a:ea typeface="Arial" pitchFamily="34" charset="-122"/>
-                <a:cs typeface="Arial" pitchFamily="34" charset="-120"/>
-              </a:rPr>
-              <a:t> y </a:t>
-            </a:r>
-            <a:r>
-              <a:rPr lang="en-US" sz="1400" b="1" dirty="0">
-                <a:solidFill>
-                  <a:srgbClr val="2E4A3A"/>
-                </a:solidFill>
-                <a:latin typeface="Arial" pitchFamily="34" charset="0"/>
-                <a:ea typeface="Arial" pitchFamily="34" charset="-122"/>
-                <a:cs typeface="Arial" pitchFamily="34" charset="-120"/>
-              </a:rPr>
-              <a:t>Deployment</a:t>
+                  <a:srgbClr val="3E4A5E"/>
+                </a:solidFill>
+                <a:latin typeface="Arial" pitchFamily="34" charset="0"/>
+                <a:ea typeface="Arial" pitchFamily="34" charset="-122"/>
+                <a:cs typeface="Arial" pitchFamily="34" charset="-120"/>
+              </a:rPr>
+              <a:t> solo es posible con el modelo nuevo. Rosalva y Angélica corrigen proyectos de una promoción que no es la suya.</a:t>
             </a:r>
             <a:endParaRPr lang="en-US" sz="1400" dirty="0"/>
           </a:p>
@@ -12922,8 +13382,8 @@
         </p:nvSpPr>
         <p:spPr>
           <a:xfrm>
-            <a:off x="5359400" y="3755430"/>
-            <a:ext cx="6200394" cy="577850"/>
+            <a:off x="812800" y="6238280"/>
+            <a:ext cx="7848600" cy="238720"/>
           </a:xfrm>
           <a:prstGeom prst="rect">
             <a:avLst/>
@@ -12939,66 +13399,22 @@
           <a:p>
             <a:pPr algn="l" indent="0" marL="0">
               <a:lnSpc>
-                <a:spcPts val="2175"/>
+                <a:spcPts val="1680"/>
               </a:lnSpc>
               <a:buNone/>
             </a:pPr>
             <a:r>
-              <a:rPr lang="en-US" sz="1500" dirty="0">
-                <a:solidFill>
-                  <a:srgbClr val="3E4A5E"/>
-                </a:solidFill>
-                <a:latin typeface="Arial" pitchFamily="34" charset="0"/>
-                <a:ea typeface="Arial" pitchFamily="34" charset="-122"/>
-                <a:cs typeface="Arial" pitchFamily="34" charset="-120"/>
-              </a:rPr>
-              <a:t>Un </a:t>
-            </a:r>
-            <a:r>
-              <a:rPr lang="en-US" sz="1500" b="1" dirty="0">
-                <a:solidFill>
-                  <a:srgbClr val="14213D"/>
-                </a:solidFill>
-                <a:latin typeface="Arial" pitchFamily="34" charset="0"/>
-                <a:ea typeface="Arial" pitchFamily="34" charset="-122"/>
-                <a:cs typeface="Arial" pitchFamily="34" charset="-120"/>
-              </a:rPr>
-              <a:t>JOIN</a:t>
-            </a:r>
-            <a:r>
-              <a:rPr lang="en-US" sz="1500" dirty="0">
-                <a:solidFill>
-                  <a:srgbClr val="3E4A5E"/>
-                </a:solidFill>
-                <a:latin typeface="Arial" pitchFamily="34" charset="0"/>
-                <a:ea typeface="Arial" pitchFamily="34" charset="-122"/>
-                <a:cs typeface="Arial" pitchFamily="34" charset="-120"/>
-              </a:rPr>
-              <a:t> vuelve a juntar las notas con el nombre del proyecto, y </a:t>
-            </a:r>
-            <a:r>
-              <a:rPr lang="en-US" sz="1500" b="1" dirty="0">
-                <a:solidFill>
-                  <a:srgbClr val="14213D"/>
-                </a:solidFill>
-                <a:latin typeface="Arial" pitchFamily="34" charset="0"/>
-                <a:ea typeface="Arial" pitchFamily="34" charset="-122"/>
-                <a:cs typeface="Arial" pitchFamily="34" charset="-120"/>
-              </a:rPr>
-              <a:t>GROUP BY</a:t>
-            </a:r>
-            <a:r>
-              <a:rPr lang="en-US" sz="1500" dirty="0">
-                <a:solidFill>
-                  <a:srgbClr val="3E4A5E"/>
-                </a:solidFill>
-                <a:latin typeface="Arial" pitchFamily="34" charset="0"/>
-                <a:ea typeface="Arial" pitchFamily="34" charset="-122"/>
-                <a:cs typeface="Arial" pitchFamily="34" charset="-120"/>
-              </a:rPr>
-              <a:t> calcula el porcentaje de cada uno.</a:t>
-            </a:r>
-            <a:endParaRPr lang="en-US" sz="1500" dirty="0"/>
+              <a:rPr lang="en-US" sz="1200" dirty="0">
+                <a:solidFill>
+                  <a:srgbClr val="6B7690"/>
+                </a:solidFill>
+                <a:latin typeface="Arial" pitchFamily="34" charset="0"/>
+                <a:ea typeface="Arial" pitchFamily="34" charset="-122"/>
+                <a:cs typeface="Arial" pitchFamily="34" charset="-120"/>
+              </a:rPr>
+              <a:t>Bloque 6 · Captura de Supabase</a:t>
+            </a:r>
+            <a:endParaRPr lang="en-US" sz="1200" dirty="0"/>
           </a:p>
         </p:txBody>
       </p:sp>
@@ -13010,8 +13426,8 @@
         </p:nvSpPr>
         <p:spPr>
           <a:xfrm>
-            <a:off x="5359400" y="4511080"/>
-            <a:ext cx="6200394" cy="504031"/>
+            <a:off x="10058400" y="6238280"/>
+            <a:ext cx="1320800" cy="238720"/>
           </a:xfrm>
           <a:prstGeom prst="rect">
             <a:avLst/>
@@ -13025,24 +13441,24 @@
           </a:bodyPr>
           <a:lstStyle/>
           <a:p>
-            <a:pPr algn="l" indent="0" marL="0">
+            <a:pPr algn="r" indent="0" marL="0">
               <a:lnSpc>
-                <a:spcPts val="1885"/>
+                <a:spcPts val="1680"/>
               </a:lnSpc>
               <a:buNone/>
             </a:pPr>
             <a:r>
-              <a:rPr lang="en-US" sz="1300" dirty="0">
-                <a:solidFill>
-                  <a:srgbClr val="3E4A5E"/>
-                </a:solidFill>
-                <a:latin typeface="Arial" pitchFamily="34" charset="0"/>
-                <a:ea typeface="Arial" pitchFamily="34" charset="-122"/>
-                <a:cs typeface="Arial" pitchFamily="34" charset="-120"/>
-              </a:rPr>
-              <a:t>Más consultas en el PDF: alumnos por promoción, ficha de un alumno, profesorado y modalidad, alumnos con todo aprobado.</a:t>
-            </a:r>
-            <a:endParaRPr lang="en-US" sz="1300" dirty="0"/>
+              <a:rPr lang="en-US" sz="1200" dirty="0">
+                <a:solidFill>
+                  <a:srgbClr val="6B7690"/>
+                </a:solidFill>
+                <a:latin typeface="Arial" pitchFamily="34" charset="0"/>
+                <a:ea typeface="Arial" pitchFamily="34" charset="-122"/>
+                <a:cs typeface="Arial" pitchFamily="34" charset="-120"/>
+              </a:rPr>
+              <a:t>20</a:t>
+            </a:r>
+            <a:endParaRPr lang="en-US" sz="1200" dirty="0"/>
           </a:p>
         </p:txBody>
       </p:sp>
@@ -13132,8 +13548,8 @@
         </p:nvSpPr>
         <p:spPr>
           <a:xfrm>
-            <a:off x="812800" y="1888133"/>
-            <a:ext cx="5650992" cy="238720"/>
+            <a:off x="812800" y="1863229"/>
+            <a:ext cx="5258562" cy="238720"/>
           </a:xfrm>
           <a:prstGeom prst="rect">
             <a:avLst/>
@@ -13162,7 +13578,7 @@
                 <a:ea typeface="Arial" pitchFamily="34" charset="-122"/>
                 <a:cs typeface="Arial" pitchFamily="34" charset="-120"/>
               </a:rPr>
-              <a:t>ABRIR EL CAMPUS DE BARCELONA</a:t>
+              <a:t>UN ALUMNO QUE PASA A SER TA</a:t>
             </a:r>
             <a:endParaRPr lang="en-US" sz="1200" dirty="0"/>
           </a:p>
@@ -13176,12 +13592,12 @@
         </p:nvSpPr>
         <p:spPr>
           <a:xfrm>
-            <a:off x="812800" y="2253853"/>
-            <a:ext cx="5486400" cy="1559322"/>
+            <a:off x="812800" y="2228949"/>
+            <a:ext cx="5105400" cy="1283791"/>
           </a:xfrm>
           <a:prstGeom prst="roundRect">
             <a:avLst>
-              <a:gd name="adj" fmla="val 8145"/>
+              <a:gd name="adj" fmla="val 9893"/>
             </a:avLst>
           </a:prstGeom>
           <a:solidFill>
@@ -13190,7 +13606,7 @@
           <a:ln/>
         </p:spPr>
         <p:txBody>
-          <a:bodyPr wrap="square" lIns="216803" tIns="191403" rIns="67451" bIns="166003" rtlCol="0" anchor="t">
+          <a:bodyPr wrap="square" lIns="216803" tIns="191403" rIns="78881" bIns="166003" rtlCol="0" anchor="t">
             <a:normAutofit/>
           </a:bodyPr>
           <a:lstStyle/>
@@ -13221,7 +13637,7 @@
                 <a:ea typeface="Courier New" pitchFamily="49" charset="-122"/>
                 <a:cs typeface="Courier New" pitchFamily="49" charset="-120"/>
               </a:rPr>
-              <a:t> promocion</a:t>
+              <a:t> profesor</a:t>
             </a:r>
             <a:endParaRPr lang="en-US" sz="1400" dirty="0"/>
           </a:p>
@@ -13241,7 +13657,7 @@
                 <a:ea typeface="Courier New" pitchFamily="49" charset="-122"/>
                 <a:cs typeface="Courier New" pitchFamily="49" charset="-120"/>
               </a:rPr>
-              <a:t>(año, fecha_comienzo, campus, vertical)</a:t>
+              <a:t>(id_persona, rol, modalidad)</a:t>
             </a:r>
             <a:endParaRPr lang="en-US" sz="1400" dirty="0"/>
           </a:p>
@@ -13272,7 +13688,7 @@
                 <a:ea typeface="Courier New" pitchFamily="49" charset="-122"/>
                 <a:cs typeface="Courier New" pitchFamily="49" charset="-120"/>
               </a:rPr>
-              <a:t> (2025, </a:t>
+              <a:t> (1, </a:t>
             </a:r>
             <a:r>
               <a:rPr lang="en-US" sz="1400" dirty="0">
@@ -13283,7 +13699,7 @@
                 <a:ea typeface="Courier New" pitchFamily="49" charset="-122"/>
                 <a:cs typeface="Courier New" pitchFamily="49" charset="-120"/>
               </a:rPr>
-              <a:t>'2025-09-15'</a:t>
+              <a:t>'TA'</a:t>
             </a:r>
             <a:r>
               <a:rPr lang="en-US" sz="1400" dirty="0">
@@ -13294,17 +13710,8 @@
                 <a:ea typeface="Courier New" pitchFamily="49" charset="-122"/>
                 <a:cs typeface="Courier New" pitchFamily="49" charset="-120"/>
               </a:rPr>
-              <a:t>,</a:t>
-            </a:r>
-            <a:endParaRPr lang="en-US" sz="1400" dirty="0"/>
-          </a:p>
-          <a:p>
-            <a:pPr algn="l" indent="0" marL="0">
-              <a:lnSpc>
-                <a:spcPts val="2170"/>
-              </a:lnSpc>
-              <a:buNone/>
-            </a:pPr>
+              <a:t>, </a:t>
+            </a:r>
             <a:r>
               <a:rPr lang="en-US" sz="1400" dirty="0">
                 <a:solidFill>
@@ -13314,7 +13721,7 @@
                 <a:ea typeface="Courier New" pitchFamily="49" charset="-122"/>
                 <a:cs typeface="Courier New" pitchFamily="49" charset="-120"/>
               </a:rPr>
-              <a:t>'Barcelona'</a:t>
+              <a:t>'presencial'</a:t>
             </a:r>
             <a:r>
               <a:rPr lang="en-US" sz="1400" dirty="0">
@@ -13325,28 +13732,6 @@
                 <a:ea typeface="Courier New" pitchFamily="49" charset="-122"/>
                 <a:cs typeface="Courier New" pitchFamily="49" charset="-120"/>
               </a:rPr>
-              <a:t>, </a:t>
-            </a:r>
-            <a:r>
-              <a:rPr lang="en-US" sz="1400" dirty="0">
-                <a:solidFill>
-                  <a:srgbClr val="A6E3A1"/>
-                </a:solidFill>
-                <a:latin typeface="Courier New" pitchFamily="49" charset="0"/>
-                <a:ea typeface="Courier New" pitchFamily="49" charset="-122"/>
-                <a:cs typeface="Courier New" pitchFamily="49" charset="-120"/>
-              </a:rPr>
-              <a:t>'DS'</a:t>
-            </a:r>
-            <a:r>
-              <a:rPr lang="en-US" sz="1400" dirty="0">
-                <a:solidFill>
-                  <a:srgbClr val="E8EDF6"/>
-                </a:solidFill>
-                <a:latin typeface="Courier New" pitchFamily="49" charset="0"/>
-                <a:ea typeface="Courier New" pitchFamily="49" charset="-122"/>
-                <a:cs typeface="Courier New" pitchFamily="49" charset="-120"/>
-              </a:rPr>
               <a:t>);</a:t>
             </a:r>
             <a:endParaRPr lang="en-US" sz="1400" dirty="0"/>
@@ -13361,8 +13746,8 @@
         </p:nvSpPr>
         <p:spPr>
           <a:xfrm>
-            <a:off x="812800" y="3965575"/>
-            <a:ext cx="5650992" cy="274241"/>
+            <a:off x="812800" y="3665141"/>
+            <a:ext cx="5258562" cy="523081"/>
           </a:xfrm>
           <a:prstGeom prst="rect">
             <a:avLst/>
@@ -13391,7 +13776,7 @@
                 <a:ea typeface="Arial" pitchFamily="34" charset="-122"/>
                 <a:cs typeface="Arial" pitchFamily="34" charset="-120"/>
               </a:rPr>
-              <a:t>Sin tocar la estructura. El id se genera solo.</a:t>
+              <a:t>Jafet (persona 1) ya es alumno y ahora también profesor. Sin repetir su nombre ni su email.</a:t>
             </a:r>
             <a:endParaRPr lang="en-US" sz="1400" dirty="0"/>
           </a:p>
@@ -13405,8 +13790,8 @@
         </p:nvSpPr>
         <p:spPr>
           <a:xfrm>
-            <a:off x="6553200" y="1569641"/>
-            <a:ext cx="4826000" cy="2963267"/>
+            <a:off x="6172200" y="1569641"/>
+            <a:ext cx="5207000" cy="2886869"/>
           </a:xfrm>
           <a:prstGeom prst="rect">
             <a:avLst/>
@@ -13432,18 +13817,18 @@
           </p:nvPr>
         </p:nvGraphicFramePr>
         <p:xfrm>
-          <a:off x="6565900" y="1582341"/>
-          <a:ext cx="4813300" cy="2950567"/>
+          <a:off x="6184900" y="1582341"/>
+          <a:ext cx="5194300" cy="2874169"/>
         </p:xfrm>
         <a:graphic>
           <a:graphicData uri="http://schemas.openxmlformats.org/drawingml/2006/table">
             <a:tbl>
               <a:tblPr/>
               <a:tblGrid>
-                <a:gridCol w="2695448"/>
-                <a:gridCol w="2117852"/>
+                <a:gridCol w="2908808"/>
+                <a:gridCol w="2285492"/>
               </a:tblGrid>
-              <a:tr h="634802">
+              <a:tr h="359271">
                 <a:tc>
                   <a:txBody>
                     <a:bodyPr/>
@@ -13451,12 +13836,12 @@
                     <a:p>
                       <a:pPr indent="0" marL="0">
                         <a:lnSpc>
-                          <a:spcPts val="1960"/>
+                          <a:spcPts val="1820"/>
                         </a:lnSpc>
                         <a:buNone/>
                       </a:pPr>
                       <a:r>
-                        <a:rPr lang="en-US" sz="1400" b="1" dirty="0">
+                        <a:rPr lang="en-US" sz="1300" b="1" dirty="0">
                           <a:solidFill>
                             <a:srgbClr val="14213D"/>
                           </a:solidFill>
@@ -13466,14 +13851,14 @@
                         </a:rPr>
                         <a:t>Quiero añadir…</a:t>
                       </a:r>
-                      <a:endParaRPr lang="en-US" sz="1400" dirty="0">
+                      <a:endParaRPr lang="en-US" sz="1300" dirty="0">
                         <a:latin typeface="Arial" charset="0"/>
                         <a:ea typeface="Arial" charset="0"/>
                         <a:cs typeface="Arial" charset="0"/>
                       </a:endParaRPr>
                     </a:p>
                   </a:txBody>
-                  <a:tcPr marL="62230" marR="62230" marT="62230" marB="62230" anchor="t">
+                  <a:tcPr marL="57785" marR="57785" marT="57785" marB="57785" anchor="t">
                     <a:lnL w="12700" cap="flat" cmpd="sng" algn="ctr">
                       <a:solidFill>
                         <a:srgbClr val="CBCBCB"/>
@@ -13522,12 +13907,12 @@
                     <a:p>
                       <a:pPr indent="0" marL="0">
                         <a:lnSpc>
-                          <a:spcPts val="1960"/>
+                          <a:spcPts val="1820"/>
                         </a:lnSpc>
                         <a:buNone/>
                       </a:pPr>
                       <a:r>
-                        <a:rPr lang="en-US" sz="1400" b="1" dirty="0">
+                        <a:rPr lang="en-US" sz="1300" b="1" dirty="0">
                           <a:solidFill>
                             <a:srgbClr val="14213D"/>
                           </a:solidFill>
@@ -13537,14 +13922,14 @@
                         </a:rPr>
                         <a:t>¿Cambia la estructura?</a:t>
                       </a:r>
-                      <a:endParaRPr lang="en-US" sz="1400" dirty="0">
+                      <a:endParaRPr lang="en-US" sz="1300" dirty="0">
                         <a:latin typeface="Arial" charset="0"/>
                         <a:ea typeface="Arial" charset="0"/>
                         <a:cs typeface="Arial" charset="0"/>
                       </a:endParaRPr>
                     </a:p>
                   </a:txBody>
-                  <a:tcPr marL="62230" marR="62230" marT="62230" marB="62230" anchor="t">
+                  <a:tcPr marL="57785" marR="57785" marT="57785" marB="57785" anchor="t">
                     <a:lnL w="12700" cap="flat" cmpd="sng" algn="ctr">
                       <a:solidFill>
                         <a:srgbClr val="BCBCBC"/>
@@ -13587,7 +13972,7 @@
                   </a:tcPr>
                 </a:tc>
               </a:tr>
-              <a:tr h="385961">
+              <a:tr h="359271">
                 <a:tc>
                   <a:txBody>
                     <a:bodyPr/>
@@ -13595,12 +13980,12 @@
                     <a:p>
                       <a:pPr indent="0" marL="0">
                         <a:lnSpc>
-                          <a:spcPts val="1960"/>
+                          <a:spcPts val="1820"/>
                         </a:lnSpc>
                         <a:buNone/>
                       </a:pPr>
                       <a:r>
-                        <a:rPr lang="en-US" sz="1400" dirty="0">
+                        <a:rPr lang="en-US" sz="1300" dirty="0">
                           <a:solidFill>
                             <a:srgbClr val="14213D"/>
                           </a:solidFill>
@@ -13610,14 +13995,14 @@
                         </a:rPr>
                         <a:t>Un campus o promoción</a:t>
                       </a:r>
-                      <a:endParaRPr lang="en-US" sz="1400" dirty="0">
+                      <a:endParaRPr lang="en-US" sz="1300" dirty="0">
                         <a:latin typeface="Arial" charset="0"/>
                         <a:ea typeface="Arial" charset="0"/>
                         <a:cs typeface="Arial" charset="0"/>
                       </a:endParaRPr>
                     </a:p>
                   </a:txBody>
-                  <a:tcPr marL="62230" marR="62230" marT="62230" marB="62230" anchor="t">
+                  <a:tcPr marL="57785" marR="57785" marT="57785" marB="57785" anchor="t">
                     <a:lnL w="12700" cap="flat" cmpd="sng" algn="ctr">
                       <a:solidFill>
                         <a:srgbClr val="CBCBCB"/>
@@ -13663,12 +14048,12 @@
                     <a:p>
                       <a:pPr indent="0" marL="0">
                         <a:lnSpc>
-                          <a:spcPts val="1960"/>
+                          <a:spcPts val="1820"/>
                         </a:lnSpc>
                         <a:buNone/>
                       </a:pPr>
                       <a:r>
-                        <a:rPr lang="en-US" sz="1400" dirty="0">
+                        <a:rPr lang="en-US" sz="1300" dirty="0">
                           <a:solidFill>
                             <a:srgbClr val="14213D"/>
                           </a:solidFill>
@@ -13678,14 +14063,14 @@
                         </a:rPr>
                         <a:t>No</a:t>
                       </a:r>
-                      <a:endParaRPr lang="en-US" sz="1400" dirty="0">
+                      <a:endParaRPr lang="en-US" sz="1300" dirty="0">
                         <a:latin typeface="Arial" charset="0"/>
                         <a:ea typeface="Arial" charset="0"/>
                         <a:cs typeface="Arial" charset="0"/>
                       </a:endParaRPr>
                     </a:p>
                   </a:txBody>
-                  <a:tcPr marL="62230" marR="62230" marT="62230" marB="62230" anchor="t">
+                  <a:tcPr marL="57785" marR="57785" marT="57785" marB="57785" anchor="t">
                     <a:lnL w="12700" cap="flat" cmpd="sng" algn="ctr">
                       <a:solidFill>
                         <a:srgbClr val="CBCBCB"/>
@@ -13725,7 +14110,7 @@
                   </a:tcPr>
                 </a:tc>
               </a:tr>
-              <a:tr h="385961">
+              <a:tr h="359271">
                 <a:tc>
                   <a:txBody>
                     <a:bodyPr/>
@@ -13733,12 +14118,12 @@
                     <a:p>
                       <a:pPr indent="0" marL="0">
                         <a:lnSpc>
-                          <a:spcPts val="1960"/>
+                          <a:spcPts val="1820"/>
                         </a:lnSpc>
                         <a:buNone/>
                       </a:pPr>
                       <a:r>
-                        <a:rPr lang="en-US" sz="1400" dirty="0">
+                        <a:rPr lang="en-US" sz="1300" dirty="0">
                           <a:solidFill>
                             <a:srgbClr val="14213D"/>
                           </a:solidFill>
@@ -13746,16 +14131,16 @@
                           <a:ea typeface="Arial" pitchFamily="34" charset="-122"/>
                           <a:cs typeface="Arial" pitchFamily="34" charset="-120"/>
                         </a:rPr>
-                        <a:t>Un proyecto</a:t>
+                        <a:t>Un proyecto o una vertical</a:t>
                       </a:r>
-                      <a:endParaRPr lang="en-US" sz="1400" dirty="0">
+                      <a:endParaRPr lang="en-US" sz="1300" dirty="0">
                         <a:latin typeface="Arial" charset="0"/>
                         <a:ea typeface="Arial" charset="0"/>
                         <a:cs typeface="Arial" charset="0"/>
                       </a:endParaRPr>
                     </a:p>
                   </a:txBody>
-                  <a:tcPr marL="62230" marR="62230" marT="62230" marB="62230" anchor="t">
+                  <a:tcPr marL="57785" marR="57785" marT="57785" marB="57785" anchor="t">
                     <a:lnL w="12700" cap="flat" cmpd="sng" algn="ctr">
                       <a:solidFill>
                         <a:srgbClr val="CBCBCB"/>
@@ -13801,12 +14186,12 @@
                     <a:p>
                       <a:pPr indent="0" marL="0">
                         <a:lnSpc>
-                          <a:spcPts val="1960"/>
+                          <a:spcPts val="1820"/>
                         </a:lnSpc>
                         <a:buNone/>
                       </a:pPr>
                       <a:r>
-                        <a:rPr lang="en-US" sz="1400" dirty="0">
+                        <a:rPr lang="en-US" sz="1300" dirty="0">
                           <a:solidFill>
                             <a:srgbClr val="14213D"/>
                           </a:solidFill>
@@ -13816,14 +14201,14 @@
                         </a:rPr>
                         <a:t>No</a:t>
                       </a:r>
-                      <a:endParaRPr lang="en-US" sz="1400" dirty="0">
+                      <a:endParaRPr lang="en-US" sz="1300" dirty="0">
                         <a:latin typeface="Arial" charset="0"/>
                         <a:ea typeface="Arial" charset="0"/>
                         <a:cs typeface="Arial" charset="0"/>
                       </a:endParaRPr>
                     </a:p>
                   </a:txBody>
-                  <a:tcPr marL="62230" marR="62230" marT="62230" marB="62230" anchor="t">
+                  <a:tcPr marL="57785" marR="57785" marT="57785" marB="57785" anchor="t">
                     <a:lnL w="12700" cap="flat" cmpd="sng" algn="ctr">
                       <a:solidFill>
                         <a:srgbClr val="CBCBCB"/>
@@ -13863,7 +14248,7 @@
                   </a:tcPr>
                 </a:tc>
               </a:tr>
-              <a:tr h="385961">
+              <a:tr h="359271">
                 <a:tc>
                   <a:txBody>
                     <a:bodyPr/>
@@ -13871,12 +14256,12 @@
                     <a:p>
                       <a:pPr indent="0" marL="0">
                         <a:lnSpc>
-                          <a:spcPts val="1960"/>
+                          <a:spcPts val="1820"/>
                         </a:lnSpc>
                         <a:buNone/>
                       </a:pPr>
                       <a:r>
-                        <a:rPr lang="en-US" sz="1400" dirty="0">
+                        <a:rPr lang="en-US" sz="1300" dirty="0">
                           <a:solidFill>
                             <a:srgbClr val="14213D"/>
                           </a:solidFill>
@@ -13884,16 +14269,16 @@
                           <a:ea typeface="Arial" pitchFamily="34" charset="-122"/>
                           <a:cs typeface="Arial" pitchFamily="34" charset="-120"/>
                         </a:rPr>
-                        <a:t>Una vertical</a:t>
+                        <a:t>Un profesor</a:t>
                       </a:r>
-                      <a:endParaRPr lang="en-US" sz="1400" dirty="0">
+                      <a:endParaRPr lang="en-US" sz="1300" dirty="0">
                         <a:latin typeface="Arial" charset="0"/>
                         <a:ea typeface="Arial" charset="0"/>
                         <a:cs typeface="Arial" charset="0"/>
                       </a:endParaRPr>
                     </a:p>
                   </a:txBody>
-                  <a:tcPr marL="62230" marR="62230" marT="62230" marB="62230" anchor="t">
+                  <a:tcPr marL="57785" marR="57785" marT="57785" marB="57785" anchor="t">
                     <a:lnL w="12700" cap="flat" cmpd="sng" algn="ctr">
                       <a:solidFill>
                         <a:srgbClr val="CBCBCB"/>
@@ -13939,12 +14324,12 @@
                     <a:p>
                       <a:pPr indent="0" marL="0">
                         <a:lnSpc>
-                          <a:spcPts val="1960"/>
+                          <a:spcPts val="1820"/>
                         </a:lnSpc>
                         <a:buNone/>
                       </a:pPr>
                       <a:r>
-                        <a:rPr lang="en-US" sz="1400" dirty="0">
+                        <a:rPr lang="en-US" sz="1300" dirty="0">
                           <a:solidFill>
                             <a:srgbClr val="14213D"/>
                           </a:solidFill>
@@ -13954,14 +14339,14 @@
                         </a:rPr>
                         <a:t>No</a:t>
                       </a:r>
-                      <a:endParaRPr lang="en-US" sz="1400" dirty="0">
+                      <a:endParaRPr lang="en-US" sz="1300" dirty="0">
                         <a:latin typeface="Arial" charset="0"/>
                         <a:ea typeface="Arial" charset="0"/>
                         <a:cs typeface="Arial" charset="0"/>
                       </a:endParaRPr>
                     </a:p>
                   </a:txBody>
-                  <a:tcPr marL="62230" marR="62230" marT="62230" marB="62230" anchor="t">
+                  <a:tcPr marL="57785" marR="57785" marT="57785" marB="57785" anchor="t">
                     <a:lnL w="12700" cap="flat" cmpd="sng" algn="ctr">
                       <a:solidFill>
                         <a:srgbClr val="CBCBCB"/>
@@ -14001,7 +14386,7 @@
                   </a:tcPr>
                 </a:tc>
               </a:tr>
-              <a:tr h="385961">
+              <a:tr h="359271">
                 <a:tc>
                   <a:txBody>
                     <a:bodyPr/>
@@ -14009,12 +14394,12 @@
                     <a:p>
                       <a:pPr indent="0" marL="0">
                         <a:lnSpc>
-                          <a:spcPts val="1960"/>
+                          <a:spcPts val="1820"/>
                         </a:lnSpc>
                         <a:buNone/>
                       </a:pPr>
                       <a:r>
-                        <a:rPr lang="en-US" sz="1400" dirty="0">
+                        <a:rPr lang="en-US" sz="1300" dirty="0">
                           <a:solidFill>
                             <a:srgbClr val="14213D"/>
                           </a:solidFill>
@@ -14022,16 +14407,16 @@
                           <a:ea typeface="Arial" pitchFamily="34" charset="-122"/>
                           <a:cs typeface="Arial" pitchFamily="34" charset="-120"/>
                         </a:rPr>
-                        <a:t>Un profesor</a:t>
+                        <a:t>Un alumno en 2 bootcamps</a:t>
                       </a:r>
-                      <a:endParaRPr lang="en-US" sz="1400" dirty="0">
+                      <a:endParaRPr lang="en-US" sz="1300" dirty="0">
                         <a:latin typeface="Arial" charset="0"/>
                         <a:ea typeface="Arial" charset="0"/>
                         <a:cs typeface="Arial" charset="0"/>
                       </a:endParaRPr>
                     </a:p>
                   </a:txBody>
-                  <a:tcPr marL="62230" marR="62230" marT="62230" marB="62230" anchor="t">
+                  <a:tcPr marL="57785" marR="57785" marT="57785" marB="57785" anchor="t">
                     <a:lnL w="12700" cap="flat" cmpd="sng" algn="ctr">
                       <a:solidFill>
                         <a:srgbClr val="CBCBCB"/>
@@ -14077,12 +14462,12 @@
                     <a:p>
                       <a:pPr indent="0" marL="0">
                         <a:lnSpc>
-                          <a:spcPts val="1960"/>
+                          <a:spcPts val="1820"/>
                         </a:lnSpc>
                         <a:buNone/>
                       </a:pPr>
                       <a:r>
-                        <a:rPr lang="en-US" sz="1400" dirty="0">
+                        <a:rPr lang="en-US" sz="1300" dirty="0">
                           <a:solidFill>
                             <a:srgbClr val="14213D"/>
                           </a:solidFill>
@@ -14090,16 +14475,16 @@
                           <a:ea typeface="Arial" pitchFamily="34" charset="-122"/>
                           <a:cs typeface="Arial" pitchFamily="34" charset="-120"/>
                         </a:rPr>
-                        <a:t>No</a:t>
+                        <a:t>No (gracias a N:M)</a:t>
                       </a:r>
-                      <a:endParaRPr lang="en-US" sz="1400" dirty="0">
+                      <a:endParaRPr lang="en-US" sz="1300" dirty="0">
                         <a:latin typeface="Arial" charset="0"/>
                         <a:ea typeface="Arial" charset="0"/>
                         <a:cs typeface="Arial" charset="0"/>
                       </a:endParaRPr>
                     </a:p>
                   </a:txBody>
-                  <a:tcPr marL="62230" marR="62230" marT="62230" marB="62230" anchor="t">
+                  <a:tcPr marL="57785" marR="57785" marT="57785" marB="57785" anchor="t">
                     <a:lnL w="12700" cap="flat" cmpd="sng" algn="ctr">
                       <a:solidFill>
                         <a:srgbClr val="CBCBCB"/>
@@ -14139,7 +14524,7 @@
                   </a:tcPr>
                 </a:tc>
               </a:tr>
-              <a:tr h="385961">
+              <a:tr h="359271">
                 <a:tc>
                   <a:txBody>
                     <a:bodyPr/>
@@ -14147,12 +14532,12 @@
                     <a:p>
                       <a:pPr indent="0" marL="0">
                         <a:lnSpc>
-                          <a:spcPts val="1960"/>
+                          <a:spcPts val="1820"/>
                         </a:lnSpc>
                         <a:buNone/>
                       </a:pPr>
                       <a:r>
-                        <a:rPr lang="en-US" sz="1400" dirty="0">
+                        <a:rPr lang="en-US" sz="1300" dirty="0">
                           <a:solidFill>
                             <a:srgbClr val="14213D"/>
                           </a:solidFill>
@@ -14160,16 +14545,16 @@
                           <a:ea typeface="Arial" pitchFamily="34" charset="-122"/>
                           <a:cs typeface="Arial" pitchFamily="34" charset="-120"/>
                         </a:rPr>
-                        <a:t>Un alumno en 2 bootcamps</a:t>
+                        <a:t>Un alumno que también es TA</a:t>
                       </a:r>
-                      <a:endParaRPr lang="en-US" sz="1400" dirty="0">
+                      <a:endParaRPr lang="en-US" sz="1300" dirty="0">
                         <a:latin typeface="Arial" charset="0"/>
                         <a:ea typeface="Arial" charset="0"/>
                         <a:cs typeface="Arial" charset="0"/>
                       </a:endParaRPr>
                     </a:p>
                   </a:txBody>
-                  <a:tcPr marL="62230" marR="62230" marT="62230" marB="62230" anchor="t">
+                  <a:tcPr marL="57785" marR="57785" marT="57785" marB="57785" anchor="t">
                     <a:lnL w="12700" cap="flat" cmpd="sng" algn="ctr">
                       <a:solidFill>
                         <a:srgbClr val="CBCBCB"/>
@@ -14215,12 +14600,12 @@
                     <a:p>
                       <a:pPr indent="0" marL="0">
                         <a:lnSpc>
-                          <a:spcPts val="1960"/>
+                          <a:spcPts val="1820"/>
                         </a:lnSpc>
                         <a:buNone/>
                       </a:pPr>
                       <a:r>
-                        <a:rPr lang="en-US" sz="1400" dirty="0">
+                        <a:rPr lang="en-US" sz="1300" dirty="0">
                           <a:solidFill>
                             <a:srgbClr val="14213D"/>
                           </a:solidFill>
@@ -14228,16 +14613,16 @@
                           <a:ea typeface="Arial" pitchFamily="34" charset="-122"/>
                           <a:cs typeface="Arial" pitchFamily="34" charset="-120"/>
                         </a:rPr>
-                        <a:t>No (gracias a N:M)</a:t>
+                        <a:t>No (herencia solapada)</a:t>
                       </a:r>
-                      <a:endParaRPr lang="en-US" sz="1400" dirty="0">
+                      <a:endParaRPr lang="en-US" sz="1300" dirty="0">
                         <a:latin typeface="Arial" charset="0"/>
                         <a:ea typeface="Arial" charset="0"/>
                         <a:cs typeface="Arial" charset="0"/>
                       </a:endParaRPr>
                     </a:p>
                   </a:txBody>
-                  <a:tcPr marL="62230" marR="62230" marT="62230" marB="62230" anchor="t">
+                  <a:tcPr marL="57785" marR="57785" marT="57785" marB="57785" anchor="t">
                     <a:lnL w="12700" cap="flat" cmpd="sng" algn="ctr">
                       <a:solidFill>
                         <a:srgbClr val="CBCBCB"/>
@@ -14277,7 +14662,7 @@
                   </a:tcPr>
                 </a:tc>
               </a:tr>
-              <a:tr h="385961">
+              <a:tr h="359271">
                 <a:tc>
                   <a:txBody>
                     <a:bodyPr/>
@@ -14285,12 +14670,12 @@
                     <a:p>
                       <a:pPr indent="0" marL="0">
                         <a:lnSpc>
-                          <a:spcPts val="1960"/>
+                          <a:spcPts val="1820"/>
                         </a:lnSpc>
                         <a:buNone/>
                       </a:pPr>
                       <a:r>
-                        <a:rPr lang="en-US" sz="1400" dirty="0">
+                        <a:rPr lang="en-US" sz="1300" dirty="0">
                           <a:solidFill>
                             <a:srgbClr val="14213D"/>
                           </a:solidFill>
@@ -14298,16 +14683,16 @@
                           <a:ea typeface="Arial" pitchFamily="34" charset="-122"/>
                           <a:cs typeface="Arial" pitchFamily="34" charset="-120"/>
                         </a:rPr>
-                        <a:t>Una modalidad nueva</a:t>
+                        <a:t>Quién corrige un proyecto</a:t>
                       </a:r>
-                      <a:endParaRPr lang="en-US" sz="1400" dirty="0">
+                      <a:endParaRPr lang="en-US" sz="1300" dirty="0">
                         <a:latin typeface="Arial" charset="0"/>
                         <a:ea typeface="Arial" charset="0"/>
                         <a:cs typeface="Arial" charset="0"/>
                       </a:endParaRPr>
                     </a:p>
                   </a:txBody>
-                  <a:tcPr marL="62230" marR="62230" marT="62230" marB="62230" anchor="t">
+                  <a:tcPr marL="57785" marR="57785" marT="57785" marB="57785" anchor="t">
                     <a:lnL w="12700" cap="flat" cmpd="sng" algn="ctr">
                       <a:solidFill>
                         <a:srgbClr val="CBCBCB"/>
@@ -14353,12 +14738,12 @@
                     <a:p>
                       <a:pPr indent="0" marL="0">
                         <a:lnSpc>
-                          <a:spcPts val="1960"/>
+                          <a:spcPts val="1820"/>
                         </a:lnSpc>
                         <a:buNone/>
                       </a:pPr>
                       <a:r>
-                        <a:rPr lang="en-US" sz="1400" dirty="0">
+                        <a:rPr lang="en-US" sz="1300" dirty="0">
                           <a:solidFill>
                             <a:srgbClr val="14213D"/>
                           </a:solidFill>
@@ -14366,16 +14751,154 @@
                           <a:ea typeface="Arial" pitchFamily="34" charset="-122"/>
                           <a:cs typeface="Arial" pitchFamily="34" charset="-120"/>
                         </a:rPr>
-                        <a:t>Sí (hoy es un ENUM)</a:t>
+                        <a:t>No (Corrigen)</a:t>
                       </a:r>
-                      <a:endParaRPr lang="en-US" sz="1400" dirty="0">
+                      <a:endParaRPr lang="en-US" sz="1300" dirty="0">
                         <a:latin typeface="Arial" charset="0"/>
                         <a:ea typeface="Arial" charset="0"/>
                         <a:cs typeface="Arial" charset="0"/>
                       </a:endParaRPr>
                     </a:p>
                   </a:txBody>
-                  <a:tcPr marL="62230" marR="62230" marT="62230" marB="62230" anchor="t">
+                  <a:tcPr marL="57785" marR="57785" marT="57785" marB="57785" anchor="t">
+                    <a:lnL w="12700" cap="flat" cmpd="sng" algn="ctr">
+                      <a:solidFill>
+                        <a:srgbClr val="CBCBCB"/>
+                      </a:solidFill>
+                      <a:prstDash val="solid"/>
+                      <a:round/>
+                      <a:headEnd type="none" w="med" len="med"/>
+                      <a:tailEnd type="none" w="med" len="med"/>
+                    </a:lnL>
+                    <a:lnR w="12700" cap="flat" cmpd="sng" algn="ctr">
+                      <a:solidFill>
+                        <a:srgbClr val="CBCBCB"/>
+                      </a:solidFill>
+                      <a:prstDash val="solid"/>
+                      <a:round/>
+                      <a:headEnd type="none" w="med" len="med"/>
+                      <a:tailEnd type="none" w="med" len="med"/>
+                    </a:lnR>
+                    <a:lnT w="12700" cap="flat" cmpd="sng" algn="ctr">
+                      <a:solidFill>
+                        <a:srgbClr val="CBCBCB"/>
+                      </a:solidFill>
+                      <a:prstDash val="solid"/>
+                      <a:round/>
+                      <a:headEnd type="none" w="med" len="med"/>
+                      <a:tailEnd type="none" w="med" len="med"/>
+                    </a:lnT>
+                    <a:lnB w="12700" cap="flat" cmpd="sng" algn="ctr">
+                      <a:solidFill>
+                        <a:srgbClr val="CBCBCB"/>
+                      </a:solidFill>
+                      <a:prstDash val="solid"/>
+                      <a:round/>
+                      <a:headEnd type="none" w="med" len="med"/>
+                      <a:tailEnd type="none" w="med" len="med"/>
+                    </a:lnB>
+                  </a:tcPr>
+                </a:tc>
+              </a:tr>
+              <a:tr h="359271">
+                <a:tc>
+                  <a:txBody>
+                    <a:bodyPr/>
+                    <a:lstStyle/>
+                    <a:p>
+                      <a:pPr indent="0" marL="0">
+                        <a:lnSpc>
+                          <a:spcPts val="1820"/>
+                        </a:lnSpc>
+                        <a:buNone/>
+                      </a:pPr>
+                      <a:r>
+                        <a:rPr lang="en-US" sz="1300" dirty="0">
+                          <a:solidFill>
+                            <a:srgbClr val="14213D"/>
+                          </a:solidFill>
+                          <a:latin typeface="Arial" pitchFamily="34" charset="0"/>
+                          <a:ea typeface="Arial" pitchFamily="34" charset="-122"/>
+                          <a:cs typeface="Arial" pitchFamily="34" charset="-120"/>
+                        </a:rPr>
+                        <a:t>Una modalidad nueva</a:t>
+                      </a:r>
+                      <a:endParaRPr lang="en-US" sz="1300" dirty="0">
+                        <a:latin typeface="Arial" charset="0"/>
+                        <a:ea typeface="Arial" charset="0"/>
+                        <a:cs typeface="Arial" charset="0"/>
+                      </a:endParaRPr>
+                    </a:p>
+                  </a:txBody>
+                  <a:tcPr marL="57785" marR="57785" marT="57785" marB="57785" anchor="t">
+                    <a:lnL w="12700" cap="flat" cmpd="sng" algn="ctr">
+                      <a:solidFill>
+                        <a:srgbClr val="CBCBCB"/>
+                      </a:solidFill>
+                      <a:prstDash val="solid"/>
+                      <a:round/>
+                      <a:headEnd type="none" w="med" len="med"/>
+                      <a:tailEnd type="none" w="med" len="med"/>
+                    </a:lnL>
+                    <a:lnR w="12700" cap="flat" cmpd="sng" algn="ctr">
+                      <a:solidFill>
+                        <a:srgbClr val="CBCBCB"/>
+                      </a:solidFill>
+                      <a:prstDash val="solid"/>
+                      <a:round/>
+                      <a:headEnd type="none" w="med" len="med"/>
+                      <a:tailEnd type="none" w="med" len="med"/>
+                    </a:lnR>
+                    <a:lnT w="12700" cap="flat" cmpd="sng" algn="ctr">
+                      <a:solidFill>
+                        <a:srgbClr val="CBCBCB"/>
+                      </a:solidFill>
+                      <a:prstDash val="solid"/>
+                      <a:round/>
+                      <a:headEnd type="none" w="med" len="med"/>
+                      <a:tailEnd type="none" w="med" len="med"/>
+                    </a:lnT>
+                    <a:lnB w="12700" cap="flat" cmpd="sng" algn="ctr">
+                      <a:solidFill>
+                        <a:srgbClr val="CBCBCB"/>
+                      </a:solidFill>
+                      <a:prstDash val="solid"/>
+                      <a:round/>
+                      <a:headEnd type="none" w="med" len="med"/>
+                      <a:tailEnd type="none" w="med" len="med"/>
+                    </a:lnB>
+                  </a:tcPr>
+                </a:tc>
+                <a:tc>
+                  <a:txBody>
+                    <a:bodyPr/>
+                    <a:lstStyle/>
+                    <a:p>
+                      <a:pPr indent="0" marL="0">
+                        <a:lnSpc>
+                          <a:spcPts val="1820"/>
+                        </a:lnSpc>
+                        <a:buNone/>
+                      </a:pPr>
+                      <a:r>
+                        <a:rPr lang="en-US" sz="1300" dirty="0">
+                          <a:solidFill>
+                            <a:srgbClr val="14213D"/>
+                          </a:solidFill>
+                          <a:latin typeface="Arial" pitchFamily="34" charset="0"/>
+                          <a:ea typeface="Arial" pitchFamily="34" charset="-122"/>
+                          <a:cs typeface="Arial" pitchFamily="34" charset="-120"/>
+                        </a:rPr>
+                        <a:t>Sí (hoy es un CHECK)</a:t>
+                      </a:r>
+                      <a:endParaRPr lang="en-US" sz="1300" dirty="0">
+                        <a:latin typeface="Arial" charset="0"/>
+                        <a:ea typeface="Arial" charset="0"/>
+                        <a:cs typeface="Arial" charset="0"/>
+                      </a:endParaRPr>
+                    </a:p>
+                  </a:txBody>
+                  <a:tcPr marL="57785" marR="57785" marT="57785" marB="57785" anchor="t">
                     <a:lnL w="12700" cap="flat" cmpd="sng" algn="ctr">
                       <a:solidFill>
                         <a:srgbClr val="CBCBCB"/>
@@ -14457,7 +14980,7 @@
                 <a:ea typeface="Arial" pitchFamily="34" charset="-122"/>
                 <a:cs typeface="Arial" pitchFamily="34" charset="-120"/>
               </a:rPr>
-              <a:t>Bloque 6 ·</a:t>
+              <a:t>Bloque 6</a:t>
             </a:r>
             <a:endParaRPr lang="en-US" sz="1200" dirty="0"/>
           </a:p>
@@ -14594,7 +15117,7 @@
         <p:spPr>
           <a:xfrm>
             <a:off x="819150" y="1601391"/>
-            <a:ext cx="5181600" cy="1267321"/>
+            <a:ext cx="3390900" cy="1267321"/>
           </a:xfrm>
           <a:prstGeom prst="roundRect">
             <a:avLst>
@@ -14621,7 +15144,7 @@
         <p:spPr>
           <a:xfrm>
             <a:off x="1054100" y="1836341"/>
-            <a:ext cx="4853051" cy="284460"/>
+            <a:ext cx="3008630" cy="284460"/>
           </a:xfrm>
           <a:prstGeom prst="rect">
             <a:avLst/>
@@ -14665,7 +15188,7 @@
         <p:spPr>
           <a:xfrm>
             <a:off x="1054100" y="2171601"/>
-            <a:ext cx="4853051" cy="487561"/>
+            <a:ext cx="3008630" cy="487561"/>
           </a:xfrm>
           <a:prstGeom prst="rect">
             <a:avLst/>
@@ -14708,8 +15231,8 @@
         </p:nvSpPr>
         <p:spPr>
           <a:xfrm>
-            <a:off x="6191250" y="1601391"/>
-            <a:ext cx="5181600" cy="1267321"/>
+            <a:off x="4400550" y="1601391"/>
+            <a:ext cx="3390900" cy="1267321"/>
           </a:xfrm>
           <a:prstGeom prst="roundRect">
             <a:avLst>
@@ -14735,8 +15258,8 @@
         </p:nvSpPr>
         <p:spPr>
           <a:xfrm>
-            <a:off x="6426200" y="1836341"/>
-            <a:ext cx="4853051" cy="284460"/>
+            <a:off x="4635500" y="1836341"/>
+            <a:ext cx="3008630" cy="284460"/>
           </a:xfrm>
           <a:prstGeom prst="rect">
             <a:avLst/>
@@ -14765,7 +15288,7 @@
                 <a:ea typeface="Arial" pitchFamily="34" charset="-122"/>
                 <a:cs typeface="Arial" pitchFamily="34" charset="-120"/>
               </a:rPr>
-              <a:t>Tablas campus, vertical y aula</a:t>
+              <a:t>Datos que faltan</a:t>
             </a:r>
             <a:endParaRPr lang="en-US" sz="1700" dirty="0"/>
           </a:p>
@@ -14779,8 +15302,8 @@
         </p:nvSpPr>
         <p:spPr>
           <a:xfrm>
-            <a:off x="6426200" y="2171601"/>
-            <a:ext cx="4853051" cy="256480"/>
+            <a:off x="4635500" y="2171601"/>
+            <a:ext cx="3008630" cy="487561"/>
           </a:xfrm>
           <a:prstGeom prst="rect">
             <a:avLst/>
@@ -14809,7 +15332,7 @@
                 <a:ea typeface="Arial" pitchFamily="34" charset="-122"/>
                 <a:cs typeface="Arial" pitchFamily="34" charset="-120"/>
               </a:rPr>
-              <a:t>Sin errores de escritura y con más datos de cada uno</a:t>
+              <a:t>Email de los profesores y correcciones reales, que los CSV no traen</a:t>
             </a:r>
             <a:endParaRPr lang="en-US" sz="1300" dirty="0"/>
           </a:p>
@@ -14823,12 +15346,12 @@
         </p:nvSpPr>
         <p:spPr>
           <a:xfrm>
-            <a:off x="819150" y="3059212"/>
-            <a:ext cx="5181600" cy="1036241"/>
+            <a:off x="7981950" y="1601391"/>
+            <a:ext cx="3390900" cy="1267321"/>
           </a:xfrm>
           <a:prstGeom prst="roundRect">
             <a:avLst>
-              <a:gd name="adj" fmla="val 11643"/>
+              <a:gd name="adj" fmla="val 9520"/>
             </a:avLst>
           </a:prstGeom>
           <a:solidFill>
@@ -14850,8 +15373,8 @@
         </p:nvSpPr>
         <p:spPr>
           <a:xfrm>
-            <a:off x="1054100" y="3294162"/>
-            <a:ext cx="4853051" cy="284460"/>
+            <a:off x="8216900" y="1836341"/>
+            <a:ext cx="3008630" cy="284460"/>
           </a:xfrm>
           <a:prstGeom prst="rect">
             <a:avLst/>
@@ -14894,8 +15417,8 @@
         </p:nvSpPr>
         <p:spPr>
           <a:xfrm>
-            <a:off x="1054100" y="3629422"/>
-            <a:ext cx="4853051" cy="256480"/>
+            <a:off x="8216900" y="2171601"/>
+            <a:ext cx="3008630" cy="487561"/>
           </a:xfrm>
           <a:prstGeom prst="rect">
             <a:avLst/>
@@ -14932,122 +15455,7 @@
       </p:sp>
       <p:sp>
         <p:nvSpPr>
-          <p:cNvPr id="12" name="Shape 10"/>
-          <p:cNvSpPr/>
-          <p:nvPr/>
-        </p:nvSpPr>
-        <p:spPr>
-          <a:xfrm>
-            <a:off x="6191250" y="3059212"/>
-            <a:ext cx="5181600" cy="1036241"/>
-          </a:xfrm>
-          <a:prstGeom prst="roundRect">
-            <a:avLst>
-              <a:gd name="adj" fmla="val 11643"/>
-            </a:avLst>
-          </a:prstGeom>
-          <a:solidFill>
-            <a:srgbClr val="FFFFFF"/>
-          </a:solidFill>
-          <a:ln w="12700">
-            <a:solidFill>
-              <a:srgbClr val="DCE2EC"/>
-            </a:solidFill>
-            <a:prstDash val="solid"/>
-          </a:ln>
-        </p:spPr>
-      </p:sp>
-      <p:sp>
-        <p:nvSpPr>
-          <p:cNvPr id="13" name="Text 11"/>
-          <p:cNvSpPr/>
-          <p:nvPr/>
-        </p:nvSpPr>
-        <p:spPr>
-          <a:xfrm>
-            <a:off x="6426200" y="3294162"/>
-            <a:ext cx="4853051" cy="284460"/>
-          </a:xfrm>
-          <a:prstGeom prst="rect">
-            <a:avLst/>
-          </a:prstGeom>
-          <a:noFill/>
-          <a:ln/>
-        </p:spPr>
-        <p:txBody>
-          <a:bodyPr wrap="square" lIns="0" tIns="0" rIns="0" bIns="0" rtlCol="0" anchor="t">
-            <a:normAutofit/>
-          </a:bodyPr>
-          <a:lstStyle/>
-          <a:p>
-            <a:pPr algn="l" indent="0" marL="0">
-              <a:lnSpc>
-                <a:spcPts val="2040"/>
-              </a:lnSpc>
-              <a:buNone/>
-            </a:pPr>
-            <a:r>
-              <a:rPr lang="en-US" sz="1700" b="1" dirty="0">
-                <a:solidFill>
-                  <a:srgbClr val="14213D"/>
-                </a:solidFill>
-                <a:latin typeface="Arial" pitchFamily="34" charset="0"/>
-                <a:ea typeface="Arial" pitchFamily="34" charset="-122"/>
-                <a:cs typeface="Arial" pitchFamily="34" charset="-120"/>
-              </a:rPr>
-              <a:t>Seguridad en Supabase</a:t>
-            </a:r>
-            <a:endParaRPr lang="en-US" sz="1700" dirty="0"/>
-          </a:p>
-        </p:txBody>
-      </p:sp>
-      <p:sp>
-        <p:nvSpPr>
-          <p:cNvPr id="14" name="Text 12"/>
-          <p:cNvSpPr/>
-          <p:nvPr/>
-        </p:nvSpPr>
-        <p:spPr>
-          <a:xfrm>
-            <a:off x="6426200" y="3629422"/>
-            <a:ext cx="4940300" cy="256480"/>
-          </a:xfrm>
-          <a:prstGeom prst="rect">
-            <a:avLst/>
-          </a:prstGeom>
-          <a:noFill/>
-          <a:ln/>
-        </p:spPr>
-        <p:txBody>
-          <a:bodyPr wrap="square" lIns="0" tIns="0" rIns="0" bIns="0" rtlCol="0" anchor="t">
-            <a:normAutofit/>
-          </a:bodyPr>
-          <a:lstStyle/>
-          <a:p>
-            <a:pPr algn="l" indent="0" marL="0">
-              <a:lnSpc>
-                <a:spcPts val="1820"/>
-              </a:lnSpc>
-              <a:buNone/>
-            </a:pPr>
-            <a:r>
-              <a:rPr lang="en-US" sz="1300" dirty="0">
-                <a:solidFill>
-                  <a:srgbClr val="3E4A5E"/>
-                </a:solidFill>
-                <a:latin typeface="Arial" pitchFamily="34" charset="0"/>
-                <a:ea typeface="Arial" pitchFamily="34" charset="-122"/>
-                <a:cs typeface="Arial" pitchFamily="34" charset="-120"/>
-              </a:rPr>
-              <a:t>Activar RLS para que la clave pública no pueda modificar datos</a:t>
-            </a:r>
-            <a:endParaRPr lang="en-US" sz="1300" dirty="0"/>
-          </a:p>
-        </p:txBody>
-      </p:sp>
-      <p:sp>
-        <p:nvSpPr>
-          <p:cNvPr id="15" name="Text 13"/>
+          <p:cNvPr id="12" name="Text 10"/>
           <p:cNvSpPr/>
           <p:nvPr/>
         </p:nvSpPr>
@@ -15091,7 +15499,7 @@
       </p:sp>
       <p:sp>
         <p:nvSpPr>
-          <p:cNvPr id="16" name="Text 14"/>
+          <p:cNvPr id="13" name="Text 11"/>
           <p:cNvSpPr/>
           <p:nvPr/>
         </p:nvSpPr>
@@ -15127,7 +15535,7 @@
                 <a:ea typeface="Arial" pitchFamily="34" charset="-122"/>
                 <a:cs typeface="Arial" pitchFamily="34" charset="-120"/>
               </a:rPr>
-              <a:t>18</a:t>
+              <a:t>22</a:t>
             </a:r>
             <a:endParaRPr lang="en-US" sz="1200" dirty="0"/>
           </a:p>
@@ -22775,7 +23183,7 @@
                 <a:ea typeface="Arial" pitchFamily="34" charset="-122"/>
                 <a:cs typeface="Arial" pitchFamily="34" charset="-120"/>
               </a:rPr>
-              <a:t>4 entidades y 4 relaciones N:M</a:t>
+              <a:t>Entidades, herencia y 5 relaciones N:M</a:t>
             </a:r>
             <a:endParaRPr lang="en-US" sz="3600" dirty="0"/>
           </a:p>
@@ -22789,12 +23197,12 @@
         </p:nvSpPr>
         <p:spPr>
           <a:xfrm>
-            <a:off x="812800" y="1595041"/>
-            <a:ext cx="2527300" cy="1236861"/>
+            <a:off x="812800" y="1544241"/>
+            <a:ext cx="3946723" cy="1325662"/>
           </a:xfrm>
           <a:prstGeom prst="roundRect">
             <a:avLst>
-              <a:gd name="adj" fmla="val 10268"/>
+              <a:gd name="adj" fmla="val 9580"/>
             </a:avLst>
           </a:prstGeom>
           <a:solidFill>
@@ -22811,8 +23219,8 @@
         </p:nvSpPr>
         <p:spPr>
           <a:xfrm>
-            <a:off x="1016000" y="1798241"/>
-            <a:ext cx="2184527" cy="330200"/>
+            <a:off x="1016000" y="1722041"/>
+            <a:ext cx="3646533" cy="314920"/>
           </a:xfrm>
           <a:prstGeom prst="rect">
             <a:avLst/>
@@ -22828,12 +23236,12 @@
           <a:p>
             <a:pPr algn="l" indent="0" marL="0">
               <a:lnSpc>
-                <a:spcPts val="2400"/>
+                <a:spcPts val="2280"/>
               </a:lnSpc>
               <a:buNone/>
             </a:pPr>
             <a:r>
-              <a:rPr lang="en-US" sz="2000" b="1" dirty="0">
+              <a:rPr lang="en-US" sz="1900" b="1" dirty="0">
                 <a:solidFill>
                   <a:srgbClr val="F6F5F0"/>
                 </a:solidFill>
@@ -22841,9 +23249,9 @@
                 <a:ea typeface="Arial" pitchFamily="34" charset="-122"/>
                 <a:cs typeface="Arial" pitchFamily="34" charset="-120"/>
               </a:rPr>
-              <a:t>Alumnos</a:t>
-            </a:r>
-            <a:endParaRPr lang="en-US" sz="2000" dirty="0"/>
+              <a:t>Persona → Alumno / Profesor</a:t>
+            </a:r>
+            <a:endParaRPr lang="en-US" sz="1900" dirty="0"/>
           </a:p>
         </p:txBody>
       </p:sp>
@@ -22855,8 +23263,8 @@
         </p:nvSpPr>
         <p:spPr>
           <a:xfrm>
-            <a:off x="1016000" y="2166541"/>
-            <a:ext cx="2184527" cy="256480"/>
+            <a:off x="1016000" y="2075061"/>
+            <a:ext cx="3646533" cy="436761"/>
           </a:xfrm>
           <a:prstGeom prst="rect">
             <a:avLst/>
@@ -22872,12 +23280,12 @@
           <a:p>
             <a:pPr algn="l" indent="0" marL="0">
               <a:lnSpc>
-                <a:spcPts val="1820"/>
+                <a:spcPts val="1620"/>
               </a:lnSpc>
               <a:buNone/>
             </a:pPr>
             <a:r>
-              <a:rPr lang="en-US" sz="1300" dirty="0">
+              <a:rPr lang="en-US" sz="1200" dirty="0">
                 <a:solidFill>
                   <a:srgbClr val="C9D3E6"/>
                 </a:solidFill>
@@ -22885,9 +23293,20 @@
                 <a:ea typeface="Arial" pitchFamily="34" charset="-122"/>
                 <a:cs typeface="Arial" pitchFamily="34" charset="-120"/>
               </a:rPr>
-              <a:t>Id, Nombre, Email</a:t>
-            </a:r>
-            <a:endParaRPr lang="en-US" sz="1300" dirty="0"/>
+              <a:t>Persona: Id, Nombre, Email · Profesor: Rol, Modalidad. Herencia </a:t>
+            </a:r>
+            <a:r>
+              <a:rPr lang="en-US" sz="1200" b="1" dirty="0">
+                <a:solidFill>
+                  <a:srgbClr val="F2A65A"/>
+                </a:solidFill>
+                <a:latin typeface="Arial" pitchFamily="34" charset="0"/>
+                <a:ea typeface="Arial" pitchFamily="34" charset="-122"/>
+                <a:cs typeface="Arial" pitchFamily="34" charset="-120"/>
+              </a:rPr>
+              <a:t>parcial y solapada</a:t>
+            </a:r>
+            <a:endParaRPr lang="en-US" sz="1200" dirty="0"/>
           </a:p>
         </p:txBody>
       </p:sp>
@@ -22899,12 +23318,12 @@
         </p:nvSpPr>
         <p:spPr>
           <a:xfrm>
-            <a:off x="3492500" y="1595041"/>
-            <a:ext cx="2527300" cy="1236861"/>
+            <a:off x="4911923" y="1544241"/>
+            <a:ext cx="3157438" cy="1325662"/>
           </a:xfrm>
           <a:prstGeom prst="roundRect">
             <a:avLst>
-              <a:gd name="adj" fmla="val 10268"/>
+              <a:gd name="adj" fmla="val 9580"/>
             </a:avLst>
           </a:prstGeom>
           <a:solidFill>
@@ -22921,8 +23340,8 @@
         </p:nvSpPr>
         <p:spPr>
           <a:xfrm>
-            <a:off x="3695700" y="1798241"/>
-            <a:ext cx="2184527" cy="330200"/>
+            <a:off x="5115123" y="1722041"/>
+            <a:ext cx="2833569" cy="314920"/>
           </a:xfrm>
           <a:prstGeom prst="rect">
             <a:avLst/>
@@ -22938,12 +23357,12 @@
           <a:p>
             <a:pPr algn="l" indent="0" marL="0">
               <a:lnSpc>
-                <a:spcPts val="2400"/>
+                <a:spcPts val="2280"/>
               </a:lnSpc>
               <a:buNone/>
             </a:pPr>
             <a:r>
-              <a:rPr lang="en-US" sz="2000" b="1" dirty="0">
+              <a:rPr lang="en-US" sz="1900" b="1" dirty="0">
                 <a:solidFill>
                   <a:srgbClr val="F6F5F0"/>
                 </a:solidFill>
@@ -22953,7 +23372,7 @@
               </a:rPr>
               <a:t>Promoción</a:t>
             </a:r>
-            <a:endParaRPr lang="en-US" sz="2000" dirty="0"/>
+            <a:endParaRPr lang="en-US" sz="1900" dirty="0"/>
           </a:p>
         </p:txBody>
       </p:sp>
@@ -22965,8 +23384,8 @@
         </p:nvSpPr>
         <p:spPr>
           <a:xfrm>
-            <a:off x="3695700" y="2166541"/>
-            <a:ext cx="2184527" cy="487561"/>
+            <a:off x="5115123" y="2075061"/>
+            <a:ext cx="2833569" cy="642441"/>
           </a:xfrm>
           <a:prstGeom prst="rect">
             <a:avLst/>
@@ -22982,12 +23401,12 @@
           <a:p>
             <a:pPr algn="l" indent="0" marL="0">
               <a:lnSpc>
-                <a:spcPts val="1820"/>
+                <a:spcPts val="1620"/>
               </a:lnSpc>
               <a:buNone/>
             </a:pPr>
             <a:r>
-              <a:rPr lang="en-US" sz="1300" dirty="0">
+              <a:rPr lang="en-US" sz="1200" dirty="0">
                 <a:solidFill>
                   <a:srgbClr val="C9D3E6"/>
                 </a:solidFill>
@@ -22995,9 +23414,9 @@
                 <a:ea typeface="Arial" pitchFamily="34" charset="-122"/>
                 <a:cs typeface="Arial" pitchFamily="34" charset="-120"/>
               </a:rPr>
-              <a:t>Id, Año, Fecha, Campus, Vertical, tipoModalidad</a:t>
-            </a:r>
-            <a:endParaRPr lang="en-US" sz="1300" dirty="0"/>
+              <a:t>Id, Fecha, Campus, Vertical, TipoModalidad · MesPromoción (derivado)</a:t>
+            </a:r>
+            <a:endParaRPr lang="en-US" sz="1200" dirty="0"/>
           </a:p>
         </p:txBody>
       </p:sp>
@@ -23009,12 +23428,12 @@
         </p:nvSpPr>
         <p:spPr>
           <a:xfrm>
-            <a:off x="6172200" y="1595041"/>
-            <a:ext cx="2527300" cy="1236861"/>
+            <a:off x="8221762" y="1544241"/>
+            <a:ext cx="3157438" cy="1325662"/>
           </a:xfrm>
           <a:prstGeom prst="roundRect">
             <a:avLst>
-              <a:gd name="adj" fmla="val 10268"/>
+              <a:gd name="adj" fmla="val 9580"/>
             </a:avLst>
           </a:prstGeom>
           <a:solidFill>
@@ -23031,8 +23450,8 @@
         </p:nvSpPr>
         <p:spPr>
           <a:xfrm>
-            <a:off x="6375400" y="1798241"/>
-            <a:ext cx="2184527" cy="330200"/>
+            <a:off x="8424962" y="1722041"/>
+            <a:ext cx="2833569" cy="314920"/>
           </a:xfrm>
           <a:prstGeom prst="rect">
             <a:avLst/>
@@ -23048,12 +23467,12 @@
           <a:p>
             <a:pPr algn="l" indent="0" marL="0">
               <a:lnSpc>
-                <a:spcPts val="2400"/>
+                <a:spcPts val="2280"/>
               </a:lnSpc>
               <a:buNone/>
             </a:pPr>
             <a:r>
-              <a:rPr lang="en-US" sz="2000" b="1" dirty="0">
+              <a:rPr lang="en-US" sz="1900" b="1" dirty="0">
                 <a:solidFill>
                   <a:srgbClr val="F6F5F0"/>
                 </a:solidFill>
@@ -23061,9 +23480,9 @@
                 <a:ea typeface="Arial" pitchFamily="34" charset="-122"/>
                 <a:cs typeface="Arial" pitchFamily="34" charset="-120"/>
               </a:rPr>
-              <a:t>Proyectos</a:t>
-            </a:r>
-            <a:endParaRPr lang="en-US" sz="2000" dirty="0"/>
+              <a:t>Proyecto</a:t>
+            </a:r>
+            <a:endParaRPr lang="en-US" sz="1900" dirty="0"/>
           </a:p>
         </p:txBody>
       </p:sp>
@@ -23075,8 +23494,8 @@
         </p:nvSpPr>
         <p:spPr>
           <a:xfrm>
-            <a:off x="6375400" y="2166541"/>
-            <a:ext cx="2184527" cy="256480"/>
+            <a:off x="8424962" y="2075061"/>
+            <a:ext cx="2833569" cy="231080"/>
           </a:xfrm>
           <a:prstGeom prst="rect">
             <a:avLst/>
@@ -23092,12 +23511,12 @@
           <a:p>
             <a:pPr algn="l" indent="0" marL="0">
               <a:lnSpc>
-                <a:spcPts val="1820"/>
+                <a:spcPts val="1620"/>
               </a:lnSpc>
               <a:buNone/>
             </a:pPr>
             <a:r>
-              <a:rPr lang="en-US" sz="1300" dirty="0">
+              <a:rPr lang="en-US" sz="1200" dirty="0">
                 <a:solidFill>
                   <a:srgbClr val="C9D3E6"/>
                 </a:solidFill>
@@ -23107,7 +23526,7 @@
               </a:rPr>
               <a:t>Id, Nombre</a:t>
             </a:r>
-            <a:endParaRPr lang="en-US" sz="1300" dirty="0"/>
+            <a:endParaRPr lang="en-US" sz="1200" dirty="0"/>
           </a:p>
         </p:txBody>
       </p:sp>
@@ -23119,118 +23538,8 @@
         </p:nvSpPr>
         <p:spPr>
           <a:xfrm>
-            <a:off x="8851900" y="1595041"/>
-            <a:ext cx="2527300" cy="1236861"/>
-          </a:xfrm>
-          <a:prstGeom prst="roundRect">
-            <a:avLst>
-              <a:gd name="adj" fmla="val 10268"/>
-            </a:avLst>
-          </a:prstGeom>
-          <a:solidFill>
-            <a:srgbClr val="14213D"/>
-          </a:solidFill>
-          <a:ln/>
-        </p:spPr>
-      </p:sp>
-      <p:sp>
-        <p:nvSpPr>
-          <p:cNvPr id="13" name="Text 11"/>
-          <p:cNvSpPr/>
-          <p:nvPr/>
-        </p:nvSpPr>
-        <p:spPr>
-          <a:xfrm>
-            <a:off x="9055100" y="1798241"/>
-            <a:ext cx="2184527" cy="330200"/>
-          </a:xfrm>
-          <a:prstGeom prst="rect">
-            <a:avLst/>
-          </a:prstGeom>
-          <a:noFill/>
-          <a:ln/>
-        </p:spPr>
-        <p:txBody>
-          <a:bodyPr wrap="square" lIns="0" tIns="0" rIns="0" bIns="0" rtlCol="0" anchor="t">
-            <a:normAutofit/>
-          </a:bodyPr>
-          <a:lstStyle/>
-          <a:p>
-            <a:pPr algn="l" indent="0" marL="0">
-              <a:lnSpc>
-                <a:spcPts val="2400"/>
-              </a:lnSpc>
-              <a:buNone/>
-            </a:pPr>
-            <a:r>
-              <a:rPr lang="en-US" sz="2000" b="1" dirty="0">
-                <a:solidFill>
-                  <a:srgbClr val="F6F5F0"/>
-                </a:solidFill>
-                <a:latin typeface="Arial" pitchFamily="34" charset="0"/>
-                <a:ea typeface="Arial" pitchFamily="34" charset="-122"/>
-                <a:cs typeface="Arial" pitchFamily="34" charset="-120"/>
-              </a:rPr>
-              <a:t>Claustro</a:t>
-            </a:r>
-            <a:endParaRPr lang="en-US" sz="2000" dirty="0"/>
-          </a:p>
-        </p:txBody>
-      </p:sp>
-      <p:sp>
-        <p:nvSpPr>
-          <p:cNvPr id="14" name="Text 12"/>
-          <p:cNvSpPr/>
-          <p:nvPr/>
-        </p:nvSpPr>
-        <p:spPr>
-          <a:xfrm>
-            <a:off x="9055100" y="2166541"/>
-            <a:ext cx="2184527" cy="256480"/>
-          </a:xfrm>
-          <a:prstGeom prst="rect">
-            <a:avLst/>
-          </a:prstGeom>
-          <a:noFill/>
-          <a:ln/>
-        </p:spPr>
-        <p:txBody>
-          <a:bodyPr wrap="square" lIns="0" tIns="0" rIns="0" bIns="0" rtlCol="0" anchor="t">
-            <a:normAutofit/>
-          </a:bodyPr>
-          <a:lstStyle/>
-          <a:p>
-            <a:pPr algn="l" indent="0" marL="0">
-              <a:lnSpc>
-                <a:spcPts val="1820"/>
-              </a:lnSpc>
-              <a:buNone/>
-            </a:pPr>
-            <a:r>
-              <a:rPr lang="en-US" sz="1300" dirty="0">
-                <a:solidFill>
-                  <a:srgbClr val="C9D3E6"/>
-                </a:solidFill>
-                <a:latin typeface="Arial" pitchFamily="34" charset="0"/>
-                <a:ea typeface="Arial" pitchFamily="34" charset="-122"/>
-                <a:cs typeface="Arial" pitchFamily="34" charset="-120"/>
-              </a:rPr>
-              <a:t>Id, Nombre, Rol, Modalidad</a:t>
-            </a:r>
-            <a:endParaRPr lang="en-US" sz="1300" dirty="0"/>
-          </a:p>
-        </p:txBody>
-      </p:sp>
-      <p:sp>
-        <p:nvSpPr>
-          <p:cNvPr id="15" name="Shape 13"/>
-          <p:cNvSpPr/>
-          <p:nvPr/>
-        </p:nvSpPr>
-        <p:spPr>
-          <a:xfrm>
-            <a:off x="812800" y="3111302"/>
-            <a:ext cx="10566400" cy="1942505"/>
+            <a:off x="812800" y="3098502"/>
+            <a:ext cx="10566400" cy="2168327"/>
           </a:xfrm>
           <a:prstGeom prst="rect">
             <a:avLst/>
@@ -23243,7 +23552,7 @@
       </p:sp>
       <p:graphicFrame>
         <p:nvGraphicFramePr>
-          <p:cNvPr id="16" name="Table 0"/>
+          <p:cNvPr id="13" name="Table 0"/>
           <p:cNvGraphicFramePr>
             <a:graphicFrameLocks noGrp="1"/>
           </p:cNvGraphicFramePr>
@@ -23256,19 +23565,19 @@
           </p:nvPr>
         </p:nvGraphicFramePr>
         <p:xfrm>
-          <a:off x="825500" y="3124002"/>
-          <a:ext cx="10553700" cy="1929805"/>
+          <a:off x="825500" y="3111202"/>
+          <a:ext cx="10553700" cy="2155627"/>
         </p:xfrm>
         <a:graphic>
           <a:graphicData uri="http://schemas.openxmlformats.org/drawingml/2006/table">
             <a:tbl>
               <a:tblPr/>
               <a:tblGrid>
-                <a:gridCol w="2321814"/>
+                <a:gridCol w="1899666"/>
                 <a:gridCol w="3166110"/>
-                <a:gridCol w="5065776"/>
+                <a:gridCol w="5487924"/>
               </a:tblGrid>
-              <a:tr h="385961">
+              <a:tr h="359271">
                 <a:tc>
                   <a:txBody>
                     <a:bodyPr/>
@@ -23276,12 +23585,12 @@
                     <a:p>
                       <a:pPr indent="0" marL="0">
                         <a:lnSpc>
-                          <a:spcPts val="1960"/>
+                          <a:spcPts val="1820"/>
                         </a:lnSpc>
                         <a:buNone/>
                       </a:pPr>
                       <a:r>
-                        <a:rPr lang="en-US" sz="1400" b="1" dirty="0">
+                        <a:rPr lang="en-US" sz="1300" b="1" dirty="0">
                           <a:solidFill>
                             <a:srgbClr val="14213D"/>
                           </a:solidFill>
@@ -23291,14 +23600,14 @@
                         </a:rPr>
                         <a:t>Relación</a:t>
                       </a:r>
-                      <a:endParaRPr lang="en-US" sz="1400" dirty="0">
+                      <a:endParaRPr lang="en-US" sz="1300" dirty="0">
                         <a:latin typeface="Arial" charset="0"/>
                         <a:ea typeface="Arial" charset="0"/>
                         <a:cs typeface="Arial" charset="0"/>
                       </a:endParaRPr>
                     </a:p>
                   </a:txBody>
-                  <a:tcPr marL="62230" marR="62230" marT="62230" marB="62230" anchor="t">
+                  <a:tcPr marL="57785" marR="57785" marT="57785" marB="57785" anchor="t">
                     <a:lnL w="12700" cap="flat" cmpd="sng" algn="ctr">
                       <a:solidFill>
                         <a:srgbClr val="CBCBCB"/>
@@ -23347,12 +23656,12 @@
                     <a:p>
                       <a:pPr indent="0" marL="0">
                         <a:lnSpc>
-                          <a:spcPts val="1960"/>
+                          <a:spcPts val="1820"/>
                         </a:lnSpc>
                         <a:buNone/>
                       </a:pPr>
                       <a:r>
-                        <a:rPr lang="en-US" sz="1400" b="1" dirty="0">
+                        <a:rPr lang="en-US" sz="1300" b="1" dirty="0">
                           <a:solidFill>
                             <a:srgbClr val="14213D"/>
                           </a:solidFill>
@@ -23362,14 +23671,14 @@
                         </a:rPr>
                         <a:t>Entre</a:t>
                       </a:r>
-                      <a:endParaRPr lang="en-US" sz="1400" dirty="0">
+                      <a:endParaRPr lang="en-US" sz="1300" dirty="0">
                         <a:latin typeface="Arial" charset="0"/>
                         <a:ea typeface="Arial" charset="0"/>
                         <a:cs typeface="Arial" charset="0"/>
                       </a:endParaRPr>
                     </a:p>
                   </a:txBody>
-                  <a:tcPr marL="62230" marR="62230" marT="62230" marB="62230" anchor="t">
+                  <a:tcPr marL="57785" marR="57785" marT="57785" marB="57785" anchor="t">
                     <a:lnL w="12700" cap="flat" cmpd="sng" algn="ctr">
                       <a:solidFill>
                         <a:srgbClr val="BCBCBC"/>
@@ -23418,12 +23727,12 @@
                     <a:p>
                       <a:pPr indent="0" marL="0">
                         <a:lnSpc>
-                          <a:spcPts val="1960"/>
+                          <a:spcPts val="1820"/>
                         </a:lnSpc>
                         <a:buNone/>
                       </a:pPr>
                       <a:r>
-                        <a:rPr lang="en-US" sz="1400" b="1" dirty="0">
+                        <a:rPr lang="en-US" sz="1300" b="1" dirty="0">
                           <a:solidFill>
                             <a:srgbClr val="14213D"/>
                           </a:solidFill>
@@ -23433,14 +23742,14 @@
                         </a:rPr>
                         <a:t>Se lee</a:t>
                       </a:r>
-                      <a:endParaRPr lang="en-US" sz="1400" dirty="0">
+                      <a:endParaRPr lang="en-US" sz="1300" dirty="0">
                         <a:latin typeface="Arial" charset="0"/>
                         <a:ea typeface="Arial" charset="0"/>
                         <a:cs typeface="Arial" charset="0"/>
                       </a:endParaRPr>
                     </a:p>
                   </a:txBody>
-                  <a:tcPr marL="62230" marR="62230" marT="62230" marB="62230" anchor="t">
+                  <a:tcPr marL="57785" marR="57785" marT="57785" marB="57785" anchor="t">
                     <a:lnL w="12700" cap="flat" cmpd="sng" algn="ctr">
                       <a:solidFill>
                         <a:srgbClr val="BCBCBC"/>
@@ -23483,7 +23792,7 @@
                   </a:tcPr>
                 </a:tc>
               </a:tr>
-              <a:tr h="385961">
+              <a:tr h="359271">
                 <a:tc>
                   <a:txBody>
                     <a:bodyPr/>
@@ -23491,12 +23800,12 @@
                     <a:p>
                       <a:pPr indent="0" marL="0">
                         <a:lnSpc>
-                          <a:spcPts val="1960"/>
+                          <a:spcPts val="1820"/>
                         </a:lnSpc>
                         <a:buNone/>
                       </a:pPr>
                       <a:r>
-                        <a:rPr lang="en-US" sz="1400" dirty="0">
+                        <a:rPr lang="en-US" sz="1300" dirty="0">
                           <a:solidFill>
                             <a:srgbClr val="14213D"/>
                           </a:solidFill>
@@ -23504,16 +23813,16 @@
                           <a:ea typeface="Arial" pitchFamily="34" charset="-122"/>
                           <a:cs typeface="Arial" pitchFamily="34" charset="-120"/>
                         </a:rPr>
-                        <a:t>Pertenecen</a:t>
+                        <a:t>Participa</a:t>
                       </a:r>
-                      <a:endParaRPr lang="en-US" sz="1400" dirty="0">
+                      <a:endParaRPr lang="en-US" sz="1300" dirty="0">
                         <a:latin typeface="Arial" charset="0"/>
                         <a:ea typeface="Arial" charset="0"/>
                         <a:cs typeface="Arial" charset="0"/>
                       </a:endParaRPr>
                     </a:p>
                   </a:txBody>
-                  <a:tcPr marL="62230" marR="62230" marT="62230" marB="62230" anchor="t">
+                  <a:tcPr marL="57785" marR="57785" marT="57785" marB="57785" anchor="t">
                     <a:lnL w="12700" cap="flat" cmpd="sng" algn="ctr">
                       <a:solidFill>
                         <a:srgbClr val="CBCBCB"/>
@@ -23559,12 +23868,12 @@
                     <a:p>
                       <a:pPr indent="0" marL="0">
                         <a:lnSpc>
-                          <a:spcPts val="1960"/>
+                          <a:spcPts val="1820"/>
                         </a:lnSpc>
                         <a:buNone/>
                       </a:pPr>
                       <a:r>
-                        <a:rPr lang="en-US" sz="1400" dirty="0">
+                        <a:rPr lang="en-US" sz="1300" dirty="0">
                           <a:solidFill>
                             <a:srgbClr val="14213D"/>
                           </a:solidFill>
@@ -23572,16 +23881,16 @@
                           <a:ea typeface="Arial" pitchFamily="34" charset="-122"/>
                           <a:cs typeface="Arial" pitchFamily="34" charset="-120"/>
                         </a:rPr>
-                        <a:t>Alumnos – Promoción</a:t>
+                        <a:t>Alumno – Promoción</a:t>
                       </a:r>
-                      <a:endParaRPr lang="en-US" sz="1400" dirty="0">
+                      <a:endParaRPr lang="en-US" sz="1300" dirty="0">
                         <a:latin typeface="Arial" charset="0"/>
                         <a:ea typeface="Arial" charset="0"/>
                         <a:cs typeface="Arial" charset="0"/>
                       </a:endParaRPr>
                     </a:p>
                   </a:txBody>
-                  <a:tcPr marL="62230" marR="62230" marT="62230" marB="62230" anchor="t">
+                  <a:tcPr marL="57785" marR="57785" marT="57785" marB="57785" anchor="t">
                     <a:lnL w="12700" cap="flat" cmpd="sng" algn="ctr">
                       <a:solidFill>
                         <a:srgbClr val="CBCBCB"/>
@@ -23627,12 +23936,12 @@
                     <a:p>
                       <a:pPr indent="0" marL="0">
                         <a:lnSpc>
-                          <a:spcPts val="1960"/>
+                          <a:spcPts val="1820"/>
                         </a:lnSpc>
                         <a:buNone/>
                       </a:pPr>
                       <a:r>
-                        <a:rPr lang="en-US" sz="1400" dirty="0">
+                        <a:rPr lang="en-US" sz="1300" dirty="0">
                           <a:solidFill>
                             <a:srgbClr val="14213D"/>
                           </a:solidFill>
@@ -23642,14 +23951,14 @@
                         </a:rPr>
                         <a:t>Un alumno puede estar en varias promociones</a:t>
                       </a:r>
-                      <a:endParaRPr lang="en-US" sz="1400" dirty="0">
+                      <a:endParaRPr lang="en-US" sz="1300" dirty="0">
                         <a:latin typeface="Arial" charset="0"/>
                         <a:ea typeface="Arial" charset="0"/>
                         <a:cs typeface="Arial" charset="0"/>
                       </a:endParaRPr>
                     </a:p>
                   </a:txBody>
-                  <a:tcPr marL="62230" marR="62230" marT="62230" marB="62230" anchor="t">
+                  <a:tcPr marL="57785" marR="57785" marT="57785" marB="57785" anchor="t">
                     <a:lnL w="12700" cap="flat" cmpd="sng" algn="ctr">
                       <a:solidFill>
                         <a:srgbClr val="CBCBCB"/>
@@ -23689,7 +23998,7 @@
                   </a:tcPr>
                 </a:tc>
               </a:tr>
-              <a:tr h="385961">
+              <a:tr h="359271">
                 <a:tc>
                   <a:txBody>
                     <a:bodyPr/>
@@ -23697,12 +24006,12 @@
                     <a:p>
                       <a:pPr indent="0" marL="0">
                         <a:lnSpc>
-                          <a:spcPts val="1960"/>
+                          <a:spcPts val="1820"/>
                         </a:lnSpc>
                         <a:buNone/>
                       </a:pPr>
                       <a:r>
-                        <a:rPr lang="en-US" sz="1400" dirty="0">
+                        <a:rPr lang="en-US" sz="1300" dirty="0">
                           <a:solidFill>
                             <a:srgbClr val="14213D"/>
                           </a:solidFill>
@@ -23710,16 +24019,16 @@
                           <a:ea typeface="Arial" pitchFamily="34" charset="-122"/>
                           <a:cs typeface="Arial" pitchFamily="34" charset="-120"/>
                         </a:rPr>
-                        <a:t>Realizan</a:t>
+                        <a:t>Enseña</a:t>
                       </a:r>
-                      <a:endParaRPr lang="en-US" sz="1400" dirty="0">
+                      <a:endParaRPr lang="en-US" sz="1300" dirty="0">
                         <a:latin typeface="Arial" charset="0"/>
                         <a:ea typeface="Arial" charset="0"/>
                         <a:cs typeface="Arial" charset="0"/>
                       </a:endParaRPr>
                     </a:p>
                   </a:txBody>
-                  <a:tcPr marL="62230" marR="62230" marT="62230" marB="62230" anchor="t">
+                  <a:tcPr marL="57785" marR="57785" marT="57785" marB="57785" anchor="t">
                     <a:lnL w="12700" cap="flat" cmpd="sng" algn="ctr">
                       <a:solidFill>
                         <a:srgbClr val="CBCBCB"/>
@@ -23765,12 +24074,12 @@
                     <a:p>
                       <a:pPr indent="0" marL="0">
                         <a:lnSpc>
-                          <a:spcPts val="1960"/>
+                          <a:spcPts val="1820"/>
                         </a:lnSpc>
                         <a:buNone/>
                       </a:pPr>
                       <a:r>
-                        <a:rPr lang="en-US" sz="1400" dirty="0">
+                        <a:rPr lang="en-US" sz="1300" dirty="0">
                           <a:solidFill>
                             <a:srgbClr val="14213D"/>
                           </a:solidFill>
@@ -23778,16 +24087,16 @@
                           <a:ea typeface="Arial" pitchFamily="34" charset="-122"/>
                           <a:cs typeface="Arial" pitchFamily="34" charset="-120"/>
                         </a:rPr>
-                        <a:t>Alumnos – Proyectos</a:t>
+                        <a:t>Profesor – Promoción</a:t>
                       </a:r>
-                      <a:endParaRPr lang="en-US" sz="1400" dirty="0">
+                      <a:endParaRPr lang="en-US" sz="1300" dirty="0">
                         <a:latin typeface="Arial" charset="0"/>
                         <a:ea typeface="Arial" charset="0"/>
                         <a:cs typeface="Arial" charset="0"/>
                       </a:endParaRPr>
                     </a:p>
                   </a:txBody>
-                  <a:tcPr marL="62230" marR="62230" marT="62230" marB="62230" anchor="t">
+                  <a:tcPr marL="57785" marR="57785" marT="57785" marB="57785" anchor="t">
                     <a:lnL w="12700" cap="flat" cmpd="sng" algn="ctr">
                       <a:solidFill>
                         <a:srgbClr val="CBCBCB"/>
@@ -23833,12 +24142,12 @@
                     <a:p>
                       <a:pPr indent="0" marL="0">
                         <a:lnSpc>
-                          <a:spcPts val="1960"/>
+                          <a:spcPts val="1820"/>
                         </a:lnSpc>
                         <a:buNone/>
                       </a:pPr>
                       <a:r>
-                        <a:rPr lang="en-US" sz="1400" dirty="0">
+                        <a:rPr lang="en-US" sz="1300" dirty="0">
                           <a:solidFill>
                             <a:srgbClr val="14213D"/>
                           </a:solidFill>
@@ -23846,16 +24155,16 @@
                           <a:ea typeface="Arial" pitchFamily="34" charset="-122"/>
                           <a:cs typeface="Arial" pitchFamily="34" charset="-120"/>
                         </a:rPr>
-                        <a:t>Con el atributo Evaluación</a:t>
+                        <a:t>Qué profesores da cada promoción</a:t>
                       </a:r>
-                      <a:endParaRPr lang="en-US" sz="1400" dirty="0">
+                      <a:endParaRPr lang="en-US" sz="1300" dirty="0">
                         <a:latin typeface="Arial" charset="0"/>
                         <a:ea typeface="Arial" charset="0"/>
                         <a:cs typeface="Arial" charset="0"/>
                       </a:endParaRPr>
                     </a:p>
                   </a:txBody>
-                  <a:tcPr marL="62230" marR="62230" marT="62230" marB="62230" anchor="t">
+                  <a:tcPr marL="57785" marR="57785" marT="57785" marB="57785" anchor="t">
                     <a:lnL w="12700" cap="flat" cmpd="sng" algn="ctr">
                       <a:solidFill>
                         <a:srgbClr val="CBCBCB"/>
@@ -23895,7 +24204,7 @@
                   </a:tcPr>
                 </a:tc>
               </a:tr>
-              <a:tr h="385961">
+              <a:tr h="359271">
                 <a:tc>
                   <a:txBody>
                     <a:bodyPr/>
@@ -23903,12 +24212,12 @@
                     <a:p>
                       <a:pPr indent="0" marL="0">
                         <a:lnSpc>
-                          <a:spcPts val="1960"/>
+                          <a:spcPts val="1820"/>
                         </a:lnSpc>
                         <a:buNone/>
                       </a:pPr>
                       <a:r>
-                        <a:rPr lang="en-US" sz="1400" dirty="0">
+                        <a:rPr lang="en-US" sz="1300" dirty="0">
                           <a:solidFill>
                             <a:srgbClr val="14213D"/>
                           </a:solidFill>
@@ -23916,16 +24225,16 @@
                           <a:ea typeface="Arial" pitchFamily="34" charset="-122"/>
                           <a:cs typeface="Arial" pitchFamily="34" charset="-120"/>
                         </a:rPr>
-                        <a:t>Tienen</a:t>
+                        <a:t>Realizan</a:t>
                       </a:r>
-                      <a:endParaRPr lang="en-US" sz="1400" dirty="0">
+                      <a:endParaRPr lang="en-US" sz="1300" dirty="0">
                         <a:latin typeface="Arial" charset="0"/>
                         <a:ea typeface="Arial" charset="0"/>
                         <a:cs typeface="Arial" charset="0"/>
                       </a:endParaRPr>
                     </a:p>
                   </a:txBody>
-                  <a:tcPr marL="62230" marR="62230" marT="62230" marB="62230" anchor="t">
+                  <a:tcPr marL="57785" marR="57785" marT="57785" marB="57785" anchor="t">
                     <a:lnL w="12700" cap="flat" cmpd="sng" algn="ctr">
                       <a:solidFill>
                         <a:srgbClr val="CBCBCB"/>
@@ -23971,12 +24280,12 @@
                     <a:p>
                       <a:pPr indent="0" marL="0">
                         <a:lnSpc>
-                          <a:spcPts val="1960"/>
+                          <a:spcPts val="1820"/>
                         </a:lnSpc>
                         <a:buNone/>
                       </a:pPr>
                       <a:r>
-                        <a:rPr lang="en-US" sz="1400" dirty="0">
+                        <a:rPr lang="en-US" sz="1300" dirty="0">
                           <a:solidFill>
                             <a:srgbClr val="14213D"/>
                           </a:solidFill>
@@ -23984,16 +24293,16 @@
                           <a:ea typeface="Arial" pitchFamily="34" charset="-122"/>
                           <a:cs typeface="Arial" pitchFamily="34" charset="-120"/>
                         </a:rPr>
-                        <a:t>Promoción – Proyectos</a:t>
+                        <a:t>Alumno – Proyecto</a:t>
                       </a:r>
-                      <a:endParaRPr lang="en-US" sz="1400" dirty="0">
+                      <a:endParaRPr lang="en-US" sz="1300" dirty="0">
                         <a:latin typeface="Arial" charset="0"/>
                         <a:ea typeface="Arial" charset="0"/>
                         <a:cs typeface="Arial" charset="0"/>
                       </a:endParaRPr>
                     </a:p>
                   </a:txBody>
-                  <a:tcPr marL="62230" marR="62230" marT="62230" marB="62230" anchor="t">
+                  <a:tcPr marL="57785" marR="57785" marT="57785" marB="57785" anchor="t">
                     <a:lnL w="12700" cap="flat" cmpd="sng" algn="ctr">
                       <a:solidFill>
                         <a:srgbClr val="CBCBCB"/>
@@ -24039,12 +24348,12 @@
                     <a:p>
                       <a:pPr indent="0" marL="0">
                         <a:lnSpc>
-                          <a:spcPts val="1960"/>
+                          <a:spcPts val="1820"/>
                         </a:lnSpc>
                         <a:buNone/>
                       </a:pPr>
                       <a:r>
-                        <a:rPr lang="en-US" sz="1400" dirty="0">
+                        <a:rPr lang="en-US" sz="1300" dirty="0">
                           <a:solidFill>
                             <a:srgbClr val="14213D"/>
                           </a:solidFill>
@@ -24052,16 +24361,16 @@
                           <a:ea typeface="Arial" pitchFamily="34" charset="-122"/>
                           <a:cs typeface="Arial" pitchFamily="34" charset="-120"/>
                         </a:rPr>
-                        <a:t>Qué proyectos tiene cada promoción</a:t>
+                        <a:t>Con el atributo Evaluación</a:t>
                       </a:r>
-                      <a:endParaRPr lang="en-US" sz="1400" dirty="0">
+                      <a:endParaRPr lang="en-US" sz="1300" dirty="0">
                         <a:latin typeface="Arial" charset="0"/>
                         <a:ea typeface="Arial" charset="0"/>
                         <a:cs typeface="Arial" charset="0"/>
                       </a:endParaRPr>
                     </a:p>
                   </a:txBody>
-                  <a:tcPr marL="62230" marR="62230" marT="62230" marB="62230" anchor="t">
+                  <a:tcPr marL="57785" marR="57785" marT="57785" marB="57785" anchor="t">
                     <a:lnL w="12700" cap="flat" cmpd="sng" algn="ctr">
                       <a:solidFill>
                         <a:srgbClr val="CBCBCB"/>
@@ -24101,7 +24410,7 @@
                   </a:tcPr>
                 </a:tc>
               </a:tr>
-              <a:tr h="385961">
+              <a:tr h="359271">
                 <a:tc>
                   <a:txBody>
                     <a:bodyPr/>
@@ -24109,12 +24418,12 @@
                     <a:p>
                       <a:pPr indent="0" marL="0">
                         <a:lnSpc>
-                          <a:spcPts val="1960"/>
+                          <a:spcPts val="1820"/>
                         </a:lnSpc>
                         <a:buNone/>
                       </a:pPr>
                       <a:r>
-                        <a:rPr lang="en-US" sz="1400" dirty="0">
+                        <a:rPr lang="en-US" sz="1300" dirty="0">
                           <a:solidFill>
                             <a:srgbClr val="14213D"/>
                           </a:solidFill>
@@ -24122,16 +24431,16 @@
                           <a:ea typeface="Arial" pitchFamily="34" charset="-122"/>
                           <a:cs typeface="Arial" pitchFamily="34" charset="-120"/>
                         </a:rPr>
-                        <a:t>Tiene</a:t>
+                        <a:t>Tienen</a:t>
                       </a:r>
-                      <a:endParaRPr lang="en-US" sz="1400" dirty="0">
+                      <a:endParaRPr lang="en-US" sz="1300" dirty="0">
                         <a:latin typeface="Arial" charset="0"/>
                         <a:ea typeface="Arial" charset="0"/>
                         <a:cs typeface="Arial" charset="0"/>
                       </a:endParaRPr>
                     </a:p>
                   </a:txBody>
-                  <a:tcPr marL="62230" marR="62230" marT="62230" marB="62230" anchor="t">
+                  <a:tcPr marL="57785" marR="57785" marT="57785" marB="57785" anchor="t">
                     <a:lnL w="12700" cap="flat" cmpd="sng" algn="ctr">
                       <a:solidFill>
                         <a:srgbClr val="CBCBCB"/>
@@ -24177,12 +24486,12 @@
                     <a:p>
                       <a:pPr indent="0" marL="0">
                         <a:lnSpc>
-                          <a:spcPts val="1960"/>
+                          <a:spcPts val="1820"/>
                         </a:lnSpc>
                         <a:buNone/>
                       </a:pPr>
                       <a:r>
-                        <a:rPr lang="en-US" sz="1400" dirty="0">
+                        <a:rPr lang="en-US" sz="1300" dirty="0">
                           <a:solidFill>
                             <a:srgbClr val="14213D"/>
                           </a:solidFill>
@@ -24190,16 +24499,16 @@
                           <a:ea typeface="Arial" pitchFamily="34" charset="-122"/>
                           <a:cs typeface="Arial" pitchFamily="34" charset="-120"/>
                         </a:rPr>
-                        <a:t>Promoción – Claustro</a:t>
+                        <a:t>Promoción – Proyecto</a:t>
                       </a:r>
-                      <a:endParaRPr lang="en-US" sz="1400" dirty="0">
+                      <a:endParaRPr lang="en-US" sz="1300" dirty="0">
                         <a:latin typeface="Arial" charset="0"/>
                         <a:ea typeface="Arial" charset="0"/>
                         <a:cs typeface="Arial" charset="0"/>
                       </a:endParaRPr>
                     </a:p>
                   </a:txBody>
-                  <a:tcPr marL="62230" marR="62230" marT="62230" marB="62230" anchor="t">
+                  <a:tcPr marL="57785" marR="57785" marT="57785" marB="57785" anchor="t">
                     <a:lnL w="12700" cap="flat" cmpd="sng" algn="ctr">
                       <a:solidFill>
                         <a:srgbClr val="CBCBCB"/>
@@ -24245,12 +24554,12 @@
                     <a:p>
                       <a:pPr indent="0" marL="0">
                         <a:lnSpc>
-                          <a:spcPts val="1960"/>
+                          <a:spcPts val="1820"/>
                         </a:lnSpc>
                         <a:buNone/>
                       </a:pPr>
                       <a:r>
-                        <a:rPr lang="en-US" sz="1400" dirty="0">
+                        <a:rPr lang="en-US" sz="1300" dirty="0">
                           <a:solidFill>
                             <a:srgbClr val="14213D"/>
                           </a:solidFill>
@@ -24258,16 +24567,222 @@
                           <a:ea typeface="Arial" pitchFamily="34" charset="-122"/>
                           <a:cs typeface="Arial" pitchFamily="34" charset="-120"/>
                         </a:rPr>
-                        <a:t>Qué profesores da cada promoción</a:t>
+                        <a:t>Qué proyectos tiene cada promoción</a:t>
                       </a:r>
-                      <a:endParaRPr lang="en-US" sz="1400" dirty="0">
+                      <a:endParaRPr lang="en-US" sz="1300" dirty="0">
                         <a:latin typeface="Arial" charset="0"/>
                         <a:ea typeface="Arial" charset="0"/>
                         <a:cs typeface="Arial" charset="0"/>
                       </a:endParaRPr>
                     </a:p>
                   </a:txBody>
-                  <a:tcPr marL="62230" marR="62230" marT="62230" marB="62230" anchor="t">
+                  <a:tcPr marL="57785" marR="57785" marT="57785" marB="57785" anchor="t">
+                    <a:lnL w="12700" cap="flat" cmpd="sng" algn="ctr">
+                      <a:solidFill>
+                        <a:srgbClr val="CBCBCB"/>
+                      </a:solidFill>
+                      <a:prstDash val="solid"/>
+                      <a:round/>
+                      <a:headEnd type="none" w="med" len="med"/>
+                      <a:tailEnd type="none" w="med" len="med"/>
+                    </a:lnL>
+                    <a:lnR w="12700" cap="flat" cmpd="sng" algn="ctr">
+                      <a:solidFill>
+                        <a:srgbClr val="CBCBCB"/>
+                      </a:solidFill>
+                      <a:prstDash val="solid"/>
+                      <a:round/>
+                      <a:headEnd type="none" w="med" len="med"/>
+                      <a:tailEnd type="none" w="med" len="med"/>
+                    </a:lnR>
+                    <a:lnT w="12700" cap="flat" cmpd="sng" algn="ctr">
+                      <a:solidFill>
+                        <a:srgbClr val="CBCBCB"/>
+                      </a:solidFill>
+                      <a:prstDash val="solid"/>
+                      <a:round/>
+                      <a:headEnd type="none" w="med" len="med"/>
+                      <a:tailEnd type="none" w="med" len="med"/>
+                    </a:lnT>
+                    <a:lnB w="12700" cap="flat" cmpd="sng" algn="ctr">
+                      <a:solidFill>
+                        <a:srgbClr val="CBCBCB"/>
+                      </a:solidFill>
+                      <a:prstDash val="solid"/>
+                      <a:round/>
+                      <a:headEnd type="none" w="med" len="med"/>
+                      <a:tailEnd type="none" w="med" len="med"/>
+                    </a:lnB>
+                  </a:tcPr>
+                </a:tc>
+              </a:tr>
+              <a:tr h="359271">
+                <a:tc>
+                  <a:txBody>
+                    <a:bodyPr/>
+                    <a:lstStyle/>
+                    <a:p>
+                      <a:pPr indent="0" marL="0">
+                        <a:lnSpc>
+                          <a:spcPts val="1820"/>
+                        </a:lnSpc>
+                        <a:buNone/>
+                      </a:pPr>
+                      <a:r>
+                        <a:rPr lang="en-US" sz="1300" dirty="0">
+                          <a:solidFill>
+                            <a:srgbClr val="14213D"/>
+                          </a:solidFill>
+                          <a:latin typeface="Arial" pitchFamily="34" charset="0"/>
+                          <a:ea typeface="Arial" pitchFamily="34" charset="-122"/>
+                          <a:cs typeface="Arial" pitchFamily="34" charset="-120"/>
+                        </a:rPr>
+                        <a:t>Corrigen</a:t>
+                      </a:r>
+                      <a:endParaRPr lang="en-US" sz="1300" dirty="0">
+                        <a:latin typeface="Arial" charset="0"/>
+                        <a:ea typeface="Arial" charset="0"/>
+                        <a:cs typeface="Arial" charset="0"/>
+                      </a:endParaRPr>
+                    </a:p>
+                  </a:txBody>
+                  <a:tcPr marL="57785" marR="57785" marT="57785" marB="57785" anchor="t">
+                    <a:lnL w="12700" cap="flat" cmpd="sng" algn="ctr">
+                      <a:solidFill>
+                        <a:srgbClr val="CBCBCB"/>
+                      </a:solidFill>
+                      <a:prstDash val="solid"/>
+                      <a:round/>
+                      <a:headEnd type="none" w="med" len="med"/>
+                      <a:tailEnd type="none" w="med" len="med"/>
+                    </a:lnL>
+                    <a:lnR w="12700" cap="flat" cmpd="sng" algn="ctr">
+                      <a:solidFill>
+                        <a:srgbClr val="CBCBCB"/>
+                      </a:solidFill>
+                      <a:prstDash val="solid"/>
+                      <a:round/>
+                      <a:headEnd type="none" w="med" len="med"/>
+                      <a:tailEnd type="none" w="med" len="med"/>
+                    </a:lnR>
+                    <a:lnT w="12700" cap="flat" cmpd="sng" algn="ctr">
+                      <a:solidFill>
+                        <a:srgbClr val="CBCBCB"/>
+                      </a:solidFill>
+                      <a:prstDash val="solid"/>
+                      <a:round/>
+                      <a:headEnd type="none" w="med" len="med"/>
+                      <a:tailEnd type="none" w="med" len="med"/>
+                    </a:lnT>
+                    <a:lnB w="12700" cap="flat" cmpd="sng" algn="ctr">
+                      <a:solidFill>
+                        <a:srgbClr val="CBCBCB"/>
+                      </a:solidFill>
+                      <a:prstDash val="solid"/>
+                      <a:round/>
+                      <a:headEnd type="none" w="med" len="med"/>
+                      <a:tailEnd type="none" w="med" len="med"/>
+                    </a:lnB>
+                  </a:tcPr>
+                </a:tc>
+                <a:tc>
+                  <a:txBody>
+                    <a:bodyPr/>
+                    <a:lstStyle/>
+                    <a:p>
+                      <a:pPr indent="0" marL="0">
+                        <a:lnSpc>
+                          <a:spcPts val="1820"/>
+                        </a:lnSpc>
+                        <a:buNone/>
+                      </a:pPr>
+                      <a:r>
+                        <a:rPr lang="en-US" sz="1300" dirty="0">
+                          <a:solidFill>
+                            <a:srgbClr val="14213D"/>
+                          </a:solidFill>
+                          <a:latin typeface="Arial" pitchFamily="34" charset="0"/>
+                          <a:ea typeface="Arial" pitchFamily="34" charset="-122"/>
+                          <a:cs typeface="Arial" pitchFamily="34" charset="-120"/>
+                        </a:rPr>
+                        <a:t>Profesor – Proyecto</a:t>
+                      </a:r>
+                      <a:endParaRPr lang="en-US" sz="1300" dirty="0">
+                        <a:latin typeface="Arial" charset="0"/>
+                        <a:ea typeface="Arial" charset="0"/>
+                        <a:cs typeface="Arial" charset="0"/>
+                      </a:endParaRPr>
+                    </a:p>
+                  </a:txBody>
+                  <a:tcPr marL="57785" marR="57785" marT="57785" marB="57785" anchor="t">
+                    <a:lnL w="12700" cap="flat" cmpd="sng" algn="ctr">
+                      <a:solidFill>
+                        <a:srgbClr val="CBCBCB"/>
+                      </a:solidFill>
+                      <a:prstDash val="solid"/>
+                      <a:round/>
+                      <a:headEnd type="none" w="med" len="med"/>
+                      <a:tailEnd type="none" w="med" len="med"/>
+                    </a:lnL>
+                    <a:lnR w="12700" cap="flat" cmpd="sng" algn="ctr">
+                      <a:solidFill>
+                        <a:srgbClr val="CBCBCB"/>
+                      </a:solidFill>
+                      <a:prstDash val="solid"/>
+                      <a:round/>
+                      <a:headEnd type="none" w="med" len="med"/>
+                      <a:tailEnd type="none" w="med" len="med"/>
+                    </a:lnR>
+                    <a:lnT w="12700" cap="flat" cmpd="sng" algn="ctr">
+                      <a:solidFill>
+                        <a:srgbClr val="CBCBCB"/>
+                      </a:solidFill>
+                      <a:prstDash val="solid"/>
+                      <a:round/>
+                      <a:headEnd type="none" w="med" len="med"/>
+                      <a:tailEnd type="none" w="med" len="med"/>
+                    </a:lnT>
+                    <a:lnB w="12700" cap="flat" cmpd="sng" algn="ctr">
+                      <a:solidFill>
+                        <a:srgbClr val="CBCBCB"/>
+                      </a:solidFill>
+                      <a:prstDash val="solid"/>
+                      <a:round/>
+                      <a:headEnd type="none" w="med" len="med"/>
+                      <a:tailEnd type="none" w="med" len="med"/>
+                    </a:lnB>
+                  </a:tcPr>
+                </a:tc>
+                <a:tc>
+                  <a:txBody>
+                    <a:bodyPr/>
+                    <a:lstStyle/>
+                    <a:p>
+                      <a:pPr indent="0" marL="0">
+                        <a:lnSpc>
+                          <a:spcPts val="1820"/>
+                        </a:lnSpc>
+                        <a:buNone/>
+                      </a:pPr>
+                      <a:r>
+                        <a:rPr lang="en-US" sz="1300" dirty="0">
+                          <a:solidFill>
+                            <a:srgbClr val="14213D"/>
+                          </a:solidFill>
+                          <a:latin typeface="Arial" pitchFamily="34" charset="0"/>
+                          <a:ea typeface="Arial" pitchFamily="34" charset="-122"/>
+                          <a:cs typeface="Arial" pitchFamily="34" charset="-120"/>
+                        </a:rPr>
+                        <a:t>Quién corrige cada proyecto</a:t>
+                      </a:r>
+                      <a:endParaRPr lang="en-US" sz="1300" dirty="0">
+                        <a:latin typeface="Arial" charset="0"/>
+                        <a:ea typeface="Arial" charset="0"/>
+                        <a:cs typeface="Arial" charset="0"/>
+                      </a:endParaRPr>
+                    </a:p>
+                  </a:txBody>
+                  <a:tcPr marL="57785" marR="57785" marT="57785" marB="57785" anchor="t">
                     <a:lnL w="12700" cap="flat" cmpd="sng" algn="ctr">
                       <a:solidFill>
                         <a:srgbClr val="CBCBCB"/>
@@ -24313,7 +24828,7 @@
       </p:graphicFrame>
       <p:sp>
         <p:nvSpPr>
-          <p:cNvPr id="17" name="Text 14"/>
+          <p:cNvPr id="14" name="Text 11"/>
           <p:cNvSpPr/>
           <p:nvPr/>
         </p:nvSpPr>
@@ -24357,7 +24872,7 @@
       </p:sp>
       <p:sp>
         <p:nvSpPr>
-          <p:cNvPr id="18" name="Text 15"/>
+          <p:cNvPr id="15" name="Text 12"/>
           <p:cNvSpPr/>
           <p:nvPr/>
         </p:nvSpPr>
@@ -24486,11 +25001,11 @@
         <p:spPr>
           <a:xfrm>
             <a:off x="812800" y="1518841"/>
-            <a:ext cx="7493000" cy="4013200"/>
+            <a:ext cx="6350000" cy="4318000"/>
           </a:xfrm>
           <a:prstGeom prst="roundRect">
             <a:avLst>
-              <a:gd name="adj" fmla="val 2532"/>
+              <a:gd name="adj" fmla="val 2353"/>
             </a:avLst>
           </a:prstGeom>
           <a:solidFill>
@@ -24501,7 +25016,7 @@
       </p:sp>
       <p:pic>
         <p:nvPicPr>
-          <p:cNvPr id="4" name="Image 0" descr="Diagrama Entidad-Relación del proyecto hecho en draw.io">    </p:cNvPr>
+          <p:cNvPr id="4" name="Image 0" descr="Diagrama Entidad-Relación con Persona generalizada en Alumno y Profesor, hecho en draw.io">    </p:cNvPr>
           <p:cNvPicPr>
             <a:picLocks noChangeAspect="1"/>
           </p:cNvPicPr>
@@ -24515,8 +25030,8 @@
         </p:blipFill>
         <p:spPr>
           <a:xfrm>
-            <a:off x="825500" y="1696285"/>
-            <a:ext cx="7467600" cy="3658311"/>
+            <a:off x="2059816" y="1531541"/>
+            <a:ext cx="3855968" cy="4292600"/>
           </a:xfrm>
           <a:prstGeom prst="rect">
             <a:avLst/>
@@ -24532,11 +25047,11 @@
         <p:spPr>
           <a:xfrm>
             <a:off x="819150" y="1525191"/>
-            <a:ext cx="7480300" cy="4000500"/>
+            <a:ext cx="6337300" cy="4305300"/>
           </a:xfrm>
           <a:prstGeom prst="roundRect">
             <a:avLst>
-              <a:gd name="adj" fmla="val 2381"/>
+              <a:gd name="adj" fmla="val 2212"/>
             </a:avLst>
           </a:prstGeom>
           <a:noFill/>
@@ -24556,8 +25071,8 @@
         </p:nvSpPr>
         <p:spPr>
           <a:xfrm>
-            <a:off x="8559800" y="2622649"/>
-            <a:ext cx="2903982" cy="256480"/>
+            <a:off x="7416800" y="2474119"/>
+            <a:ext cx="4081272" cy="256480"/>
           </a:xfrm>
           <a:prstGeom prst="rect">
             <a:avLst/>
@@ -24597,7 +25112,29 @@
                 <a:ea typeface="Arial" pitchFamily="34" charset="-122"/>
                 <a:cs typeface="Arial" pitchFamily="34" charset="-120"/>
               </a:rPr>
-              <a:t> = entidad</a:t>
+              <a:t> = entidad · </a:t>
+            </a:r>
+            <a:r>
+              <a:rPr lang="en-US" sz="1300" b="1" dirty="0">
+                <a:solidFill>
+                  <a:srgbClr val="14213D"/>
+                </a:solidFill>
+                <a:latin typeface="Arial" pitchFamily="34" charset="0"/>
+                <a:ea typeface="Arial" pitchFamily="34" charset="-122"/>
+                <a:cs typeface="Arial" pitchFamily="34" charset="-120"/>
+              </a:rPr>
+              <a:t>Rombo</a:t>
+            </a:r>
+            <a:r>
+              <a:rPr lang="en-US" sz="1300" dirty="0">
+                <a:solidFill>
+                  <a:srgbClr val="3E4A5E"/>
+                </a:solidFill>
+                <a:latin typeface="Arial" pitchFamily="34" charset="0"/>
+                <a:ea typeface="Arial" pitchFamily="34" charset="-122"/>
+                <a:cs typeface="Arial" pitchFamily="34" charset="-120"/>
+              </a:rPr>
+              <a:t> = relación</a:t>
             </a:r>
             <a:endParaRPr lang="en-US" sz="1300" dirty="0"/>
           </a:p>
@@ -24611,8 +25148,8 @@
         </p:nvSpPr>
         <p:spPr>
           <a:xfrm>
-            <a:off x="8559800" y="2993430"/>
-            <a:ext cx="2903982" cy="487561"/>
+            <a:off x="7416800" y="2844899"/>
+            <a:ext cx="4081272" cy="256480"/>
           </a:xfrm>
           <a:prstGeom prst="rect">
             <a:avLst/>
@@ -24652,10 +25189,56 @@
                 <a:ea typeface="Arial" pitchFamily="34" charset="-122"/>
                 <a:cs typeface="Arial" pitchFamily="34" charset="-120"/>
               </a:rPr>
-              <a:t> = atributo </a:t>
+              <a:t> = atributo (</a:t>
+            </a:r>
+            <a:r>
+              <a:rPr lang="en-US" sz="1300" u="sng" dirty="0">
+                <a:solidFill>
+                  <a:srgbClr val="3E4A5E"/>
+                </a:solidFill>
+                <a:latin typeface="Arial" pitchFamily="34" charset="0"/>
+                <a:ea typeface="Arial" pitchFamily="34" charset="-122"/>
+                <a:cs typeface="Arial" pitchFamily="34" charset="-120"/>
+              </a:rPr>
+              <a:t>subrayado</a:t>
+            </a:r>
+            <a:r>
+              <a:rPr lang="en-US" sz="1300" dirty="0">
+                <a:solidFill>
+                  <a:srgbClr val="3E4A5E"/>
+                </a:solidFill>
+                <a:latin typeface="Arial" pitchFamily="34" charset="0"/>
+                <a:ea typeface="Arial" pitchFamily="34" charset="-122"/>
+                <a:cs typeface="Arial" pitchFamily="34" charset="-120"/>
+              </a:rPr>
+              <a:t> = clave primaria)</a:t>
             </a:r>
             <a:endParaRPr lang="en-US" sz="1300" dirty="0"/>
           </a:p>
+        </p:txBody>
+      </p:sp>
+      <p:sp>
+        <p:nvSpPr>
+          <p:cNvPr id="8" name="Text 5"/>
+          <p:cNvSpPr/>
+          <p:nvPr/>
+        </p:nvSpPr>
+        <p:spPr>
+          <a:xfrm>
+            <a:off x="7416800" y="3215680"/>
+            <a:ext cx="4081272" cy="487561"/>
+          </a:xfrm>
+          <a:prstGeom prst="rect">
+            <a:avLst/>
+          </a:prstGeom>
+          <a:noFill/>
+          <a:ln/>
+        </p:spPr>
+        <p:txBody>
+          <a:bodyPr wrap="square" lIns="0" tIns="0" rIns="0" bIns="0" rtlCol="0" anchor="t">
+            <a:normAutofit/>
+          </a:bodyPr>
+          <a:lstStyle/>
           <a:p>
             <a:pPr algn="l" indent="0" marL="0">
               <a:lnSpc>
@@ -24664,6 +25247,17 @@
               <a:buNone/>
             </a:pPr>
             <a:r>
+              <a:rPr lang="en-US" sz="1300" b="1" dirty="0">
+                <a:solidFill>
+                  <a:srgbClr val="14213D"/>
+                </a:solidFill>
+                <a:latin typeface="Arial" pitchFamily="34" charset="0"/>
+                <a:ea typeface="Arial" pitchFamily="34" charset="-122"/>
+                <a:cs typeface="Arial" pitchFamily="34" charset="-120"/>
+              </a:rPr>
+              <a:t>Triángulo</a:t>
+            </a:r>
+            <a:r>
               <a:rPr lang="en-US" sz="1300" dirty="0">
                 <a:solidFill>
                   <a:srgbClr val="3E4A5E"/>
@@ -24672,29 +25266,7 @@
                 <a:ea typeface="Arial" pitchFamily="34" charset="-122"/>
                 <a:cs typeface="Arial" pitchFamily="34" charset="-120"/>
               </a:rPr>
-              <a:t>(</a:t>
-            </a:r>
-            <a:r>
-              <a:rPr lang="en-US" sz="1300" u="sng" dirty="0">
-                <a:solidFill>
-                  <a:srgbClr val="3E4A5E"/>
-                </a:solidFill>
-                <a:latin typeface="Arial" pitchFamily="34" charset="0"/>
-                <a:ea typeface="Arial" pitchFamily="34" charset="-122"/>
-                <a:cs typeface="Arial" pitchFamily="34" charset="-120"/>
-              </a:rPr>
-              <a:t>subrayado</a:t>
-            </a:r>
-            <a:r>
-              <a:rPr lang="en-US" sz="1300" dirty="0">
-                <a:solidFill>
-                  <a:srgbClr val="3E4A5E"/>
-                </a:solidFill>
-                <a:latin typeface="Arial" pitchFamily="34" charset="0"/>
-                <a:ea typeface="Arial" pitchFamily="34" charset="-122"/>
-                <a:cs typeface="Arial" pitchFamily="34" charset="-120"/>
-              </a:rPr>
-              <a:t> = primaryKey)</a:t>
+              <a:t> = herencia parcial y solapada: una persona puede ser alumno, profesor o los dos</a:t>
             </a:r>
             <a:endParaRPr lang="en-US" sz="1300" dirty="0"/>
           </a:p>
@@ -24702,14 +25274,14 @@
       </p:sp>
       <p:sp>
         <p:nvSpPr>
-          <p:cNvPr id="8" name="Text 5"/>
-          <p:cNvSpPr/>
-          <p:nvPr/>
-        </p:nvSpPr>
-        <p:spPr>
-          <a:xfrm>
-            <a:off x="8559800" y="3595291"/>
-            <a:ext cx="2903982" cy="256480"/>
+          <p:cNvPr id="9" name="Text 6"/>
+          <p:cNvSpPr/>
+          <p:nvPr/>
+        </p:nvSpPr>
+        <p:spPr>
+          <a:xfrm>
+            <a:off x="7416800" y="3817541"/>
+            <a:ext cx="4081272" cy="487561"/>
           </a:xfrm>
           <a:prstGeom prst="rect">
             <a:avLst/>
@@ -24738,7 +25310,7 @@
                 <a:ea typeface="Arial" pitchFamily="34" charset="-122"/>
                 <a:cs typeface="Arial" pitchFamily="34" charset="-120"/>
               </a:rPr>
-              <a:t>Rombo</a:t>
+              <a:t>Elipse discontinua</a:t>
             </a:r>
             <a:r>
               <a:rPr lang="en-US" sz="1300" dirty="0">
@@ -24749,7 +25321,7 @@
                 <a:ea typeface="Arial" pitchFamily="34" charset="-122"/>
                 <a:cs typeface="Arial" pitchFamily="34" charset="-120"/>
               </a:rPr>
-              <a:t> = relación</a:t>
+              <a:t> = atributo derivado: MesPromoción sale de la fecha</a:t>
             </a:r>
             <a:endParaRPr lang="en-US" sz="1300" dirty="0"/>
           </a:p>
@@ -24757,14 +25329,14 @@
       </p:sp>
       <p:sp>
         <p:nvSpPr>
-          <p:cNvPr id="9" name="Text 6"/>
-          <p:cNvSpPr/>
-          <p:nvPr/>
-        </p:nvSpPr>
-        <p:spPr>
-          <a:xfrm>
-            <a:off x="8559800" y="3966071"/>
-            <a:ext cx="2903982" cy="487561"/>
+          <p:cNvPr id="10" name="Text 7"/>
+          <p:cNvSpPr/>
+          <p:nvPr/>
+        </p:nvSpPr>
+        <p:spPr>
+          <a:xfrm>
+            <a:off x="7416800" y="4419402"/>
+            <a:ext cx="4081272" cy="487561"/>
           </a:xfrm>
           <a:prstGeom prst="rect">
             <a:avLst/>
@@ -24804,7 +25376,7 @@
                 <a:ea typeface="Arial" pitchFamily="34" charset="-122"/>
                 <a:cs typeface="Arial" pitchFamily="34" charset="-120"/>
               </a:rPr>
-              <a:t> cuelga del rombo: es de “este alumno en este proyecto”</a:t>
+              <a:t> cuelga de Realizan: es de “este alumno en este proyecto”</a:t>
             </a:r>
             <a:endParaRPr lang="en-US" sz="1300" dirty="0"/>
           </a:p>
@@ -24812,7 +25384,7 @@
       </p:sp>
       <p:sp>
         <p:nvSpPr>
-          <p:cNvPr id="10" name="Text 7"/>
+          <p:cNvPr id="11" name="Text 8"/>
           <p:cNvSpPr/>
           <p:nvPr/>
         </p:nvSpPr>
@@ -24856,7 +25428,7 @@
       </p:sp>
       <p:sp>
         <p:nvSpPr>
-          <p:cNvPr id="11" name="Text 8"/>
+          <p:cNvPr id="12" name="Text 9"/>
           <p:cNvSpPr/>
           <p:nvPr/>
         </p:nvSpPr>
@@ -24926,10 +25498,10 @@
         <a:srgbClr val="2F6FEB"/>
       </a:accent1>
       <a:accent2>
-        <a:srgbClr val="22325A"/>
+        <a:srgbClr val="F2A65A"/>
       </a:accent2>
       <a:accent3>
-        <a:srgbClr val="F2A65A"/>
+        <a:srgbClr val="22325A"/>
       </a:accent3>
       <a:accent4>
         <a:srgbClr val="1F7A4D"/>
